--- a/skills/overview-deck/assets/skeletons/recipe_title_ov20i.pptx
+++ b/skills/overview-deck/assets/skeletons/recipe_title_ov20i.pptx
@@ -712,7 +712,7 @@
     </p:bg>
     <p:spTree>
       <p:nvGrpSpPr>
-        <p:cNvPr id="65" name="Shape 65"/>
+        <p:cNvPr id="54" name="Shape 54"/>
         <p:cNvGrpSpPr/>
         <p:nvPr/>
       </p:nvGrpSpPr>
@@ -726,7 +726,7 @@
       </p:grpSpPr>
       <p:sp>
         <p:nvSpPr>
-          <p:cNvPr id="66" name="Google Shape;66;p16"/>
+          <p:cNvPr id="55" name="Google Shape;55;p14"/>
           <p:cNvSpPr txBox="1"/>
           <p:nvPr>
             <p:ph type="title"/>
@@ -734,8 +734,8 @@
         </p:nvSpPr>
         <p:spPr>
           <a:xfrm>
-            <a:off x="379790" y="1883053"/>
-            <a:ext cx="5225469" cy="3010725"/>
+            <a:off x="379790" y="1883006"/>
+            <a:ext cx="5225477" cy="3010650"/>
           </a:xfrm>
           <a:prstGeom prst="rect">
             <a:avLst/>
@@ -910,14 +910,14 @@
       </p:sp>
       <p:sp>
         <p:nvSpPr>
-          <p:cNvPr id="67" name="Google Shape;67;p16"/>
+          <p:cNvPr id="56" name="Google Shape;56;p14"/>
           <p:cNvSpPr/>
           <p:nvPr/>
         </p:nvSpPr>
         <p:spPr>
           <a:xfrm>
-            <a:off x="6108981" y="0"/>
-            <a:ext cx="6082648" cy="6857828"/>
+            <a:off x="6108991" y="0"/>
+            <a:ext cx="6082658" cy="6857656"/>
           </a:xfrm>
           <a:prstGeom prst="rect">
             <a:avLst/>
@@ -977,7 +977,7 @@
       </p:sp>
       <p:sp>
         <p:nvSpPr>
-          <p:cNvPr id="68" name="Google Shape;68;p16"/>
+          <p:cNvPr id="57" name="Google Shape;57;p14"/>
           <p:cNvSpPr txBox="1"/>
           <p:nvPr>
             <p:ph idx="1" type="body"/>
@@ -985,8 +985,8 @@
         </p:nvSpPr>
         <p:spPr>
           <a:xfrm>
-            <a:off x="369989" y="371791"/>
-            <a:ext cx="5110272" cy="183195"/>
+            <a:off x="369989" y="371781"/>
+            <a:ext cx="5110280" cy="183190"/>
           </a:xfrm>
           <a:prstGeom prst="rect">
             <a:avLst/>
@@ -1173,20 +1173,20 @@
       </p:sp>
       <p:cxnSp>
         <p:nvCxnSpPr>
-          <p:cNvPr id="69" name="Google Shape;69;p16"/>
+          <p:cNvPr id="58" name="Google Shape;58;p14"/>
           <p:cNvCxnSpPr/>
           <p:nvPr/>
         </p:nvCxnSpPr>
         <p:spPr>
           <a:xfrm rot="10800000">
-            <a:off x="6113895" y="1770224"/>
-            <a:ext cx="6082648" cy="0"/>
+            <a:off x="6113904" y="1770180"/>
+            <a:ext cx="6082658" cy="0"/>
           </a:xfrm>
           <a:prstGeom prst="straightConnector1">
             <a:avLst/>
           </a:prstGeom>
           <a:noFill/>
-          <a:ln cap="flat" cmpd="sng" w="12700">
+          <a:ln cap="flat" cmpd="sng" w="16933">
             <a:solidFill>
               <a:schemeClr val="accent5"/>
             </a:solidFill>
@@ -1199,20 +1199,20 @@
       </p:cxnSp>
       <p:cxnSp>
         <p:nvCxnSpPr>
-          <p:cNvPr id="70" name="Google Shape;70;p16"/>
+          <p:cNvPr id="59" name="Google Shape;59;p14"/>
           <p:cNvCxnSpPr/>
           <p:nvPr/>
         </p:nvCxnSpPr>
         <p:spPr>
           <a:xfrm rot="10800000">
-            <a:off x="6113895" y="2419558"/>
-            <a:ext cx="6082648" cy="0"/>
+            <a:off x="6113904" y="2419498"/>
+            <a:ext cx="6082658" cy="0"/>
           </a:xfrm>
           <a:prstGeom prst="straightConnector1">
             <a:avLst/>
           </a:prstGeom>
           <a:noFill/>
-          <a:ln cap="flat" cmpd="sng" w="12700">
+          <a:ln cap="flat" cmpd="sng" w="16933">
             <a:solidFill>
               <a:schemeClr val="accent5"/>
             </a:solidFill>
@@ -1225,20 +1225,20 @@
       </p:cxnSp>
       <p:cxnSp>
         <p:nvCxnSpPr>
-          <p:cNvPr id="71" name="Google Shape;71;p16"/>
+          <p:cNvPr id="60" name="Google Shape;60;p14"/>
           <p:cNvCxnSpPr/>
           <p:nvPr/>
         </p:nvCxnSpPr>
         <p:spPr>
           <a:xfrm rot="10800000">
-            <a:off x="6113895" y="3068962"/>
-            <a:ext cx="6082648" cy="0"/>
+            <a:off x="6113904" y="3068886"/>
+            <a:ext cx="6082658" cy="0"/>
           </a:xfrm>
           <a:prstGeom prst="straightConnector1">
             <a:avLst/>
           </a:prstGeom>
           <a:noFill/>
-          <a:ln cap="flat" cmpd="sng" w="12700">
+          <a:ln cap="flat" cmpd="sng" w="16933">
             <a:solidFill>
               <a:schemeClr val="accent5"/>
             </a:solidFill>
@@ -1251,20 +1251,20 @@
       </p:cxnSp>
       <p:cxnSp>
         <p:nvCxnSpPr>
-          <p:cNvPr id="72" name="Google Shape;72;p16"/>
+          <p:cNvPr id="61" name="Google Shape;61;p14"/>
           <p:cNvCxnSpPr/>
           <p:nvPr/>
         </p:nvCxnSpPr>
         <p:spPr>
           <a:xfrm rot="10800000">
-            <a:off x="6113895" y="3718362"/>
-            <a:ext cx="6082648" cy="0"/>
+            <a:off x="6113904" y="3718270"/>
+            <a:ext cx="6082658" cy="0"/>
           </a:xfrm>
           <a:prstGeom prst="straightConnector1">
             <a:avLst/>
           </a:prstGeom>
           <a:noFill/>
-          <a:ln cap="flat" cmpd="sng" w="12700">
+          <a:ln cap="flat" cmpd="sng" w="16933">
             <a:solidFill>
               <a:schemeClr val="accent5"/>
             </a:solidFill>
@@ -1277,20 +1277,20 @@
       </p:cxnSp>
       <p:cxnSp>
         <p:nvCxnSpPr>
-          <p:cNvPr id="73" name="Google Shape;73;p16"/>
+          <p:cNvPr id="62" name="Google Shape;62;p14"/>
           <p:cNvCxnSpPr/>
           <p:nvPr/>
         </p:nvCxnSpPr>
         <p:spPr>
           <a:xfrm rot="10800000">
-            <a:off x="6113895" y="4367767"/>
-            <a:ext cx="6082648" cy="0"/>
+            <a:off x="6113904" y="4367657"/>
+            <a:ext cx="6082658" cy="0"/>
           </a:xfrm>
           <a:prstGeom prst="straightConnector1">
             <a:avLst/>
           </a:prstGeom>
           <a:noFill/>
-          <a:ln cap="flat" cmpd="sng" w="12700">
+          <a:ln cap="flat" cmpd="sng" w="16933">
             <a:solidFill>
               <a:schemeClr val="accent5"/>
             </a:solidFill>
@@ -1303,20 +1303,20 @@
       </p:cxnSp>
       <p:cxnSp>
         <p:nvCxnSpPr>
-          <p:cNvPr id="74" name="Google Shape;74;p16"/>
+          <p:cNvPr id="63" name="Google Shape;63;p14"/>
           <p:cNvCxnSpPr/>
           <p:nvPr/>
         </p:nvCxnSpPr>
         <p:spPr>
           <a:xfrm rot="10800000">
-            <a:off x="6113895" y="5017098"/>
-            <a:ext cx="6082648" cy="0"/>
+            <a:off x="6113904" y="5016973"/>
+            <a:ext cx="6082658" cy="0"/>
           </a:xfrm>
           <a:prstGeom prst="straightConnector1">
             <a:avLst/>
           </a:prstGeom>
           <a:noFill/>
-          <a:ln cap="flat" cmpd="sng" w="12700">
+          <a:ln cap="flat" cmpd="sng" w="16933">
             <a:solidFill>
               <a:schemeClr val="accent5"/>
             </a:solidFill>
@@ -1329,20 +1329,20 @@
       </p:cxnSp>
       <p:cxnSp>
         <p:nvCxnSpPr>
-          <p:cNvPr id="75" name="Google Shape;75;p16"/>
+          <p:cNvPr id="64" name="Google Shape;64;p14"/>
           <p:cNvCxnSpPr/>
           <p:nvPr/>
         </p:nvCxnSpPr>
         <p:spPr>
           <a:xfrm rot="10800000">
-            <a:off x="6113895" y="5666504"/>
-            <a:ext cx="6082648" cy="0"/>
+            <a:off x="6113904" y="5666362"/>
+            <a:ext cx="6082658" cy="0"/>
           </a:xfrm>
           <a:prstGeom prst="straightConnector1">
             <a:avLst/>
           </a:prstGeom>
           <a:noFill/>
-          <a:ln cap="flat" cmpd="sng" w="12700">
+          <a:ln cap="flat" cmpd="sng" w="16933">
             <a:solidFill>
               <a:schemeClr val="accent5"/>
             </a:solidFill>
@@ -1355,20 +1355,20 @@
       </p:cxnSp>
       <p:cxnSp>
         <p:nvCxnSpPr>
-          <p:cNvPr id="76" name="Google Shape;76;p16"/>
+          <p:cNvPr id="65" name="Google Shape;65;p14"/>
           <p:cNvCxnSpPr/>
           <p:nvPr/>
         </p:nvCxnSpPr>
         <p:spPr>
           <a:xfrm rot="10800000">
-            <a:off x="6113895" y="6315803"/>
-            <a:ext cx="6082648" cy="0"/>
+            <a:off x="6113904" y="6315645"/>
+            <a:ext cx="6082658" cy="0"/>
           </a:xfrm>
           <a:prstGeom prst="straightConnector1">
             <a:avLst/>
           </a:prstGeom>
           <a:noFill/>
-          <a:ln cap="flat" cmpd="sng" w="12700">
+          <a:ln cap="flat" cmpd="sng" w="16933">
             <a:solidFill>
               <a:schemeClr val="accent5"/>
             </a:solidFill>
@@ -1381,20 +1381,20 @@
       </p:cxnSp>
       <p:cxnSp>
         <p:nvCxnSpPr>
-          <p:cNvPr id="77" name="Google Shape;77;p16"/>
+          <p:cNvPr id="66" name="Google Shape;66;p14"/>
           <p:cNvCxnSpPr/>
           <p:nvPr/>
         </p:nvCxnSpPr>
         <p:spPr>
           <a:xfrm rot="10800000">
-            <a:off x="6113895" y="471416"/>
-            <a:ext cx="6082648" cy="0"/>
+            <a:off x="6113904" y="471404"/>
+            <a:ext cx="6082658" cy="0"/>
           </a:xfrm>
           <a:prstGeom prst="straightConnector1">
             <a:avLst/>
           </a:prstGeom>
           <a:noFill/>
-          <a:ln cap="flat" cmpd="sng" w="12700">
+          <a:ln cap="flat" cmpd="sng" w="16933">
             <a:solidFill>
               <a:schemeClr val="accent5"/>
             </a:solidFill>
@@ -1407,20 +1407,20 @@
       </p:cxnSp>
       <p:cxnSp>
         <p:nvCxnSpPr>
-          <p:cNvPr id="78" name="Google Shape;78;p16"/>
+          <p:cNvPr id="67" name="Google Shape;67;p14"/>
           <p:cNvCxnSpPr/>
           <p:nvPr/>
         </p:nvCxnSpPr>
         <p:spPr>
           <a:xfrm rot="10800000">
-            <a:off x="6113895" y="1120820"/>
-            <a:ext cx="6082648" cy="0"/>
+            <a:off x="6113904" y="1120792"/>
+            <a:ext cx="6082658" cy="0"/>
           </a:xfrm>
           <a:prstGeom prst="straightConnector1">
             <a:avLst/>
           </a:prstGeom>
           <a:noFill/>
-          <a:ln cap="flat" cmpd="sng" w="12700">
+          <a:ln cap="flat" cmpd="sng" w="16933">
             <a:solidFill>
               <a:schemeClr val="accent5"/>
             </a:solidFill>
@@ -1433,34 +1433,34 @@
       </p:cxnSp>
       <p:grpSp>
         <p:nvGrpSpPr>
-          <p:cNvPr id="79" name="Google Shape;79;p16"/>
+          <p:cNvPr id="68" name="Google Shape;68;p14"/>
           <p:cNvGrpSpPr/>
           <p:nvPr/>
         </p:nvGrpSpPr>
         <p:grpSpPr>
           <a:xfrm>
-            <a:off x="6115352" y="-136"/>
-            <a:ext cx="5783155" cy="6857828"/>
+            <a:off x="6115362" y="-136"/>
+            <a:ext cx="5783166" cy="6857656"/>
             <a:chOff x="1" y="0"/>
-            <a:chExt cx="5783155" cy="6857828"/>
+            <a:chExt cx="7710682" cy="9143542"/>
           </a:xfrm>
         </p:grpSpPr>
         <p:cxnSp>
           <p:nvCxnSpPr>
-            <p:cNvPr id="80" name="Google Shape;80;p16"/>
+            <p:cNvPr id="69" name="Google Shape;69;p14"/>
             <p:cNvCxnSpPr/>
             <p:nvPr/>
           </p:nvCxnSpPr>
           <p:spPr>
             <a:xfrm>
               <a:off x="1" y="0"/>
-              <a:ext cx="0" cy="6857828"/>
+              <a:ext cx="0" cy="9143542"/>
             </a:xfrm>
             <a:prstGeom prst="straightConnector1">
               <a:avLst/>
             </a:prstGeom>
             <a:noFill/>
-            <a:ln cap="flat" cmpd="sng" w="12700">
+            <a:ln cap="flat" cmpd="sng" w="16933">
               <a:solidFill>
                 <a:schemeClr val="accent5"/>
               </a:solidFill>
@@ -1473,20 +1473,20 @@
         </p:cxnSp>
         <p:cxnSp>
           <p:nvCxnSpPr>
-            <p:cNvPr id="81" name="Google Shape;81;p16"/>
+            <p:cNvPr id="70" name="Google Shape;70;p14"/>
             <p:cNvCxnSpPr/>
             <p:nvPr/>
           </p:nvCxnSpPr>
           <p:spPr>
             <a:xfrm>
-              <a:off x="642537" y="0"/>
-              <a:ext cx="0" cy="6857828"/>
+              <a:off x="856695" y="0"/>
+              <a:ext cx="0" cy="9143542"/>
             </a:xfrm>
             <a:prstGeom prst="straightConnector1">
               <a:avLst/>
             </a:prstGeom>
             <a:noFill/>
-            <a:ln cap="flat" cmpd="sng" w="12700">
+            <a:ln cap="flat" cmpd="sng" w="16933">
               <a:solidFill>
                 <a:schemeClr val="accent5"/>
               </a:solidFill>
@@ -1499,20 +1499,20 @@
         </p:cxnSp>
         <p:cxnSp>
           <p:nvCxnSpPr>
-            <p:cNvPr id="82" name="Google Shape;82;p16"/>
+            <p:cNvPr id="71" name="Google Shape;71;p14"/>
             <p:cNvCxnSpPr/>
             <p:nvPr/>
           </p:nvCxnSpPr>
           <p:spPr>
             <a:xfrm>
-              <a:off x="1285075" y="0"/>
-              <a:ext cx="0" cy="6857828"/>
+              <a:off x="1713390" y="0"/>
+              <a:ext cx="0" cy="9143542"/>
             </a:xfrm>
             <a:prstGeom prst="straightConnector1">
               <a:avLst/>
             </a:prstGeom>
             <a:noFill/>
-            <a:ln cap="flat" cmpd="sng" w="12700">
+            <a:ln cap="flat" cmpd="sng" w="16933">
               <a:solidFill>
                 <a:schemeClr val="accent5"/>
               </a:solidFill>
@@ -1525,20 +1525,20 @@
         </p:cxnSp>
         <p:cxnSp>
           <p:nvCxnSpPr>
-            <p:cNvPr id="83" name="Google Shape;83;p16"/>
+            <p:cNvPr id="72" name="Google Shape;72;p14"/>
             <p:cNvCxnSpPr/>
             <p:nvPr/>
           </p:nvCxnSpPr>
           <p:spPr>
             <a:xfrm>
-              <a:off x="1927612" y="0"/>
-              <a:ext cx="0" cy="6857828"/>
+              <a:off x="2570085" y="0"/>
+              <a:ext cx="0" cy="9143542"/>
             </a:xfrm>
             <a:prstGeom prst="straightConnector1">
               <a:avLst/>
             </a:prstGeom>
             <a:noFill/>
-            <a:ln cap="flat" cmpd="sng" w="12700">
+            <a:ln cap="flat" cmpd="sng" w="16933">
               <a:solidFill>
                 <a:schemeClr val="accent5"/>
               </a:solidFill>
@@ -1551,20 +1551,20 @@
         </p:cxnSp>
         <p:cxnSp>
           <p:nvCxnSpPr>
-            <p:cNvPr id="84" name="Google Shape;84;p16"/>
+            <p:cNvPr id="73" name="Google Shape;73;p14"/>
             <p:cNvCxnSpPr/>
             <p:nvPr/>
           </p:nvCxnSpPr>
           <p:spPr>
             <a:xfrm>
-              <a:off x="2570148" y="0"/>
-              <a:ext cx="0" cy="6857828"/>
+              <a:off x="3426778" y="0"/>
+              <a:ext cx="0" cy="9143542"/>
             </a:xfrm>
             <a:prstGeom prst="straightConnector1">
               <a:avLst/>
             </a:prstGeom>
             <a:noFill/>
-            <a:ln cap="flat" cmpd="sng" w="12700">
+            <a:ln cap="flat" cmpd="sng" w="16933">
               <a:solidFill>
                 <a:schemeClr val="accent5"/>
               </a:solidFill>
@@ -1577,20 +1577,20 @@
         </p:cxnSp>
         <p:cxnSp>
           <p:nvCxnSpPr>
-            <p:cNvPr id="85" name="Google Shape;85;p16"/>
+            <p:cNvPr id="74" name="Google Shape;74;p14"/>
             <p:cNvCxnSpPr/>
             <p:nvPr/>
           </p:nvCxnSpPr>
           <p:spPr>
             <a:xfrm>
-              <a:off x="3212685" y="0"/>
-              <a:ext cx="0" cy="6857828"/>
+              <a:off x="4283473" y="0"/>
+              <a:ext cx="0" cy="9143542"/>
             </a:xfrm>
             <a:prstGeom prst="straightConnector1">
               <a:avLst/>
             </a:prstGeom>
             <a:noFill/>
-            <a:ln cap="flat" cmpd="sng" w="12700">
+            <a:ln cap="flat" cmpd="sng" w="16933">
               <a:solidFill>
                 <a:schemeClr val="accent5"/>
               </a:solidFill>
@@ -1603,20 +1603,20 @@
         </p:cxnSp>
         <p:cxnSp>
           <p:nvCxnSpPr>
-            <p:cNvPr id="86" name="Google Shape;86;p16"/>
+            <p:cNvPr id="75" name="Google Shape;75;p14"/>
             <p:cNvCxnSpPr/>
             <p:nvPr/>
           </p:nvCxnSpPr>
           <p:spPr>
             <a:xfrm>
-              <a:off x="3855329" y="0"/>
-              <a:ext cx="0" cy="6857828"/>
+              <a:off x="5140310" y="0"/>
+              <a:ext cx="0" cy="9143542"/>
             </a:xfrm>
             <a:prstGeom prst="straightConnector1">
               <a:avLst/>
             </a:prstGeom>
             <a:noFill/>
-            <a:ln cap="flat" cmpd="sng" w="12700">
+            <a:ln cap="flat" cmpd="sng" w="16933">
               <a:solidFill>
                 <a:schemeClr val="accent5"/>
               </a:solidFill>
@@ -1629,20 +1629,20 @@
         </p:cxnSp>
         <p:cxnSp>
           <p:nvCxnSpPr>
-            <p:cNvPr id="87" name="Google Shape;87;p16"/>
+            <p:cNvPr id="76" name="Google Shape;76;p14"/>
             <p:cNvCxnSpPr/>
             <p:nvPr/>
           </p:nvCxnSpPr>
           <p:spPr>
             <a:xfrm>
-              <a:off x="4497865" y="0"/>
-              <a:ext cx="0" cy="6857828"/>
+              <a:off x="5997003" y="0"/>
+              <a:ext cx="0" cy="9143542"/>
             </a:xfrm>
             <a:prstGeom prst="straightConnector1">
               <a:avLst/>
             </a:prstGeom>
             <a:noFill/>
-            <a:ln cap="flat" cmpd="sng" w="12700">
+            <a:ln cap="flat" cmpd="sng" w="16933">
               <a:solidFill>
                 <a:schemeClr val="accent5"/>
               </a:solidFill>
@@ -1655,20 +1655,20 @@
         </p:cxnSp>
         <p:cxnSp>
           <p:nvCxnSpPr>
-            <p:cNvPr id="88" name="Google Shape;88;p16"/>
+            <p:cNvPr id="77" name="Google Shape;77;p14"/>
             <p:cNvCxnSpPr/>
             <p:nvPr/>
           </p:nvCxnSpPr>
           <p:spPr>
             <a:xfrm>
-              <a:off x="5140523" y="0"/>
-              <a:ext cx="0" cy="6857828"/>
+              <a:off x="6853859" y="0"/>
+              <a:ext cx="0" cy="9143542"/>
             </a:xfrm>
             <a:prstGeom prst="straightConnector1">
               <a:avLst/>
             </a:prstGeom>
             <a:noFill/>
-            <a:ln cap="flat" cmpd="sng" w="12700">
+            <a:ln cap="flat" cmpd="sng" w="16933">
               <a:solidFill>
                 <a:schemeClr val="accent5"/>
               </a:solidFill>
@@ -1681,20 +1681,20 @@
         </p:cxnSp>
         <p:cxnSp>
           <p:nvCxnSpPr>
-            <p:cNvPr id="89" name="Google Shape;89;p16"/>
+            <p:cNvPr id="78" name="Google Shape;78;p14"/>
             <p:cNvCxnSpPr/>
             <p:nvPr/>
           </p:nvCxnSpPr>
           <p:spPr>
             <a:xfrm>
-              <a:off x="5783157" y="0"/>
-              <a:ext cx="0" cy="6857828"/>
+              <a:off x="7710683" y="0"/>
+              <a:ext cx="0" cy="9143542"/>
             </a:xfrm>
             <a:prstGeom prst="straightConnector1">
               <a:avLst/>
             </a:prstGeom>
             <a:noFill/>
-            <a:ln cap="flat" cmpd="sng" w="12700">
+            <a:ln cap="flat" cmpd="sng" w="16933">
               <a:solidFill>
                 <a:schemeClr val="accent5"/>
               </a:solidFill>
@@ -1708,7 +1708,7 @@
       </p:grpSp>
       <p:sp>
         <p:nvSpPr>
-          <p:cNvPr id="90" name="Google Shape;90;p16"/>
+          <p:cNvPr id="79" name="Google Shape;79;p14"/>
           <p:cNvSpPr txBox="1"/>
           <p:nvPr>
             <p:ph idx="12" type="sldNum"/>
@@ -1716,8 +1716,8 @@
         </p:nvSpPr>
         <p:spPr>
           <a:xfrm>
-            <a:off x="5892653" y="6169928"/>
-            <a:ext cx="2844729" cy="369191"/>
+            <a:off x="5892663" y="6169774"/>
+            <a:ext cx="2844734" cy="369181"/>
           </a:xfrm>
           <a:prstGeom prst="rect">
             <a:avLst/>
@@ -1732,7 +1732,7 @@
             <a:spAutoFit/>
           </a:bodyPr>
           <a:lstStyle>
-            <a:lvl1pPr indent="0" lvl="0" marL="0" algn="r">
+            <a:lvl1pPr indent="0" lvl="0" marL="0" marR="0" algn="r">
               <a:lnSpc>
                 <a:spcPct val="100000"/>
               </a:lnSpc>
@@ -1748,13 +1748,17 @@
               <a:buSzPts val="1600"/>
               <a:buFont typeface="Arial"/>
               <a:buNone/>
-              <a:defRPr sz="1600">
+              <a:defRPr b="0" i="0" sz="1600" u="none" cap="none" strike="noStrike">
                 <a:solidFill>
                   <a:srgbClr val="000000"/>
                 </a:solidFill>
+                <a:latin typeface="Arial"/>
+                <a:ea typeface="Arial"/>
+                <a:cs typeface="Arial"/>
+                <a:sym typeface="Arial"/>
               </a:defRPr>
             </a:lvl1pPr>
-            <a:lvl2pPr indent="0" lvl="1" marL="0" algn="r">
+            <a:lvl2pPr indent="0" lvl="1" marL="0" marR="0" algn="r">
               <a:lnSpc>
                 <a:spcPct val="100000"/>
               </a:lnSpc>
@@ -1770,13 +1774,17 @@
               <a:buSzPts val="1600"/>
               <a:buFont typeface="Arial"/>
               <a:buNone/>
-              <a:defRPr sz="1600">
+              <a:defRPr b="0" i="0" sz="1600" u="none" cap="none" strike="noStrike">
                 <a:solidFill>
                   <a:srgbClr val="000000"/>
                 </a:solidFill>
+                <a:latin typeface="Arial"/>
+                <a:ea typeface="Arial"/>
+                <a:cs typeface="Arial"/>
+                <a:sym typeface="Arial"/>
               </a:defRPr>
             </a:lvl2pPr>
-            <a:lvl3pPr indent="0" lvl="2" marL="0" algn="r">
+            <a:lvl3pPr indent="0" lvl="2" marL="0" marR="0" algn="r">
               <a:lnSpc>
                 <a:spcPct val="100000"/>
               </a:lnSpc>
@@ -1792,13 +1800,17 @@
               <a:buSzPts val="1600"/>
               <a:buFont typeface="Arial"/>
               <a:buNone/>
-              <a:defRPr sz="1600">
+              <a:defRPr b="0" i="0" sz="1600" u="none" cap="none" strike="noStrike">
                 <a:solidFill>
                   <a:srgbClr val="000000"/>
                 </a:solidFill>
+                <a:latin typeface="Arial"/>
+                <a:ea typeface="Arial"/>
+                <a:cs typeface="Arial"/>
+                <a:sym typeface="Arial"/>
               </a:defRPr>
             </a:lvl3pPr>
-            <a:lvl4pPr indent="0" lvl="3" marL="0" algn="r">
+            <a:lvl4pPr indent="0" lvl="3" marL="0" marR="0" algn="r">
               <a:lnSpc>
                 <a:spcPct val="100000"/>
               </a:lnSpc>
@@ -1814,13 +1826,17 @@
               <a:buSzPts val="1600"/>
               <a:buFont typeface="Arial"/>
               <a:buNone/>
-              <a:defRPr sz="1600">
+              <a:defRPr b="0" i="0" sz="1600" u="none" cap="none" strike="noStrike">
                 <a:solidFill>
                   <a:srgbClr val="000000"/>
                 </a:solidFill>
+                <a:latin typeface="Arial"/>
+                <a:ea typeface="Arial"/>
+                <a:cs typeface="Arial"/>
+                <a:sym typeface="Arial"/>
               </a:defRPr>
             </a:lvl4pPr>
-            <a:lvl5pPr indent="0" lvl="4" marL="0" algn="r">
+            <a:lvl5pPr indent="0" lvl="4" marL="0" marR="0" algn="r">
               <a:lnSpc>
                 <a:spcPct val="100000"/>
               </a:lnSpc>
@@ -1836,13 +1852,17 @@
               <a:buSzPts val="1600"/>
               <a:buFont typeface="Arial"/>
               <a:buNone/>
-              <a:defRPr sz="1600">
+              <a:defRPr b="0" i="0" sz="1600" u="none" cap="none" strike="noStrike">
                 <a:solidFill>
                   <a:srgbClr val="000000"/>
                 </a:solidFill>
+                <a:latin typeface="Arial"/>
+                <a:ea typeface="Arial"/>
+                <a:cs typeface="Arial"/>
+                <a:sym typeface="Arial"/>
               </a:defRPr>
             </a:lvl5pPr>
-            <a:lvl6pPr indent="0" lvl="5" marL="0" algn="r">
+            <a:lvl6pPr indent="0" lvl="5" marL="0" marR="0" algn="r">
               <a:lnSpc>
                 <a:spcPct val="100000"/>
               </a:lnSpc>
@@ -1858,13 +1878,17 @@
               <a:buSzPts val="1600"/>
               <a:buFont typeface="Arial"/>
               <a:buNone/>
-              <a:defRPr sz="1600">
+              <a:defRPr b="0" i="0" sz="1600" u="none" cap="none" strike="noStrike">
                 <a:solidFill>
                   <a:srgbClr val="000000"/>
                 </a:solidFill>
+                <a:latin typeface="Arial"/>
+                <a:ea typeface="Arial"/>
+                <a:cs typeface="Arial"/>
+                <a:sym typeface="Arial"/>
               </a:defRPr>
             </a:lvl6pPr>
-            <a:lvl7pPr indent="0" lvl="6" marL="0" algn="r">
+            <a:lvl7pPr indent="0" lvl="6" marL="0" marR="0" algn="r">
               <a:lnSpc>
                 <a:spcPct val="100000"/>
               </a:lnSpc>
@@ -1880,13 +1904,17 @@
               <a:buSzPts val="1600"/>
               <a:buFont typeface="Arial"/>
               <a:buNone/>
-              <a:defRPr sz="1600">
+              <a:defRPr b="0" i="0" sz="1600" u="none" cap="none" strike="noStrike">
                 <a:solidFill>
                   <a:srgbClr val="000000"/>
                 </a:solidFill>
+                <a:latin typeface="Arial"/>
+                <a:ea typeface="Arial"/>
+                <a:cs typeface="Arial"/>
+                <a:sym typeface="Arial"/>
               </a:defRPr>
             </a:lvl7pPr>
-            <a:lvl8pPr indent="0" lvl="7" marL="0" algn="r">
+            <a:lvl8pPr indent="0" lvl="7" marL="0" marR="0" algn="r">
               <a:lnSpc>
                 <a:spcPct val="100000"/>
               </a:lnSpc>
@@ -1902,13 +1930,17 @@
               <a:buSzPts val="1600"/>
               <a:buFont typeface="Arial"/>
               <a:buNone/>
-              <a:defRPr sz="1600">
+              <a:defRPr b="0" i="0" sz="1600" u="none" cap="none" strike="noStrike">
                 <a:solidFill>
                   <a:srgbClr val="000000"/>
                 </a:solidFill>
+                <a:latin typeface="Arial"/>
+                <a:ea typeface="Arial"/>
+                <a:cs typeface="Arial"/>
+                <a:sym typeface="Arial"/>
               </a:defRPr>
             </a:lvl8pPr>
-            <a:lvl9pPr indent="0" lvl="8" marL="0" algn="r">
+            <a:lvl9pPr indent="0" lvl="8" marL="0" marR="0" algn="r">
               <a:lnSpc>
                 <a:spcPct val="100000"/>
               </a:lnSpc>
@@ -1924,10 +1956,14 @@
               <a:buSzPts val="1600"/>
               <a:buFont typeface="Arial"/>
               <a:buNone/>
-              <a:defRPr sz="1600">
+              <a:defRPr b="0" i="0" sz="1600" u="none" cap="none" strike="noStrike">
                 <a:solidFill>
                   <a:srgbClr val="000000"/>
                 </a:solidFill>
+                <a:latin typeface="Arial"/>
+                <a:ea typeface="Arial"/>
+                <a:cs typeface="Arial"/>
+                <a:sym typeface="Arial"/>
               </a:defRPr>
             </a:lvl9pPr>
           </a:lstStyle>
@@ -1962,7 +1998,7 @@
   <p:cSld name="CUSTOM_11">
     <p:spTree>
       <p:nvGrpSpPr>
-        <p:cNvPr id="188" name="Shape 188"/>
+        <p:cNvPr id="177" name="Shape 177"/>
         <p:cNvGrpSpPr/>
         <p:nvPr/>
       </p:nvGrpSpPr>
@@ -1976,7 +2012,7 @@
       </p:grpSpPr>
       <p:sp>
         <p:nvSpPr>
-          <p:cNvPr id="189" name="Google Shape;189;p25"/>
+          <p:cNvPr id="178" name="Google Shape;178;p23"/>
           <p:cNvSpPr/>
           <p:nvPr>
             <p:ph idx="2" type="pic"/>
@@ -1984,8 +2020,8 @@
         </p:nvSpPr>
         <p:spPr>
           <a:xfrm>
-            <a:off x="369989" y="979441"/>
-            <a:ext cx="1845154" cy="2213545"/>
+            <a:off x="369989" y="979417"/>
+            <a:ext cx="1845157" cy="2213490"/>
           </a:xfrm>
           <a:prstGeom prst="rect">
             <a:avLst/>
@@ -1998,7 +2034,7 @@
       </p:sp>
       <p:sp>
         <p:nvSpPr>
-          <p:cNvPr id="190" name="Google Shape;190;p25"/>
+          <p:cNvPr id="179" name="Google Shape;179;p23"/>
           <p:cNvSpPr/>
           <p:nvPr>
             <p:ph idx="3" type="pic"/>
@@ -2006,8 +2042,8 @@
         </p:nvSpPr>
         <p:spPr>
           <a:xfrm>
-            <a:off x="369989" y="3361481"/>
-            <a:ext cx="1845154" cy="2505537"/>
+            <a:off x="369989" y="3361397"/>
+            <a:ext cx="1845157" cy="2505475"/>
           </a:xfrm>
           <a:prstGeom prst="rect">
             <a:avLst/>
@@ -2020,7 +2056,7 @@
       </p:sp>
       <p:sp>
         <p:nvSpPr>
-          <p:cNvPr id="191" name="Google Shape;191;p25"/>
+          <p:cNvPr id="180" name="Google Shape;180;p23"/>
           <p:cNvSpPr/>
           <p:nvPr>
             <p:ph idx="4" type="pic"/>
@@ -2028,8 +2064,8 @@
         </p:nvSpPr>
         <p:spPr>
           <a:xfrm>
-            <a:off x="2490115" y="1134505"/>
-            <a:ext cx="3452314" cy="4577485"/>
+            <a:off x="2490119" y="1134477"/>
+            <a:ext cx="3452320" cy="4577371"/>
           </a:xfrm>
           <a:prstGeom prst="rect">
             <a:avLst/>
@@ -2042,7 +2078,7 @@
       </p:sp>
       <p:sp>
         <p:nvSpPr>
-          <p:cNvPr id="192" name="Google Shape;192;p25"/>
+          <p:cNvPr id="181" name="Google Shape;181;p23"/>
           <p:cNvSpPr txBox="1"/>
           <p:nvPr>
             <p:ph type="title"/>
@@ -2050,8 +2086,8 @@
         </p:nvSpPr>
         <p:spPr>
           <a:xfrm>
-            <a:off x="7704039" y="2400939"/>
-            <a:ext cx="3760706" cy="1364766"/>
+            <a:off x="7704051" y="2400879"/>
+            <a:ext cx="3760713" cy="1364733"/>
           </a:xfrm>
           <a:prstGeom prst="rect">
             <a:avLst/>
@@ -2231,7 +2267,7 @@
       </p:sp>
       <p:sp>
         <p:nvSpPr>
-          <p:cNvPr id="193" name="Google Shape;193;p25"/>
+          <p:cNvPr id="182" name="Google Shape;182;p23"/>
           <p:cNvSpPr txBox="1"/>
           <p:nvPr>
             <p:ph idx="1" type="body"/>
@@ -2239,8 +2275,8 @@
         </p:nvSpPr>
         <p:spPr>
           <a:xfrm>
-            <a:off x="369989" y="371791"/>
-            <a:ext cx="5110272" cy="183195"/>
+            <a:off x="369989" y="371781"/>
+            <a:ext cx="5110280" cy="183190"/>
           </a:xfrm>
           <a:prstGeom prst="rect">
             <a:avLst/>
@@ -2407,7 +2443,7 @@
       </p:sp>
       <p:pic>
         <p:nvPicPr>
-          <p:cNvPr descr="Logo-white.pngGoogle Shape;125;p10" id="194" name="Google Shape;194;p25"/>
+          <p:cNvPr descr="Logo-white.pngGoogle Shape;125;p10" id="183" name="Google Shape;183;p23"/>
           <p:cNvPicPr preferRelativeResize="0"/>
           <p:nvPr/>
         </p:nvPicPr>
@@ -2420,8 +2456,8 @@
         </p:blipFill>
         <p:spPr>
           <a:xfrm>
-            <a:off x="10665200" y="303528"/>
-            <a:ext cx="1156572" cy="277161"/>
+            <a:off x="10665217" y="303520"/>
+            <a:ext cx="1156574" cy="277154"/>
           </a:xfrm>
           <a:prstGeom prst="rect">
             <a:avLst/>
@@ -2434,7 +2470,7 @@
       </p:pic>
       <p:sp>
         <p:nvSpPr>
-          <p:cNvPr id="195" name="Google Shape;195;p25"/>
+          <p:cNvPr id="184" name="Google Shape;184;p23"/>
           <p:cNvSpPr txBox="1"/>
           <p:nvPr>
             <p:ph idx="12" type="sldNum"/>
@@ -2442,8 +2478,8 @@
         </p:nvSpPr>
         <p:spPr>
           <a:xfrm>
-            <a:off x="11652438" y="6343529"/>
-            <a:ext cx="169196" cy="163996"/>
+            <a:off x="11652456" y="6343371"/>
+            <a:ext cx="169196" cy="163992"/>
           </a:xfrm>
           <a:prstGeom prst="rect">
             <a:avLst/>
@@ -2458,7 +2494,7 @@
             <a:spAutoFit/>
           </a:bodyPr>
           <a:lstStyle>
-            <a:lvl1pPr indent="-50800" lvl="0" marL="50800" algn="r">
+            <a:lvl1pPr indent="-38100" lvl="0" marL="38100" marR="0" algn="r">
               <a:lnSpc>
                 <a:spcPct val="100000"/>
               </a:lnSpc>
@@ -2474,7 +2510,7 @@
               <a:buSzPts val="1067"/>
               <a:buFont typeface="Montserrat"/>
               <a:buNone/>
-              <a:defRPr b="1" sz="1067">
+              <a:defRPr b="1" i="0" sz="1067" u="none" cap="none" strike="noStrike">
                 <a:solidFill>
                   <a:srgbClr val="E0DAFF"/>
                 </a:solidFill>
@@ -2484,7 +2520,7 @@
                 <a:sym typeface="Montserrat"/>
               </a:defRPr>
             </a:lvl1pPr>
-            <a:lvl2pPr indent="-50800" lvl="1" marL="50800" algn="r">
+            <a:lvl2pPr indent="-38100" lvl="1" marL="38100" marR="0" algn="r">
               <a:lnSpc>
                 <a:spcPct val="100000"/>
               </a:lnSpc>
@@ -2500,7 +2536,7 @@
               <a:buSzPts val="1067"/>
               <a:buFont typeface="Montserrat"/>
               <a:buNone/>
-              <a:defRPr b="1" sz="1067">
+              <a:defRPr b="1" i="0" sz="1067" u="none" cap="none" strike="noStrike">
                 <a:solidFill>
                   <a:srgbClr val="E0DAFF"/>
                 </a:solidFill>
@@ -2510,7 +2546,7 @@
                 <a:sym typeface="Montserrat"/>
               </a:defRPr>
             </a:lvl2pPr>
-            <a:lvl3pPr indent="-50800" lvl="2" marL="50800" algn="r">
+            <a:lvl3pPr indent="-38100" lvl="2" marL="38100" marR="0" algn="r">
               <a:lnSpc>
                 <a:spcPct val="100000"/>
               </a:lnSpc>
@@ -2526,7 +2562,7 @@
               <a:buSzPts val="1067"/>
               <a:buFont typeface="Montserrat"/>
               <a:buNone/>
-              <a:defRPr b="1" sz="1067">
+              <a:defRPr b="1" i="0" sz="1067" u="none" cap="none" strike="noStrike">
                 <a:solidFill>
                   <a:srgbClr val="E0DAFF"/>
                 </a:solidFill>
@@ -2536,7 +2572,7 @@
                 <a:sym typeface="Montserrat"/>
               </a:defRPr>
             </a:lvl3pPr>
-            <a:lvl4pPr indent="-50800" lvl="3" marL="50800" algn="r">
+            <a:lvl4pPr indent="-38100" lvl="3" marL="38100" marR="0" algn="r">
               <a:lnSpc>
                 <a:spcPct val="100000"/>
               </a:lnSpc>
@@ -2552,7 +2588,7 @@
               <a:buSzPts val="1067"/>
               <a:buFont typeface="Montserrat"/>
               <a:buNone/>
-              <a:defRPr b="1" sz="1067">
+              <a:defRPr b="1" i="0" sz="1067" u="none" cap="none" strike="noStrike">
                 <a:solidFill>
                   <a:srgbClr val="E0DAFF"/>
                 </a:solidFill>
@@ -2562,7 +2598,7 @@
                 <a:sym typeface="Montserrat"/>
               </a:defRPr>
             </a:lvl4pPr>
-            <a:lvl5pPr indent="-50800" lvl="4" marL="50800" algn="r">
+            <a:lvl5pPr indent="-38100" lvl="4" marL="38100" marR="0" algn="r">
               <a:lnSpc>
                 <a:spcPct val="100000"/>
               </a:lnSpc>
@@ -2578,7 +2614,7 @@
               <a:buSzPts val="1067"/>
               <a:buFont typeface="Montserrat"/>
               <a:buNone/>
-              <a:defRPr b="1" sz="1067">
+              <a:defRPr b="1" i="0" sz="1067" u="none" cap="none" strike="noStrike">
                 <a:solidFill>
                   <a:srgbClr val="E0DAFF"/>
                 </a:solidFill>
@@ -2588,7 +2624,7 @@
                 <a:sym typeface="Montserrat"/>
               </a:defRPr>
             </a:lvl5pPr>
-            <a:lvl6pPr indent="-50800" lvl="5" marL="50800" algn="r">
+            <a:lvl6pPr indent="-38100" lvl="5" marL="38100" marR="0" algn="r">
               <a:lnSpc>
                 <a:spcPct val="100000"/>
               </a:lnSpc>
@@ -2604,7 +2640,7 @@
               <a:buSzPts val="1067"/>
               <a:buFont typeface="Montserrat"/>
               <a:buNone/>
-              <a:defRPr b="1" sz="1067">
+              <a:defRPr b="1" i="0" sz="1067" u="none" cap="none" strike="noStrike">
                 <a:solidFill>
                   <a:srgbClr val="E0DAFF"/>
                 </a:solidFill>
@@ -2614,7 +2650,7 @@
                 <a:sym typeface="Montserrat"/>
               </a:defRPr>
             </a:lvl6pPr>
-            <a:lvl7pPr indent="-50800" lvl="6" marL="50800" algn="r">
+            <a:lvl7pPr indent="-38100" lvl="6" marL="38100" marR="0" algn="r">
               <a:lnSpc>
                 <a:spcPct val="100000"/>
               </a:lnSpc>
@@ -2630,7 +2666,7 @@
               <a:buSzPts val="1067"/>
               <a:buFont typeface="Montserrat"/>
               <a:buNone/>
-              <a:defRPr b="1" sz="1067">
+              <a:defRPr b="1" i="0" sz="1067" u="none" cap="none" strike="noStrike">
                 <a:solidFill>
                   <a:srgbClr val="E0DAFF"/>
                 </a:solidFill>
@@ -2640,7 +2676,7 @@
                 <a:sym typeface="Montserrat"/>
               </a:defRPr>
             </a:lvl7pPr>
-            <a:lvl8pPr indent="-50800" lvl="7" marL="50800" algn="r">
+            <a:lvl8pPr indent="-38100" lvl="7" marL="38100" marR="0" algn="r">
               <a:lnSpc>
                 <a:spcPct val="100000"/>
               </a:lnSpc>
@@ -2656,7 +2692,7 @@
               <a:buSzPts val="1067"/>
               <a:buFont typeface="Montserrat"/>
               <a:buNone/>
-              <a:defRPr b="1" sz="1067">
+              <a:defRPr b="1" i="0" sz="1067" u="none" cap="none" strike="noStrike">
                 <a:solidFill>
                   <a:srgbClr val="E0DAFF"/>
                 </a:solidFill>
@@ -2666,7 +2702,7 @@
                 <a:sym typeface="Montserrat"/>
               </a:defRPr>
             </a:lvl8pPr>
-            <a:lvl9pPr indent="-50800" lvl="8" marL="50800" algn="r">
+            <a:lvl9pPr indent="-38100" lvl="8" marL="38100" marR="0" algn="r">
               <a:lnSpc>
                 <a:spcPct val="100000"/>
               </a:lnSpc>
@@ -2682,7 +2718,7 @@
               <a:buSzPts val="1067"/>
               <a:buFont typeface="Montserrat"/>
               <a:buNone/>
-              <a:defRPr b="1" sz="1067">
+              <a:defRPr b="1" i="0" sz="1067" u="none" cap="none" strike="noStrike">
                 <a:solidFill>
                   <a:srgbClr val="E0DAFF"/>
                 </a:solidFill>
@@ -2694,7 +2730,7 @@
             </a:lvl9pPr>
           </a:lstStyle>
           <a:p>
-            <a:pPr indent="-50800" lvl="0" marL="50800" rtl="0" algn="r">
+            <a:pPr indent="-38100" lvl="0" marL="38100" rtl="0" algn="r">
               <a:spcBef>
                 <a:spcPts val="0"/>
               </a:spcBef>
@@ -2707,7 +2743,7 @@
               <a:rPr lang="en"/>
               <a:t>‹#›</a:t>
             </a:fld>
-            <a:endParaRPr i="0" u="none" cap="none" strike="noStrike"/>
+            <a:endParaRPr/>
           </a:p>
         </p:txBody>
       </p:sp>
@@ -2731,7 +2767,7 @@
     </p:bg>
     <p:spTree>
       <p:nvGrpSpPr>
-        <p:cNvPr id="196" name="Shape 196"/>
+        <p:cNvPr id="185" name="Shape 185"/>
         <p:cNvGrpSpPr/>
         <p:nvPr/>
       </p:nvGrpSpPr>
@@ -2745,7 +2781,7 @@
       </p:grpSpPr>
       <p:sp>
         <p:nvSpPr>
-          <p:cNvPr id="197" name="Google Shape;197;p26"/>
+          <p:cNvPr id="186" name="Google Shape;186;p24"/>
           <p:cNvSpPr txBox="1"/>
           <p:nvPr>
             <p:ph type="title"/>
@@ -2753,8 +2789,8 @@
         </p:nvSpPr>
         <p:spPr>
           <a:xfrm>
-            <a:off x="369989" y="554985"/>
-            <a:ext cx="11451714" cy="1179970"/>
+            <a:off x="369989" y="554971"/>
+            <a:ext cx="11451732" cy="1179941"/>
           </a:xfrm>
           <a:prstGeom prst="rect">
             <a:avLst/>
@@ -2933,7 +2969,7 @@
       </p:sp>
       <p:sp>
         <p:nvSpPr>
-          <p:cNvPr id="198" name="Google Shape;198;p26"/>
+          <p:cNvPr id="187" name="Google Shape;187;p24"/>
           <p:cNvSpPr txBox="1"/>
           <p:nvPr>
             <p:ph idx="1" type="body"/>
@@ -2941,8 +2977,8 @@
         </p:nvSpPr>
         <p:spPr>
           <a:xfrm>
-            <a:off x="6095847" y="3428914"/>
-            <a:ext cx="4779880" cy="1463963"/>
+            <a:off x="6095857" y="3428828"/>
+            <a:ext cx="4779888" cy="1463926"/>
           </a:xfrm>
           <a:prstGeom prst="rect">
             <a:avLst/>
@@ -3124,7 +3160,7 @@
       </p:sp>
       <p:sp>
         <p:nvSpPr>
-          <p:cNvPr id="199" name="Google Shape;199;p26"/>
+          <p:cNvPr id="188" name="Google Shape;188;p24"/>
           <p:cNvSpPr txBox="1"/>
           <p:nvPr>
             <p:ph idx="2" type="body"/>
@@ -3132,8 +3168,8 @@
         </p:nvSpPr>
         <p:spPr>
           <a:xfrm>
-            <a:off x="369989" y="3428902"/>
-            <a:ext cx="4779880" cy="1463963"/>
+            <a:off x="369989" y="3428817"/>
+            <a:ext cx="4779888" cy="1463926"/>
           </a:xfrm>
           <a:prstGeom prst="rect">
             <a:avLst/>
@@ -3280,7 +3316,7 @@
       </p:sp>
       <p:pic>
         <p:nvPicPr>
-          <p:cNvPr descr="Logo2.pngGoogle Shape;132;p11" id="200" name="Google Shape;200;p26"/>
+          <p:cNvPr descr="Logo2.pngGoogle Shape;132;p11" id="189" name="Google Shape;189;p24"/>
           <p:cNvPicPr preferRelativeResize="0"/>
           <p:nvPr/>
         </p:nvPicPr>
@@ -3293,8 +3329,8 @@
         </p:blipFill>
         <p:spPr>
           <a:xfrm>
-            <a:off x="10648199" y="273526"/>
-            <a:ext cx="1184038" cy="337125"/>
+            <a:off x="10648216" y="273520"/>
+            <a:ext cx="1184040" cy="337117"/>
           </a:xfrm>
           <a:prstGeom prst="rect">
             <a:avLst/>
@@ -3307,7 +3343,7 @@
       </p:pic>
       <p:sp>
         <p:nvSpPr>
-          <p:cNvPr id="201" name="Google Shape;201;p26"/>
+          <p:cNvPr id="190" name="Google Shape;190;p24"/>
           <p:cNvSpPr txBox="1"/>
           <p:nvPr>
             <p:ph idx="12" type="sldNum"/>
@@ -3315,8 +3351,8 @@
         </p:nvSpPr>
         <p:spPr>
           <a:xfrm>
-            <a:off x="11652438" y="6343529"/>
-            <a:ext cx="169196" cy="163996"/>
+            <a:off x="11652456" y="6343371"/>
+            <a:ext cx="169196" cy="163992"/>
           </a:xfrm>
           <a:prstGeom prst="rect">
             <a:avLst/>
@@ -3331,7 +3367,7 @@
             <a:spAutoFit/>
           </a:bodyPr>
           <a:lstStyle>
-            <a:lvl1pPr indent="-50800" lvl="0" marL="50800" algn="r">
+            <a:lvl1pPr indent="-38100" lvl="0" marL="38100" marR="0" algn="r">
               <a:lnSpc>
                 <a:spcPct val="100000"/>
               </a:lnSpc>
@@ -3347,7 +3383,7 @@
               <a:buSzPts val="1067"/>
               <a:buFont typeface="Montserrat"/>
               <a:buNone/>
-              <a:defRPr b="1" sz="1067">
+              <a:defRPr b="1" i="0" sz="1067" u="none" cap="none" strike="noStrike">
                 <a:solidFill>
                   <a:srgbClr val="E0DAFF"/>
                 </a:solidFill>
@@ -3357,7 +3393,7 @@
                 <a:sym typeface="Montserrat"/>
               </a:defRPr>
             </a:lvl1pPr>
-            <a:lvl2pPr indent="-50800" lvl="1" marL="50800" algn="r">
+            <a:lvl2pPr indent="-38100" lvl="1" marL="38100" marR="0" algn="r">
               <a:lnSpc>
                 <a:spcPct val="100000"/>
               </a:lnSpc>
@@ -3373,7 +3409,7 @@
               <a:buSzPts val="1067"/>
               <a:buFont typeface="Montserrat"/>
               <a:buNone/>
-              <a:defRPr b="1" sz="1067">
+              <a:defRPr b="1" i="0" sz="1067" u="none" cap="none" strike="noStrike">
                 <a:solidFill>
                   <a:srgbClr val="E0DAFF"/>
                 </a:solidFill>
@@ -3383,7 +3419,7 @@
                 <a:sym typeface="Montserrat"/>
               </a:defRPr>
             </a:lvl2pPr>
-            <a:lvl3pPr indent="-50800" lvl="2" marL="50800" algn="r">
+            <a:lvl3pPr indent="-38100" lvl="2" marL="38100" marR="0" algn="r">
               <a:lnSpc>
                 <a:spcPct val="100000"/>
               </a:lnSpc>
@@ -3399,7 +3435,7 @@
               <a:buSzPts val="1067"/>
               <a:buFont typeface="Montserrat"/>
               <a:buNone/>
-              <a:defRPr b="1" sz="1067">
+              <a:defRPr b="1" i="0" sz="1067" u="none" cap="none" strike="noStrike">
                 <a:solidFill>
                   <a:srgbClr val="E0DAFF"/>
                 </a:solidFill>
@@ -3409,7 +3445,7 @@
                 <a:sym typeface="Montserrat"/>
               </a:defRPr>
             </a:lvl3pPr>
-            <a:lvl4pPr indent="-50800" lvl="3" marL="50800" algn="r">
+            <a:lvl4pPr indent="-38100" lvl="3" marL="38100" marR="0" algn="r">
               <a:lnSpc>
                 <a:spcPct val="100000"/>
               </a:lnSpc>
@@ -3425,7 +3461,7 @@
               <a:buSzPts val="1067"/>
               <a:buFont typeface="Montserrat"/>
               <a:buNone/>
-              <a:defRPr b="1" sz="1067">
+              <a:defRPr b="1" i="0" sz="1067" u="none" cap="none" strike="noStrike">
                 <a:solidFill>
                   <a:srgbClr val="E0DAFF"/>
                 </a:solidFill>
@@ -3435,7 +3471,7 @@
                 <a:sym typeface="Montserrat"/>
               </a:defRPr>
             </a:lvl4pPr>
-            <a:lvl5pPr indent="-50800" lvl="4" marL="50800" algn="r">
+            <a:lvl5pPr indent="-38100" lvl="4" marL="38100" marR="0" algn="r">
               <a:lnSpc>
                 <a:spcPct val="100000"/>
               </a:lnSpc>
@@ -3451,7 +3487,7 @@
               <a:buSzPts val="1067"/>
               <a:buFont typeface="Montserrat"/>
               <a:buNone/>
-              <a:defRPr b="1" sz="1067">
+              <a:defRPr b="1" i="0" sz="1067" u="none" cap="none" strike="noStrike">
                 <a:solidFill>
                   <a:srgbClr val="E0DAFF"/>
                 </a:solidFill>
@@ -3461,7 +3497,7 @@
                 <a:sym typeface="Montserrat"/>
               </a:defRPr>
             </a:lvl5pPr>
-            <a:lvl6pPr indent="-50800" lvl="5" marL="50800" algn="r">
+            <a:lvl6pPr indent="-38100" lvl="5" marL="38100" marR="0" algn="r">
               <a:lnSpc>
                 <a:spcPct val="100000"/>
               </a:lnSpc>
@@ -3477,7 +3513,7 @@
               <a:buSzPts val="1067"/>
               <a:buFont typeface="Montserrat"/>
               <a:buNone/>
-              <a:defRPr b="1" sz="1067">
+              <a:defRPr b="1" i="0" sz="1067" u="none" cap="none" strike="noStrike">
                 <a:solidFill>
                   <a:srgbClr val="E0DAFF"/>
                 </a:solidFill>
@@ -3487,7 +3523,7 @@
                 <a:sym typeface="Montserrat"/>
               </a:defRPr>
             </a:lvl6pPr>
-            <a:lvl7pPr indent="-50800" lvl="6" marL="50800" algn="r">
+            <a:lvl7pPr indent="-38100" lvl="6" marL="38100" marR="0" algn="r">
               <a:lnSpc>
                 <a:spcPct val="100000"/>
               </a:lnSpc>
@@ -3503,7 +3539,7 @@
               <a:buSzPts val="1067"/>
               <a:buFont typeface="Montserrat"/>
               <a:buNone/>
-              <a:defRPr b="1" sz="1067">
+              <a:defRPr b="1" i="0" sz="1067" u="none" cap="none" strike="noStrike">
                 <a:solidFill>
                   <a:srgbClr val="E0DAFF"/>
                 </a:solidFill>
@@ -3513,7 +3549,7 @@
                 <a:sym typeface="Montserrat"/>
               </a:defRPr>
             </a:lvl7pPr>
-            <a:lvl8pPr indent="-50800" lvl="7" marL="50800" algn="r">
+            <a:lvl8pPr indent="-38100" lvl="7" marL="38100" marR="0" algn="r">
               <a:lnSpc>
                 <a:spcPct val="100000"/>
               </a:lnSpc>
@@ -3529,7 +3565,7 @@
               <a:buSzPts val="1067"/>
               <a:buFont typeface="Montserrat"/>
               <a:buNone/>
-              <a:defRPr b="1" sz="1067">
+              <a:defRPr b="1" i="0" sz="1067" u="none" cap="none" strike="noStrike">
                 <a:solidFill>
                   <a:srgbClr val="E0DAFF"/>
                 </a:solidFill>
@@ -3539,7 +3575,7 @@
                 <a:sym typeface="Montserrat"/>
               </a:defRPr>
             </a:lvl8pPr>
-            <a:lvl9pPr indent="-50800" lvl="8" marL="50800" algn="r">
+            <a:lvl9pPr indent="-38100" lvl="8" marL="38100" marR="0" algn="r">
               <a:lnSpc>
                 <a:spcPct val="100000"/>
               </a:lnSpc>
@@ -3555,7 +3591,7 @@
               <a:buSzPts val="1067"/>
               <a:buFont typeface="Montserrat"/>
               <a:buNone/>
-              <a:defRPr b="1" sz="1067">
+              <a:defRPr b="1" i="0" sz="1067" u="none" cap="none" strike="noStrike">
                 <a:solidFill>
                   <a:srgbClr val="E0DAFF"/>
                 </a:solidFill>
@@ -3567,7 +3603,7 @@
             </a:lvl9pPr>
           </a:lstStyle>
           <a:p>
-            <a:pPr indent="-50800" lvl="0" marL="50800" rtl="0" algn="r">
+            <a:pPr indent="-38100" lvl="0" marL="38100" rtl="0" algn="r">
               <a:spcBef>
                 <a:spcPts val="0"/>
               </a:spcBef>
@@ -3580,7 +3616,7 @@
               <a:rPr lang="en"/>
               <a:t>‹#›</a:t>
             </a:fld>
-            <a:endParaRPr i="0" u="none" cap="none" strike="noStrike"/>
+            <a:endParaRPr/>
           </a:p>
         </p:txBody>
       </p:sp>
@@ -3604,7 +3640,7 @@
     </p:bg>
     <p:spTree>
       <p:nvGrpSpPr>
-        <p:cNvPr id="202" name="Shape 202"/>
+        <p:cNvPr id="191" name="Shape 191"/>
         <p:cNvGrpSpPr/>
         <p:nvPr/>
       </p:nvGrpSpPr>
@@ -3618,7 +3654,7 @@
       </p:grpSpPr>
       <p:sp>
         <p:nvSpPr>
-          <p:cNvPr id="203" name="Google Shape;203;p27"/>
+          <p:cNvPr id="192" name="Google Shape;192;p25"/>
           <p:cNvSpPr txBox="1"/>
           <p:nvPr>
             <p:ph type="title"/>
@@ -3626,8 +3662,8 @@
         </p:nvSpPr>
         <p:spPr>
           <a:xfrm>
-            <a:off x="369989" y="554985"/>
-            <a:ext cx="4841079" cy="1179970"/>
+            <a:off x="369989" y="554971"/>
+            <a:ext cx="4841087" cy="1179941"/>
           </a:xfrm>
           <a:prstGeom prst="rect">
             <a:avLst/>
@@ -3806,7 +3842,7 @@
       </p:sp>
       <p:sp>
         <p:nvSpPr>
-          <p:cNvPr id="204" name="Google Shape;204;p27"/>
+          <p:cNvPr id="193" name="Google Shape;193;p25"/>
           <p:cNvSpPr txBox="1"/>
           <p:nvPr>
             <p:ph idx="1" type="body"/>
@@ -3814,8 +3850,8 @@
         </p:nvSpPr>
         <p:spPr>
           <a:xfrm>
-            <a:off x="6452739" y="1120571"/>
-            <a:ext cx="5011875" cy="992375"/>
+            <a:off x="6452749" y="1120543"/>
+            <a:ext cx="5011883" cy="992350"/>
           </a:xfrm>
           <a:prstGeom prst="rect">
             <a:avLst/>
@@ -4017,7 +4053,7 @@
       </p:sp>
       <p:pic>
         <p:nvPicPr>
-          <p:cNvPr descr="Logo2.pngGoogle Shape;140;p12" id="205" name="Google Shape;205;p27"/>
+          <p:cNvPr descr="Logo2.pngGoogle Shape;140;p12" id="194" name="Google Shape;194;p25"/>
           <p:cNvPicPr preferRelativeResize="0"/>
           <p:nvPr/>
         </p:nvPicPr>
@@ -4030,8 +4066,8 @@
         </p:blipFill>
         <p:spPr>
           <a:xfrm>
-            <a:off x="10648199" y="273526"/>
-            <a:ext cx="1184038" cy="337125"/>
+            <a:off x="10648216" y="273520"/>
+            <a:ext cx="1184040" cy="337117"/>
           </a:xfrm>
           <a:prstGeom prst="rect">
             <a:avLst/>
@@ -4044,7 +4080,7 @@
       </p:pic>
       <p:pic>
         <p:nvPicPr>
-          <p:cNvPr descr="check.pngGoogle Shape;141;p12" id="206" name="Google Shape;206;p27"/>
+          <p:cNvPr descr="check.pngGoogle Shape;141;p12" id="195" name="Google Shape;195;p25"/>
           <p:cNvPicPr preferRelativeResize="0"/>
           <p:nvPr/>
         </p:nvPicPr>
@@ -4057,8 +4093,8 @@
         </p:blipFill>
         <p:spPr>
           <a:xfrm>
-            <a:off x="6093048" y="813845"/>
-            <a:ext cx="255995" cy="255996"/>
+            <a:off x="6093058" y="813825"/>
+            <a:ext cx="255988" cy="255990"/>
           </a:xfrm>
           <a:prstGeom prst="rect">
             <a:avLst/>
@@ -4071,7 +4107,7 @@
       </p:pic>
       <p:sp>
         <p:nvSpPr>
-          <p:cNvPr id="207" name="Google Shape;207;p27"/>
+          <p:cNvPr id="196" name="Google Shape;196;p25"/>
           <p:cNvSpPr txBox="1"/>
           <p:nvPr>
             <p:ph idx="2" type="body"/>
@@ -4079,8 +4115,8 @@
         </p:nvSpPr>
         <p:spPr>
           <a:xfrm>
-            <a:off x="6452739" y="2461070"/>
-            <a:ext cx="5011875" cy="992375"/>
+            <a:off x="6452749" y="2461009"/>
+            <a:ext cx="5011883" cy="992350"/>
           </a:xfrm>
           <a:prstGeom prst="rect">
             <a:avLst/>
@@ -4227,7 +4263,7 @@
       </p:sp>
       <p:pic>
         <p:nvPicPr>
-          <p:cNvPr descr="check.pngGoogle Shape;144;p12" id="208" name="Google Shape;208;p27"/>
+          <p:cNvPr descr="check.pngGoogle Shape;144;p12" id="197" name="Google Shape;197;p25"/>
           <p:cNvPicPr preferRelativeResize="0"/>
           <p:nvPr/>
         </p:nvPicPr>
@@ -4240,8 +4276,8 @@
         </p:blipFill>
         <p:spPr>
           <a:xfrm>
-            <a:off x="6093048" y="2154346"/>
-            <a:ext cx="255995" cy="255995"/>
+            <a:off x="6093058" y="2154291"/>
+            <a:ext cx="255988" cy="255988"/>
           </a:xfrm>
           <a:prstGeom prst="rect">
             <a:avLst/>
@@ -4254,7 +4290,7 @@
       </p:pic>
       <p:sp>
         <p:nvSpPr>
-          <p:cNvPr id="209" name="Google Shape;209;p27"/>
+          <p:cNvPr id="198" name="Google Shape;198;p25"/>
           <p:cNvSpPr txBox="1"/>
           <p:nvPr>
             <p:ph idx="3" type="body"/>
@@ -4262,8 +4298,8 @@
         </p:nvSpPr>
         <p:spPr>
           <a:xfrm>
-            <a:off x="6452739" y="3801570"/>
-            <a:ext cx="5011875" cy="992375"/>
+            <a:off x="6452749" y="3801476"/>
+            <a:ext cx="5011883" cy="992350"/>
           </a:xfrm>
           <a:prstGeom prst="rect">
             <a:avLst/>
@@ -4410,7 +4446,7 @@
       </p:sp>
       <p:pic>
         <p:nvPicPr>
-          <p:cNvPr descr="check.pngGoogle Shape;147;p12" id="210" name="Google Shape;210;p27"/>
+          <p:cNvPr descr="check.pngGoogle Shape;147;p12" id="199" name="Google Shape;199;p25"/>
           <p:cNvPicPr preferRelativeResize="0"/>
           <p:nvPr/>
         </p:nvPicPr>
@@ -4423,8 +4459,8 @@
         </p:blipFill>
         <p:spPr>
           <a:xfrm>
-            <a:off x="6093048" y="3494846"/>
-            <a:ext cx="255995" cy="255995"/>
+            <a:off x="6093058" y="3494759"/>
+            <a:ext cx="255988" cy="255988"/>
           </a:xfrm>
           <a:prstGeom prst="rect">
             <a:avLst/>
@@ -4437,7 +4473,7 @@
       </p:pic>
       <p:sp>
         <p:nvSpPr>
-          <p:cNvPr id="211" name="Google Shape;211;p27"/>
+          <p:cNvPr id="200" name="Google Shape;200;p25"/>
           <p:cNvSpPr txBox="1"/>
           <p:nvPr>
             <p:ph idx="4" type="body"/>
@@ -4445,8 +4481,8 @@
         </p:nvSpPr>
         <p:spPr>
           <a:xfrm>
-            <a:off x="6452739" y="5153004"/>
-            <a:ext cx="5011875" cy="992375"/>
+            <a:off x="6452749" y="5152875"/>
+            <a:ext cx="5011883" cy="992350"/>
           </a:xfrm>
           <a:prstGeom prst="rect">
             <a:avLst/>
@@ -4593,7 +4629,7 @@
       </p:sp>
       <p:pic>
         <p:nvPicPr>
-          <p:cNvPr descr="check.pngGoogle Shape;150;p12" id="212" name="Google Shape;212;p27"/>
+          <p:cNvPr descr="check.pngGoogle Shape;150;p12" id="201" name="Google Shape;201;p25"/>
           <p:cNvPicPr preferRelativeResize="0"/>
           <p:nvPr/>
         </p:nvPicPr>
@@ -4606,8 +4642,8 @@
         </p:blipFill>
         <p:spPr>
           <a:xfrm>
-            <a:off x="6093048" y="4846277"/>
-            <a:ext cx="255995" cy="255995"/>
+            <a:off x="6093058" y="4846156"/>
+            <a:ext cx="255988" cy="255988"/>
           </a:xfrm>
           <a:prstGeom prst="rect">
             <a:avLst/>
@@ -4620,20 +4656,20 @@
       </p:pic>
       <p:cxnSp>
         <p:nvCxnSpPr>
-          <p:cNvPr id="213" name="Google Shape;213;p27"/>
+          <p:cNvPr id="202" name="Google Shape;202;p25"/>
           <p:cNvCxnSpPr/>
           <p:nvPr/>
         </p:nvCxnSpPr>
         <p:spPr>
           <a:xfrm>
-            <a:off x="5703925" y="383190"/>
-            <a:ext cx="0" cy="6097847"/>
+            <a:off x="5703935" y="383180"/>
+            <a:ext cx="0" cy="6097694"/>
           </a:xfrm>
           <a:prstGeom prst="straightConnector1">
             <a:avLst/>
           </a:prstGeom>
           <a:noFill/>
-          <a:ln cap="flat" cmpd="sng" w="12700">
+          <a:ln cap="flat" cmpd="sng" w="16933">
             <a:solidFill>
               <a:schemeClr val="accent1"/>
             </a:solidFill>
@@ -4646,7 +4682,7 @@
       </p:cxnSp>
       <p:sp>
         <p:nvSpPr>
-          <p:cNvPr id="214" name="Google Shape;214;p27"/>
+          <p:cNvPr id="203" name="Google Shape;203;p25"/>
           <p:cNvSpPr txBox="1"/>
           <p:nvPr>
             <p:ph idx="5" type="body"/>
@@ -4654,8 +4690,8 @@
         </p:nvSpPr>
         <p:spPr>
           <a:xfrm>
-            <a:off x="369989" y="1415785"/>
-            <a:ext cx="4571486" cy="2682333"/>
+            <a:off x="369989" y="1415750"/>
+            <a:ext cx="4571494" cy="2682266"/>
           </a:xfrm>
           <a:prstGeom prst="rect">
             <a:avLst/>
@@ -4802,7 +4838,7 @@
       </p:sp>
       <p:sp>
         <p:nvSpPr>
-          <p:cNvPr id="215" name="Google Shape;215;p27"/>
+          <p:cNvPr id="204" name="Google Shape;204;p25"/>
           <p:cNvSpPr txBox="1"/>
           <p:nvPr>
             <p:ph idx="12" type="sldNum"/>
@@ -4810,8 +4846,8 @@
         </p:nvSpPr>
         <p:spPr>
           <a:xfrm>
-            <a:off x="11652438" y="6343529"/>
-            <a:ext cx="169196" cy="163996"/>
+            <a:off x="11652456" y="6343371"/>
+            <a:ext cx="169196" cy="163992"/>
           </a:xfrm>
           <a:prstGeom prst="rect">
             <a:avLst/>
@@ -4826,7 +4862,7 @@
             <a:spAutoFit/>
           </a:bodyPr>
           <a:lstStyle>
-            <a:lvl1pPr indent="-50800" lvl="0" marL="50800" algn="r">
+            <a:lvl1pPr indent="-38100" lvl="0" marL="38100" marR="0" algn="r">
               <a:lnSpc>
                 <a:spcPct val="100000"/>
               </a:lnSpc>
@@ -4842,7 +4878,7 @@
               <a:buSzPts val="1067"/>
               <a:buFont typeface="Montserrat"/>
               <a:buNone/>
-              <a:defRPr b="1" sz="1067">
+              <a:defRPr b="1" i="0" sz="1067" u="none" cap="none" strike="noStrike">
                 <a:solidFill>
                   <a:srgbClr val="E0DAFF"/>
                 </a:solidFill>
@@ -4852,7 +4888,7 @@
                 <a:sym typeface="Montserrat"/>
               </a:defRPr>
             </a:lvl1pPr>
-            <a:lvl2pPr indent="-50800" lvl="1" marL="50800" algn="r">
+            <a:lvl2pPr indent="-38100" lvl="1" marL="38100" marR="0" algn="r">
               <a:lnSpc>
                 <a:spcPct val="100000"/>
               </a:lnSpc>
@@ -4868,7 +4904,7 @@
               <a:buSzPts val="1067"/>
               <a:buFont typeface="Montserrat"/>
               <a:buNone/>
-              <a:defRPr b="1" sz="1067">
+              <a:defRPr b="1" i="0" sz="1067" u="none" cap="none" strike="noStrike">
                 <a:solidFill>
                   <a:srgbClr val="E0DAFF"/>
                 </a:solidFill>
@@ -4878,7 +4914,7 @@
                 <a:sym typeface="Montserrat"/>
               </a:defRPr>
             </a:lvl2pPr>
-            <a:lvl3pPr indent="-50800" lvl="2" marL="50800" algn="r">
+            <a:lvl3pPr indent="-38100" lvl="2" marL="38100" marR="0" algn="r">
               <a:lnSpc>
                 <a:spcPct val="100000"/>
               </a:lnSpc>
@@ -4894,7 +4930,7 @@
               <a:buSzPts val="1067"/>
               <a:buFont typeface="Montserrat"/>
               <a:buNone/>
-              <a:defRPr b="1" sz="1067">
+              <a:defRPr b="1" i="0" sz="1067" u="none" cap="none" strike="noStrike">
                 <a:solidFill>
                   <a:srgbClr val="E0DAFF"/>
                 </a:solidFill>
@@ -4904,7 +4940,7 @@
                 <a:sym typeface="Montserrat"/>
               </a:defRPr>
             </a:lvl3pPr>
-            <a:lvl4pPr indent="-50800" lvl="3" marL="50800" algn="r">
+            <a:lvl4pPr indent="-38100" lvl="3" marL="38100" marR="0" algn="r">
               <a:lnSpc>
                 <a:spcPct val="100000"/>
               </a:lnSpc>
@@ -4920,7 +4956,7 @@
               <a:buSzPts val="1067"/>
               <a:buFont typeface="Montserrat"/>
               <a:buNone/>
-              <a:defRPr b="1" sz="1067">
+              <a:defRPr b="1" i="0" sz="1067" u="none" cap="none" strike="noStrike">
                 <a:solidFill>
                   <a:srgbClr val="E0DAFF"/>
                 </a:solidFill>
@@ -4930,7 +4966,7 @@
                 <a:sym typeface="Montserrat"/>
               </a:defRPr>
             </a:lvl4pPr>
-            <a:lvl5pPr indent="-50800" lvl="4" marL="50800" algn="r">
+            <a:lvl5pPr indent="-38100" lvl="4" marL="38100" marR="0" algn="r">
               <a:lnSpc>
                 <a:spcPct val="100000"/>
               </a:lnSpc>
@@ -4946,7 +4982,7 @@
               <a:buSzPts val="1067"/>
               <a:buFont typeface="Montserrat"/>
               <a:buNone/>
-              <a:defRPr b="1" sz="1067">
+              <a:defRPr b="1" i="0" sz="1067" u="none" cap="none" strike="noStrike">
                 <a:solidFill>
                   <a:srgbClr val="E0DAFF"/>
                 </a:solidFill>
@@ -4956,7 +4992,7 @@
                 <a:sym typeface="Montserrat"/>
               </a:defRPr>
             </a:lvl5pPr>
-            <a:lvl6pPr indent="-50800" lvl="5" marL="50800" algn="r">
+            <a:lvl6pPr indent="-38100" lvl="5" marL="38100" marR="0" algn="r">
               <a:lnSpc>
                 <a:spcPct val="100000"/>
               </a:lnSpc>
@@ -4972,7 +5008,7 @@
               <a:buSzPts val="1067"/>
               <a:buFont typeface="Montserrat"/>
               <a:buNone/>
-              <a:defRPr b="1" sz="1067">
+              <a:defRPr b="1" i="0" sz="1067" u="none" cap="none" strike="noStrike">
                 <a:solidFill>
                   <a:srgbClr val="E0DAFF"/>
                 </a:solidFill>
@@ -4982,7 +5018,7 @@
                 <a:sym typeface="Montserrat"/>
               </a:defRPr>
             </a:lvl6pPr>
-            <a:lvl7pPr indent="-50800" lvl="6" marL="50800" algn="r">
+            <a:lvl7pPr indent="-38100" lvl="6" marL="38100" marR="0" algn="r">
               <a:lnSpc>
                 <a:spcPct val="100000"/>
               </a:lnSpc>
@@ -4998,7 +5034,7 @@
               <a:buSzPts val="1067"/>
               <a:buFont typeface="Montserrat"/>
               <a:buNone/>
-              <a:defRPr b="1" sz="1067">
+              <a:defRPr b="1" i="0" sz="1067" u="none" cap="none" strike="noStrike">
                 <a:solidFill>
                   <a:srgbClr val="E0DAFF"/>
                 </a:solidFill>
@@ -5008,7 +5044,7 @@
                 <a:sym typeface="Montserrat"/>
               </a:defRPr>
             </a:lvl7pPr>
-            <a:lvl8pPr indent="-50800" lvl="7" marL="50800" algn="r">
+            <a:lvl8pPr indent="-38100" lvl="7" marL="38100" marR="0" algn="r">
               <a:lnSpc>
                 <a:spcPct val="100000"/>
               </a:lnSpc>
@@ -5024,7 +5060,7 @@
               <a:buSzPts val="1067"/>
               <a:buFont typeface="Montserrat"/>
               <a:buNone/>
-              <a:defRPr b="1" sz="1067">
+              <a:defRPr b="1" i="0" sz="1067" u="none" cap="none" strike="noStrike">
                 <a:solidFill>
                   <a:srgbClr val="E0DAFF"/>
                 </a:solidFill>
@@ -5034,7 +5070,7 @@
                 <a:sym typeface="Montserrat"/>
               </a:defRPr>
             </a:lvl8pPr>
-            <a:lvl9pPr indent="-50800" lvl="8" marL="50800" algn="r">
+            <a:lvl9pPr indent="-38100" lvl="8" marL="38100" marR="0" algn="r">
               <a:lnSpc>
                 <a:spcPct val="100000"/>
               </a:lnSpc>
@@ -5050,7 +5086,7 @@
               <a:buSzPts val="1067"/>
               <a:buFont typeface="Montserrat"/>
               <a:buNone/>
-              <a:defRPr b="1" sz="1067">
+              <a:defRPr b="1" i="0" sz="1067" u="none" cap="none" strike="noStrike">
                 <a:solidFill>
                   <a:srgbClr val="E0DAFF"/>
                 </a:solidFill>
@@ -5062,7 +5098,7 @@
             </a:lvl9pPr>
           </a:lstStyle>
           <a:p>
-            <a:pPr indent="-50800" lvl="0" marL="50800" rtl="0" algn="r">
+            <a:pPr indent="-38100" lvl="0" marL="38100" rtl="0" algn="r">
               <a:spcBef>
                 <a:spcPts val="0"/>
               </a:spcBef>
@@ -5075,7 +5111,7 @@
               <a:rPr lang="en"/>
               <a:t>‹#›</a:t>
             </a:fld>
-            <a:endParaRPr i="0" u="none" cap="none" strike="noStrike"/>
+            <a:endParaRPr/>
           </a:p>
         </p:txBody>
       </p:sp>
@@ -5092,7 +5128,7 @@
   <p:cSld name="CUSTOM_13">
     <p:spTree>
       <p:nvGrpSpPr>
-        <p:cNvPr id="216" name="Shape 216"/>
+        <p:cNvPr id="205" name="Shape 205"/>
         <p:cNvGrpSpPr/>
         <p:nvPr/>
       </p:nvGrpSpPr>
@@ -5106,14 +5142,14 @@
       </p:grpSpPr>
       <p:sp>
         <p:nvSpPr>
-          <p:cNvPr id="217" name="Google Shape;217;p28"/>
+          <p:cNvPr id="206" name="Google Shape;206;p26"/>
           <p:cNvSpPr txBox="1"/>
           <p:nvPr/>
         </p:nvSpPr>
         <p:spPr>
           <a:xfrm>
-            <a:off x="369989" y="2579837"/>
-            <a:ext cx="1106772" cy="1539161"/>
+            <a:off x="369989" y="2579773"/>
+            <a:ext cx="1106774" cy="1539123"/>
           </a:xfrm>
           <a:prstGeom prst="rect">
             <a:avLst/>
@@ -5158,13 +5194,21 @@
               </a:rPr>
               <a:t>“</a:t>
             </a:r>
-            <a:endParaRPr/>
+            <a:endParaRPr b="0" i="0" sz="1867" u="none" cap="none" strike="noStrike">
+              <a:solidFill>
+                <a:schemeClr val="dk1"/>
+              </a:solidFill>
+              <a:latin typeface="Arial"/>
+              <a:ea typeface="Arial"/>
+              <a:cs typeface="Arial"/>
+              <a:sym typeface="Arial"/>
+            </a:endParaRPr>
           </a:p>
         </p:txBody>
       </p:sp>
       <p:sp>
         <p:nvSpPr>
-          <p:cNvPr id="218" name="Google Shape;218;p28"/>
+          <p:cNvPr id="207" name="Google Shape;207;p26"/>
           <p:cNvSpPr txBox="1"/>
           <p:nvPr>
             <p:ph type="title"/>
@@ -5172,8 +5216,8 @@
         </p:nvSpPr>
         <p:spPr>
           <a:xfrm>
-            <a:off x="369989" y="554985"/>
-            <a:ext cx="11451714" cy="1179970"/>
+            <a:off x="369989" y="554971"/>
+            <a:ext cx="11451732" cy="1179941"/>
           </a:xfrm>
           <a:prstGeom prst="rect">
             <a:avLst/>
@@ -5347,7 +5391,7 @@
       </p:sp>
       <p:sp>
         <p:nvSpPr>
-          <p:cNvPr id="219" name="Google Shape;219;p28"/>
+          <p:cNvPr id="208" name="Google Shape;208;p26"/>
           <p:cNvSpPr txBox="1"/>
           <p:nvPr>
             <p:ph idx="1" type="body"/>
@@ -5355,8 +5399,8 @@
         </p:nvSpPr>
         <p:spPr>
           <a:xfrm>
-            <a:off x="726948" y="4963874"/>
-            <a:ext cx="4733882" cy="1422364"/>
+            <a:off x="726950" y="4963749"/>
+            <a:ext cx="4733890" cy="1422328"/>
           </a:xfrm>
           <a:prstGeom prst="rect">
             <a:avLst/>
@@ -5543,7 +5587,7 @@
       </p:sp>
       <p:sp>
         <p:nvSpPr>
-          <p:cNvPr id="220" name="Google Shape;220;p28"/>
+          <p:cNvPr id="209" name="Google Shape;209;p26"/>
           <p:cNvSpPr txBox="1"/>
           <p:nvPr>
             <p:ph idx="2" type="body"/>
@@ -5551,8 +5595,8 @@
         </p:nvSpPr>
         <p:spPr>
           <a:xfrm>
-            <a:off x="726948" y="3087021"/>
-            <a:ext cx="4733882" cy="1463963"/>
+            <a:off x="726950" y="3086944"/>
+            <a:ext cx="4733890" cy="1463926"/>
           </a:xfrm>
           <a:prstGeom prst="rect">
             <a:avLst/>
@@ -5699,14 +5743,14 @@
       </p:sp>
       <p:sp>
         <p:nvSpPr>
-          <p:cNvPr id="221" name="Google Shape;221;p28"/>
+          <p:cNvPr id="210" name="Google Shape;210;p26"/>
           <p:cNvSpPr txBox="1"/>
           <p:nvPr/>
         </p:nvSpPr>
         <p:spPr>
           <a:xfrm>
-            <a:off x="5745580" y="2579837"/>
-            <a:ext cx="1106772" cy="1539161"/>
+            <a:off x="5745590" y="2579773"/>
+            <a:ext cx="1106774" cy="1539123"/>
           </a:xfrm>
           <a:prstGeom prst="rect">
             <a:avLst/>
@@ -5751,13 +5795,21 @@
               </a:rPr>
               <a:t>“</a:t>
             </a:r>
-            <a:endParaRPr/>
+            <a:endParaRPr b="0" i="0" sz="1867" u="none" cap="none" strike="noStrike">
+              <a:solidFill>
+                <a:schemeClr val="dk1"/>
+              </a:solidFill>
+              <a:latin typeface="Arial"/>
+              <a:ea typeface="Arial"/>
+              <a:cs typeface="Arial"/>
+              <a:sym typeface="Arial"/>
+            </a:endParaRPr>
           </a:p>
         </p:txBody>
       </p:sp>
       <p:sp>
         <p:nvSpPr>
-          <p:cNvPr id="222" name="Google Shape;222;p28"/>
+          <p:cNvPr id="211" name="Google Shape;211;p26"/>
           <p:cNvSpPr txBox="1"/>
           <p:nvPr>
             <p:ph idx="3" type="body"/>
@@ -5765,8 +5817,8 @@
         </p:nvSpPr>
         <p:spPr>
           <a:xfrm>
-            <a:off x="6102537" y="3087021"/>
-            <a:ext cx="4733882" cy="1463963"/>
+            <a:off x="6102547" y="3086944"/>
+            <a:ext cx="4733890" cy="1463926"/>
           </a:xfrm>
           <a:prstGeom prst="rect">
             <a:avLst/>
@@ -5913,7 +5965,7 @@
       </p:sp>
       <p:pic>
         <p:nvPicPr>
-          <p:cNvPr descr="Logo-white.pngGoogle Shape;164;p13" id="223" name="Google Shape;223;p28"/>
+          <p:cNvPr descr="Logo-white.pngGoogle Shape;164;p13" id="212" name="Google Shape;212;p26"/>
           <p:cNvPicPr preferRelativeResize="0"/>
           <p:nvPr/>
         </p:nvPicPr>
@@ -5926,8 +5978,8 @@
         </p:blipFill>
         <p:spPr>
           <a:xfrm>
-            <a:off x="10665200" y="303528"/>
-            <a:ext cx="1156572" cy="277161"/>
+            <a:off x="10665217" y="303520"/>
+            <a:ext cx="1156574" cy="277154"/>
           </a:xfrm>
           <a:prstGeom prst="rect">
             <a:avLst/>
@@ -5940,7 +5992,7 @@
       </p:pic>
       <p:sp>
         <p:nvSpPr>
-          <p:cNvPr id="224" name="Google Shape;224;p28"/>
+          <p:cNvPr id="213" name="Google Shape;213;p26"/>
           <p:cNvSpPr txBox="1"/>
           <p:nvPr>
             <p:ph idx="12" type="sldNum"/>
@@ -5948,8 +6000,8 @@
         </p:nvSpPr>
         <p:spPr>
           <a:xfrm>
-            <a:off x="11652438" y="6343529"/>
-            <a:ext cx="169196" cy="163996"/>
+            <a:off x="11652456" y="6343371"/>
+            <a:ext cx="169196" cy="163992"/>
           </a:xfrm>
           <a:prstGeom prst="rect">
             <a:avLst/>
@@ -5964,7 +6016,7 @@
             <a:spAutoFit/>
           </a:bodyPr>
           <a:lstStyle>
-            <a:lvl1pPr indent="-50800" lvl="0" marL="50800" algn="r">
+            <a:lvl1pPr indent="-38100" lvl="0" marL="38100" marR="0" algn="r">
               <a:lnSpc>
                 <a:spcPct val="100000"/>
               </a:lnSpc>
@@ -5980,7 +6032,7 @@
               <a:buSzPts val="1067"/>
               <a:buFont typeface="Montserrat"/>
               <a:buNone/>
-              <a:defRPr b="1" sz="1067">
+              <a:defRPr b="1" i="0" sz="1067" u="none" cap="none" strike="noStrike">
                 <a:solidFill>
                   <a:srgbClr val="E0DAFF"/>
                 </a:solidFill>
@@ -5990,7 +6042,7 @@
                 <a:sym typeface="Montserrat"/>
               </a:defRPr>
             </a:lvl1pPr>
-            <a:lvl2pPr indent="-50800" lvl="1" marL="50800" algn="r">
+            <a:lvl2pPr indent="-38100" lvl="1" marL="38100" marR="0" algn="r">
               <a:lnSpc>
                 <a:spcPct val="100000"/>
               </a:lnSpc>
@@ -6006,7 +6058,7 @@
               <a:buSzPts val="1067"/>
               <a:buFont typeface="Montserrat"/>
               <a:buNone/>
-              <a:defRPr b="1" sz="1067">
+              <a:defRPr b="1" i="0" sz="1067" u="none" cap="none" strike="noStrike">
                 <a:solidFill>
                   <a:srgbClr val="E0DAFF"/>
                 </a:solidFill>
@@ -6016,7 +6068,7 @@
                 <a:sym typeface="Montserrat"/>
               </a:defRPr>
             </a:lvl2pPr>
-            <a:lvl3pPr indent="-50800" lvl="2" marL="50800" algn="r">
+            <a:lvl3pPr indent="-38100" lvl="2" marL="38100" marR="0" algn="r">
               <a:lnSpc>
                 <a:spcPct val="100000"/>
               </a:lnSpc>
@@ -6032,7 +6084,7 @@
               <a:buSzPts val="1067"/>
               <a:buFont typeface="Montserrat"/>
               <a:buNone/>
-              <a:defRPr b="1" sz="1067">
+              <a:defRPr b="1" i="0" sz="1067" u="none" cap="none" strike="noStrike">
                 <a:solidFill>
                   <a:srgbClr val="E0DAFF"/>
                 </a:solidFill>
@@ -6042,7 +6094,7 @@
                 <a:sym typeface="Montserrat"/>
               </a:defRPr>
             </a:lvl3pPr>
-            <a:lvl4pPr indent="-50800" lvl="3" marL="50800" algn="r">
+            <a:lvl4pPr indent="-38100" lvl="3" marL="38100" marR="0" algn="r">
               <a:lnSpc>
                 <a:spcPct val="100000"/>
               </a:lnSpc>
@@ -6058,7 +6110,7 @@
               <a:buSzPts val="1067"/>
               <a:buFont typeface="Montserrat"/>
               <a:buNone/>
-              <a:defRPr b="1" sz="1067">
+              <a:defRPr b="1" i="0" sz="1067" u="none" cap="none" strike="noStrike">
                 <a:solidFill>
                   <a:srgbClr val="E0DAFF"/>
                 </a:solidFill>
@@ -6068,7 +6120,7 @@
                 <a:sym typeface="Montserrat"/>
               </a:defRPr>
             </a:lvl4pPr>
-            <a:lvl5pPr indent="-50800" lvl="4" marL="50800" algn="r">
+            <a:lvl5pPr indent="-38100" lvl="4" marL="38100" marR="0" algn="r">
               <a:lnSpc>
                 <a:spcPct val="100000"/>
               </a:lnSpc>
@@ -6084,7 +6136,7 @@
               <a:buSzPts val="1067"/>
               <a:buFont typeface="Montserrat"/>
               <a:buNone/>
-              <a:defRPr b="1" sz="1067">
+              <a:defRPr b="1" i="0" sz="1067" u="none" cap="none" strike="noStrike">
                 <a:solidFill>
                   <a:srgbClr val="E0DAFF"/>
                 </a:solidFill>
@@ -6094,7 +6146,7 @@
                 <a:sym typeface="Montserrat"/>
               </a:defRPr>
             </a:lvl5pPr>
-            <a:lvl6pPr indent="-50800" lvl="5" marL="50800" algn="r">
+            <a:lvl6pPr indent="-38100" lvl="5" marL="38100" marR="0" algn="r">
               <a:lnSpc>
                 <a:spcPct val="100000"/>
               </a:lnSpc>
@@ -6110,7 +6162,7 @@
               <a:buSzPts val="1067"/>
               <a:buFont typeface="Montserrat"/>
               <a:buNone/>
-              <a:defRPr b="1" sz="1067">
+              <a:defRPr b="1" i="0" sz="1067" u="none" cap="none" strike="noStrike">
                 <a:solidFill>
                   <a:srgbClr val="E0DAFF"/>
                 </a:solidFill>
@@ -6120,7 +6172,7 @@
                 <a:sym typeface="Montserrat"/>
               </a:defRPr>
             </a:lvl6pPr>
-            <a:lvl7pPr indent="-50800" lvl="6" marL="50800" algn="r">
+            <a:lvl7pPr indent="-38100" lvl="6" marL="38100" marR="0" algn="r">
               <a:lnSpc>
                 <a:spcPct val="100000"/>
               </a:lnSpc>
@@ -6136,7 +6188,7 @@
               <a:buSzPts val="1067"/>
               <a:buFont typeface="Montserrat"/>
               <a:buNone/>
-              <a:defRPr b="1" sz="1067">
+              <a:defRPr b="1" i="0" sz="1067" u="none" cap="none" strike="noStrike">
                 <a:solidFill>
                   <a:srgbClr val="E0DAFF"/>
                 </a:solidFill>
@@ -6146,7 +6198,7 @@
                 <a:sym typeface="Montserrat"/>
               </a:defRPr>
             </a:lvl7pPr>
-            <a:lvl8pPr indent="-50800" lvl="7" marL="50800" algn="r">
+            <a:lvl8pPr indent="-38100" lvl="7" marL="38100" marR="0" algn="r">
               <a:lnSpc>
                 <a:spcPct val="100000"/>
               </a:lnSpc>
@@ -6162,7 +6214,7 @@
               <a:buSzPts val="1067"/>
               <a:buFont typeface="Montserrat"/>
               <a:buNone/>
-              <a:defRPr b="1" sz="1067">
+              <a:defRPr b="1" i="0" sz="1067" u="none" cap="none" strike="noStrike">
                 <a:solidFill>
                   <a:srgbClr val="E0DAFF"/>
                 </a:solidFill>
@@ -6172,7 +6224,7 @@
                 <a:sym typeface="Montserrat"/>
               </a:defRPr>
             </a:lvl8pPr>
-            <a:lvl9pPr indent="-50800" lvl="8" marL="50800" algn="r">
+            <a:lvl9pPr indent="-38100" lvl="8" marL="38100" marR="0" algn="r">
               <a:lnSpc>
                 <a:spcPct val="100000"/>
               </a:lnSpc>
@@ -6188,7 +6240,7 @@
               <a:buSzPts val="1067"/>
               <a:buFont typeface="Montserrat"/>
               <a:buNone/>
-              <a:defRPr b="1" sz="1067">
+              <a:defRPr b="1" i="0" sz="1067" u="none" cap="none" strike="noStrike">
                 <a:solidFill>
                   <a:srgbClr val="E0DAFF"/>
                 </a:solidFill>
@@ -6200,7 +6252,7 @@
             </a:lvl9pPr>
           </a:lstStyle>
           <a:p>
-            <a:pPr indent="-50800" lvl="0" marL="50800" rtl="0" algn="r">
+            <a:pPr indent="-38100" lvl="0" marL="38100" rtl="0" algn="r">
               <a:spcBef>
                 <a:spcPts val="0"/>
               </a:spcBef>
@@ -6213,7 +6265,7 @@
               <a:rPr lang="en"/>
               <a:t>‹#›</a:t>
             </a:fld>
-            <a:endParaRPr i="0" u="none" cap="none" strike="noStrike"/>
+            <a:endParaRPr/>
           </a:p>
         </p:txBody>
       </p:sp>
@@ -6230,7 +6282,7 @@
   <p:cSld name="CUSTOM_15">
     <p:spTree>
       <p:nvGrpSpPr>
-        <p:cNvPr id="225" name="Shape 225"/>
+        <p:cNvPr id="214" name="Shape 214"/>
         <p:cNvGrpSpPr/>
         <p:nvPr/>
       </p:nvGrpSpPr>
@@ -6244,7 +6296,7 @@
       </p:grpSpPr>
       <p:sp>
         <p:nvSpPr>
-          <p:cNvPr id="226" name="Google Shape;226;p29"/>
+          <p:cNvPr id="215" name="Google Shape;215;p27"/>
           <p:cNvSpPr txBox="1"/>
           <p:nvPr>
             <p:ph type="title"/>
@@ -6252,8 +6304,8 @@
         </p:nvSpPr>
         <p:spPr>
           <a:xfrm>
-            <a:off x="7095722" y="674783"/>
-            <a:ext cx="4725882" cy="772381"/>
+            <a:off x="7095733" y="674766"/>
+            <a:ext cx="4725890" cy="772362"/>
           </a:xfrm>
           <a:prstGeom prst="rect">
             <a:avLst/>
@@ -6428,7 +6480,7 @@
       </p:sp>
       <p:sp>
         <p:nvSpPr>
-          <p:cNvPr id="227" name="Google Shape;227;p29"/>
+          <p:cNvPr id="216" name="Google Shape;216;p27"/>
           <p:cNvSpPr/>
           <p:nvPr>
             <p:ph idx="2" type="pic"/>
@@ -6436,8 +6488,8 @@
         </p:nvSpPr>
         <p:spPr>
           <a:xfrm>
-            <a:off x="6095847" y="702416"/>
-            <a:ext cx="5369066" cy="5777455"/>
+            <a:off x="6095857" y="702398"/>
+            <a:ext cx="5369075" cy="5777310"/>
           </a:xfrm>
           <a:prstGeom prst="rect">
             <a:avLst/>
@@ -6450,7 +6502,7 @@
       </p:sp>
       <p:sp>
         <p:nvSpPr>
-          <p:cNvPr id="228" name="Google Shape;228;p29"/>
+          <p:cNvPr id="217" name="Google Shape;217;p27"/>
           <p:cNvSpPr txBox="1"/>
           <p:nvPr>
             <p:ph idx="1" type="body"/>
@@ -6458,8 +6510,8 @@
         </p:nvSpPr>
         <p:spPr>
           <a:xfrm>
-            <a:off x="369989" y="371791"/>
-            <a:ext cx="5110272" cy="183195"/>
+            <a:off x="369989" y="371781"/>
+            <a:ext cx="5110280" cy="183190"/>
           </a:xfrm>
           <a:prstGeom prst="rect">
             <a:avLst/>
@@ -6626,7 +6678,7 @@
       </p:sp>
       <p:pic>
         <p:nvPicPr>
-          <p:cNvPr descr="Logo-white.pngGoogle Shape;169;p14" id="229" name="Google Shape;229;p29"/>
+          <p:cNvPr descr="Logo-white.pngGoogle Shape;169;p14" id="218" name="Google Shape;218;p27"/>
           <p:cNvPicPr preferRelativeResize="0"/>
           <p:nvPr/>
         </p:nvPicPr>
@@ -6639,8 +6691,8 @@
         </p:blipFill>
         <p:spPr>
           <a:xfrm>
-            <a:off x="10665200" y="303528"/>
-            <a:ext cx="1156572" cy="277161"/>
+            <a:off x="10665217" y="303520"/>
+            <a:ext cx="1156574" cy="277154"/>
           </a:xfrm>
           <a:prstGeom prst="rect">
             <a:avLst/>
@@ -6653,7 +6705,7 @@
       </p:pic>
       <p:sp>
         <p:nvSpPr>
-          <p:cNvPr id="230" name="Google Shape;230;p29"/>
+          <p:cNvPr id="219" name="Google Shape;219;p27"/>
           <p:cNvSpPr txBox="1"/>
           <p:nvPr>
             <p:ph idx="12" type="sldNum"/>
@@ -6661,8 +6713,8 @@
         </p:nvSpPr>
         <p:spPr>
           <a:xfrm>
-            <a:off x="11652438" y="6343529"/>
-            <a:ext cx="169196" cy="163996"/>
+            <a:off x="11652456" y="6343371"/>
+            <a:ext cx="169196" cy="163992"/>
           </a:xfrm>
           <a:prstGeom prst="rect">
             <a:avLst/>
@@ -6677,7 +6729,7 @@
             <a:spAutoFit/>
           </a:bodyPr>
           <a:lstStyle>
-            <a:lvl1pPr indent="-50800" lvl="0" marL="50800" algn="r">
+            <a:lvl1pPr indent="-38100" lvl="0" marL="38100" marR="0" algn="r">
               <a:lnSpc>
                 <a:spcPct val="100000"/>
               </a:lnSpc>
@@ -6693,7 +6745,7 @@
               <a:buSzPts val="1067"/>
               <a:buFont typeface="Montserrat"/>
               <a:buNone/>
-              <a:defRPr b="1" sz="1067">
+              <a:defRPr b="1" i="0" sz="1067" u="none" cap="none" strike="noStrike">
                 <a:solidFill>
                   <a:srgbClr val="E0DAFF"/>
                 </a:solidFill>
@@ -6703,7 +6755,7 @@
                 <a:sym typeface="Montserrat"/>
               </a:defRPr>
             </a:lvl1pPr>
-            <a:lvl2pPr indent="-50800" lvl="1" marL="50800" algn="r">
+            <a:lvl2pPr indent="-38100" lvl="1" marL="38100" marR="0" algn="r">
               <a:lnSpc>
                 <a:spcPct val="100000"/>
               </a:lnSpc>
@@ -6719,7 +6771,7 @@
               <a:buSzPts val="1067"/>
               <a:buFont typeface="Montserrat"/>
               <a:buNone/>
-              <a:defRPr b="1" sz="1067">
+              <a:defRPr b="1" i="0" sz="1067" u="none" cap="none" strike="noStrike">
                 <a:solidFill>
                   <a:srgbClr val="E0DAFF"/>
                 </a:solidFill>
@@ -6729,7 +6781,7 @@
                 <a:sym typeface="Montserrat"/>
               </a:defRPr>
             </a:lvl2pPr>
-            <a:lvl3pPr indent="-50800" lvl="2" marL="50800" algn="r">
+            <a:lvl3pPr indent="-38100" lvl="2" marL="38100" marR="0" algn="r">
               <a:lnSpc>
                 <a:spcPct val="100000"/>
               </a:lnSpc>
@@ -6745,7 +6797,7 @@
               <a:buSzPts val="1067"/>
               <a:buFont typeface="Montserrat"/>
               <a:buNone/>
-              <a:defRPr b="1" sz="1067">
+              <a:defRPr b="1" i="0" sz="1067" u="none" cap="none" strike="noStrike">
                 <a:solidFill>
                   <a:srgbClr val="E0DAFF"/>
                 </a:solidFill>
@@ -6755,7 +6807,7 @@
                 <a:sym typeface="Montserrat"/>
               </a:defRPr>
             </a:lvl3pPr>
-            <a:lvl4pPr indent="-50800" lvl="3" marL="50800" algn="r">
+            <a:lvl4pPr indent="-38100" lvl="3" marL="38100" marR="0" algn="r">
               <a:lnSpc>
                 <a:spcPct val="100000"/>
               </a:lnSpc>
@@ -6771,7 +6823,7 @@
               <a:buSzPts val="1067"/>
               <a:buFont typeface="Montserrat"/>
               <a:buNone/>
-              <a:defRPr b="1" sz="1067">
+              <a:defRPr b="1" i="0" sz="1067" u="none" cap="none" strike="noStrike">
                 <a:solidFill>
                   <a:srgbClr val="E0DAFF"/>
                 </a:solidFill>
@@ -6781,7 +6833,7 @@
                 <a:sym typeface="Montserrat"/>
               </a:defRPr>
             </a:lvl4pPr>
-            <a:lvl5pPr indent="-50800" lvl="4" marL="50800" algn="r">
+            <a:lvl5pPr indent="-38100" lvl="4" marL="38100" marR="0" algn="r">
               <a:lnSpc>
                 <a:spcPct val="100000"/>
               </a:lnSpc>
@@ -6797,7 +6849,7 @@
               <a:buSzPts val="1067"/>
               <a:buFont typeface="Montserrat"/>
               <a:buNone/>
-              <a:defRPr b="1" sz="1067">
+              <a:defRPr b="1" i="0" sz="1067" u="none" cap="none" strike="noStrike">
                 <a:solidFill>
                   <a:srgbClr val="E0DAFF"/>
                 </a:solidFill>
@@ -6807,7 +6859,7 @@
                 <a:sym typeface="Montserrat"/>
               </a:defRPr>
             </a:lvl5pPr>
-            <a:lvl6pPr indent="-50800" lvl="5" marL="50800" algn="r">
+            <a:lvl6pPr indent="-38100" lvl="5" marL="38100" marR="0" algn="r">
               <a:lnSpc>
                 <a:spcPct val="100000"/>
               </a:lnSpc>
@@ -6823,7 +6875,7 @@
               <a:buSzPts val="1067"/>
               <a:buFont typeface="Montserrat"/>
               <a:buNone/>
-              <a:defRPr b="1" sz="1067">
+              <a:defRPr b="1" i="0" sz="1067" u="none" cap="none" strike="noStrike">
                 <a:solidFill>
                   <a:srgbClr val="E0DAFF"/>
                 </a:solidFill>
@@ -6833,7 +6885,7 @@
                 <a:sym typeface="Montserrat"/>
               </a:defRPr>
             </a:lvl6pPr>
-            <a:lvl7pPr indent="-50800" lvl="6" marL="50800" algn="r">
+            <a:lvl7pPr indent="-38100" lvl="6" marL="38100" marR="0" algn="r">
               <a:lnSpc>
                 <a:spcPct val="100000"/>
               </a:lnSpc>
@@ -6849,7 +6901,7 @@
               <a:buSzPts val="1067"/>
               <a:buFont typeface="Montserrat"/>
               <a:buNone/>
-              <a:defRPr b="1" sz="1067">
+              <a:defRPr b="1" i="0" sz="1067" u="none" cap="none" strike="noStrike">
                 <a:solidFill>
                   <a:srgbClr val="E0DAFF"/>
                 </a:solidFill>
@@ -6859,7 +6911,7 @@
                 <a:sym typeface="Montserrat"/>
               </a:defRPr>
             </a:lvl7pPr>
-            <a:lvl8pPr indent="-50800" lvl="7" marL="50800" algn="r">
+            <a:lvl8pPr indent="-38100" lvl="7" marL="38100" marR="0" algn="r">
               <a:lnSpc>
                 <a:spcPct val="100000"/>
               </a:lnSpc>
@@ -6875,7 +6927,7 @@
               <a:buSzPts val="1067"/>
               <a:buFont typeface="Montserrat"/>
               <a:buNone/>
-              <a:defRPr b="1" sz="1067">
+              <a:defRPr b="1" i="0" sz="1067" u="none" cap="none" strike="noStrike">
                 <a:solidFill>
                   <a:srgbClr val="E0DAFF"/>
                 </a:solidFill>
@@ -6885,7 +6937,7 @@
                 <a:sym typeface="Montserrat"/>
               </a:defRPr>
             </a:lvl8pPr>
-            <a:lvl9pPr indent="-50800" lvl="8" marL="50800" algn="r">
+            <a:lvl9pPr indent="-38100" lvl="8" marL="38100" marR="0" algn="r">
               <a:lnSpc>
                 <a:spcPct val="100000"/>
               </a:lnSpc>
@@ -6901,7 +6953,7 @@
               <a:buSzPts val="1067"/>
               <a:buFont typeface="Montserrat"/>
               <a:buNone/>
-              <a:defRPr b="1" sz="1067">
+              <a:defRPr b="1" i="0" sz="1067" u="none" cap="none" strike="noStrike">
                 <a:solidFill>
                   <a:srgbClr val="E0DAFF"/>
                 </a:solidFill>
@@ -6913,7 +6965,7 @@
             </a:lvl9pPr>
           </a:lstStyle>
           <a:p>
-            <a:pPr indent="-50800" lvl="0" marL="50800" rtl="0" algn="r">
+            <a:pPr indent="-38100" lvl="0" marL="38100" rtl="0" algn="r">
               <a:spcBef>
                 <a:spcPts val="0"/>
               </a:spcBef>
@@ -6926,7 +6978,7 @@
               <a:rPr lang="en"/>
               <a:t>‹#›</a:t>
             </a:fld>
-            <a:endParaRPr i="0" u="none" cap="none" strike="noStrike"/>
+            <a:endParaRPr/>
           </a:p>
         </p:txBody>
       </p:sp>
@@ -6943,7 +6995,7 @@
   <p:cSld name="CUSTOM_17_1">
     <p:spTree>
       <p:nvGrpSpPr>
-        <p:cNvPr id="231" name="Shape 231"/>
+        <p:cNvPr id="220" name="Shape 220"/>
         <p:cNvGrpSpPr/>
         <p:nvPr/>
       </p:nvGrpSpPr>
@@ -6957,7 +7009,7 @@
       </p:grpSpPr>
       <p:sp>
         <p:nvSpPr>
-          <p:cNvPr id="232" name="Google Shape;232;p30"/>
+          <p:cNvPr id="221" name="Google Shape;221;p28"/>
           <p:cNvSpPr txBox="1"/>
           <p:nvPr>
             <p:ph idx="1" type="body"/>
@@ -6965,8 +7017,8 @@
         </p:nvSpPr>
         <p:spPr>
           <a:xfrm>
-            <a:off x="369989" y="4432758"/>
-            <a:ext cx="2345541" cy="386790"/>
+            <a:off x="369989" y="4432646"/>
+            <a:ext cx="2345545" cy="386781"/>
           </a:xfrm>
           <a:prstGeom prst="rect">
             <a:avLst/>
@@ -7153,7 +7205,7 @@
       </p:sp>
       <p:sp>
         <p:nvSpPr>
-          <p:cNvPr id="233" name="Google Shape;233;p30"/>
+          <p:cNvPr id="222" name="Google Shape;222;p28"/>
           <p:cNvSpPr/>
           <p:nvPr>
             <p:ph idx="2" type="pic"/>
@@ -7161,8 +7213,8 @@
         </p:nvSpPr>
         <p:spPr>
           <a:xfrm>
-            <a:off x="385456" y="1782329"/>
-            <a:ext cx="2334742" cy="2363941"/>
+            <a:off x="385457" y="1782285"/>
+            <a:ext cx="2334683" cy="2363882"/>
           </a:xfrm>
           <a:prstGeom prst="rect">
             <a:avLst/>
@@ -7175,7 +7227,7 @@
       </p:sp>
       <p:sp>
         <p:nvSpPr>
-          <p:cNvPr id="234" name="Google Shape;234;p30"/>
+          <p:cNvPr id="223" name="Google Shape;223;p28"/>
           <p:cNvSpPr/>
           <p:nvPr>
             <p:ph idx="3" type="pic"/>
@@ -7183,8 +7235,8 @@
         </p:nvSpPr>
         <p:spPr>
           <a:xfrm>
-            <a:off x="2890178" y="1782329"/>
-            <a:ext cx="2334742" cy="2363941"/>
+            <a:off x="2890182" y="1782285"/>
+            <a:ext cx="2334683" cy="2363882"/>
           </a:xfrm>
           <a:prstGeom prst="rect">
             <a:avLst/>
@@ -7197,7 +7249,7 @@
       </p:sp>
       <p:sp>
         <p:nvSpPr>
-          <p:cNvPr id="235" name="Google Shape;235;p30"/>
+          <p:cNvPr id="224" name="Google Shape;224;p28"/>
           <p:cNvSpPr/>
           <p:nvPr>
             <p:ph idx="4" type="pic"/>
@@ -7205,8 +7257,8 @@
         </p:nvSpPr>
         <p:spPr>
           <a:xfrm>
-            <a:off x="5394898" y="1782329"/>
-            <a:ext cx="2334742" cy="2363941"/>
+            <a:off x="5394906" y="1782285"/>
+            <a:ext cx="2334683" cy="2363882"/>
           </a:xfrm>
           <a:prstGeom prst="rect">
             <a:avLst/>
@@ -7219,7 +7271,7 @@
       </p:sp>
       <p:sp>
         <p:nvSpPr>
-          <p:cNvPr id="236" name="Google Shape;236;p30"/>
+          <p:cNvPr id="225" name="Google Shape;225;p28"/>
           <p:cNvSpPr/>
           <p:nvPr>
             <p:ph idx="5" type="pic"/>
@@ -7227,8 +7279,8 @@
         </p:nvSpPr>
         <p:spPr>
           <a:xfrm>
-            <a:off x="7883420" y="1782329"/>
-            <a:ext cx="2334742" cy="2363941"/>
+            <a:off x="7883433" y="1782285"/>
+            <a:ext cx="2334684" cy="2363882"/>
           </a:xfrm>
           <a:prstGeom prst="rect">
             <a:avLst/>
@@ -7241,7 +7293,7 @@
       </p:sp>
       <p:sp>
         <p:nvSpPr>
-          <p:cNvPr id="237" name="Google Shape;237;p30"/>
+          <p:cNvPr id="226" name="Google Shape;226;p28"/>
           <p:cNvSpPr txBox="1"/>
           <p:nvPr>
             <p:ph idx="6" type="body"/>
@@ -7249,8 +7301,8 @@
         </p:nvSpPr>
         <p:spPr>
           <a:xfrm>
-            <a:off x="369989" y="4880001"/>
-            <a:ext cx="2345541" cy="664783"/>
+            <a:off x="369989" y="4879879"/>
+            <a:ext cx="2345545" cy="664766"/>
           </a:xfrm>
           <a:prstGeom prst="rect">
             <a:avLst/>
@@ -7397,7 +7449,7 @@
       </p:sp>
       <p:sp>
         <p:nvSpPr>
-          <p:cNvPr id="238" name="Google Shape;238;p30"/>
+          <p:cNvPr id="227" name="Google Shape;227;p28"/>
           <p:cNvSpPr txBox="1"/>
           <p:nvPr>
             <p:ph idx="7" type="body"/>
@@ -7405,8 +7457,8 @@
         </p:nvSpPr>
         <p:spPr>
           <a:xfrm>
-            <a:off x="2884778" y="4880001"/>
-            <a:ext cx="2345541" cy="664783"/>
+            <a:off x="2884782" y="4879879"/>
+            <a:ext cx="2345545" cy="664766"/>
           </a:xfrm>
           <a:prstGeom prst="rect">
             <a:avLst/>
@@ -7553,7 +7605,7 @@
       </p:sp>
       <p:sp>
         <p:nvSpPr>
-          <p:cNvPr id="239" name="Google Shape;239;p30"/>
+          <p:cNvPr id="228" name="Google Shape;228;p28"/>
           <p:cNvSpPr txBox="1"/>
           <p:nvPr>
             <p:ph idx="8" type="body"/>
@@ -7561,8 +7613,8 @@
         </p:nvSpPr>
         <p:spPr>
           <a:xfrm>
-            <a:off x="5399566" y="4880001"/>
-            <a:ext cx="2345541" cy="664783"/>
+            <a:off x="5399574" y="4879879"/>
+            <a:ext cx="2345545" cy="664766"/>
           </a:xfrm>
           <a:prstGeom prst="rect">
             <a:avLst/>
@@ -7709,7 +7761,7 @@
       </p:sp>
       <p:sp>
         <p:nvSpPr>
-          <p:cNvPr id="240" name="Google Shape;240;p30"/>
+          <p:cNvPr id="229" name="Google Shape;229;p28"/>
           <p:cNvSpPr txBox="1"/>
           <p:nvPr>
             <p:ph idx="9" type="body"/>
@@ -7717,8 +7769,8 @@
         </p:nvSpPr>
         <p:spPr>
           <a:xfrm>
-            <a:off x="7866621" y="4880001"/>
-            <a:ext cx="2345541" cy="664783"/>
+            <a:off x="7866634" y="4879879"/>
+            <a:ext cx="2345545" cy="664766"/>
           </a:xfrm>
           <a:prstGeom prst="rect">
             <a:avLst/>
@@ -7865,7 +7917,7 @@
       </p:sp>
       <p:sp>
         <p:nvSpPr>
-          <p:cNvPr id="241" name="Google Shape;241;p30"/>
+          <p:cNvPr id="230" name="Google Shape;230;p28"/>
           <p:cNvSpPr txBox="1"/>
           <p:nvPr>
             <p:ph type="title"/>
@@ -7873,8 +7925,8 @@
         </p:nvSpPr>
         <p:spPr>
           <a:xfrm>
-            <a:off x="369989" y="554985"/>
-            <a:ext cx="11451714" cy="1179970"/>
+            <a:off x="369989" y="554971"/>
+            <a:ext cx="11451732" cy="1179941"/>
           </a:xfrm>
           <a:prstGeom prst="rect">
             <a:avLst/>
@@ -8048,7 +8100,7 @@
       </p:sp>
       <p:pic>
         <p:nvPicPr>
-          <p:cNvPr descr="Logo-white.pngGoogle Shape;187;p15" id="242" name="Google Shape;242;p30"/>
+          <p:cNvPr descr="Logo-white.pngGoogle Shape;187;p15" id="231" name="Google Shape;231;p28"/>
           <p:cNvPicPr preferRelativeResize="0"/>
           <p:nvPr/>
         </p:nvPicPr>
@@ -8061,8 +8113,8 @@
         </p:blipFill>
         <p:spPr>
           <a:xfrm>
-            <a:off x="10665200" y="303528"/>
-            <a:ext cx="1156572" cy="277161"/>
+            <a:off x="10665217" y="303520"/>
+            <a:ext cx="1156574" cy="277154"/>
           </a:xfrm>
           <a:prstGeom prst="rect">
             <a:avLst/>
@@ -8075,7 +8127,7 @@
       </p:pic>
       <p:sp>
         <p:nvSpPr>
-          <p:cNvPr id="243" name="Google Shape;243;p30"/>
+          <p:cNvPr id="232" name="Google Shape;232;p28"/>
           <p:cNvSpPr txBox="1"/>
           <p:nvPr>
             <p:ph idx="12" type="sldNum"/>
@@ -8083,8 +8135,8 @@
         </p:nvSpPr>
         <p:spPr>
           <a:xfrm>
-            <a:off x="11652438" y="6343529"/>
-            <a:ext cx="169196" cy="163996"/>
+            <a:off x="11652456" y="6343371"/>
+            <a:ext cx="169196" cy="163992"/>
           </a:xfrm>
           <a:prstGeom prst="rect">
             <a:avLst/>
@@ -8099,7 +8151,7 @@
             <a:spAutoFit/>
           </a:bodyPr>
           <a:lstStyle>
-            <a:lvl1pPr indent="-50800" lvl="0" marL="50800" algn="r">
+            <a:lvl1pPr indent="-38100" lvl="0" marL="38100" marR="0" algn="r">
               <a:lnSpc>
                 <a:spcPct val="100000"/>
               </a:lnSpc>
@@ -8115,7 +8167,7 @@
               <a:buSzPts val="1067"/>
               <a:buFont typeface="Montserrat"/>
               <a:buNone/>
-              <a:defRPr b="1" sz="1067">
+              <a:defRPr b="1" i="0" sz="1067" u="none" cap="none" strike="noStrike">
                 <a:solidFill>
                   <a:srgbClr val="E0DAFF"/>
                 </a:solidFill>
@@ -8125,7 +8177,7 @@
                 <a:sym typeface="Montserrat"/>
               </a:defRPr>
             </a:lvl1pPr>
-            <a:lvl2pPr indent="-50800" lvl="1" marL="50800" algn="r">
+            <a:lvl2pPr indent="-38100" lvl="1" marL="38100" marR="0" algn="r">
               <a:lnSpc>
                 <a:spcPct val="100000"/>
               </a:lnSpc>
@@ -8141,7 +8193,7 @@
               <a:buSzPts val="1067"/>
               <a:buFont typeface="Montserrat"/>
               <a:buNone/>
-              <a:defRPr b="1" sz="1067">
+              <a:defRPr b="1" i="0" sz="1067" u="none" cap="none" strike="noStrike">
                 <a:solidFill>
                   <a:srgbClr val="E0DAFF"/>
                 </a:solidFill>
@@ -8151,7 +8203,7 @@
                 <a:sym typeface="Montserrat"/>
               </a:defRPr>
             </a:lvl2pPr>
-            <a:lvl3pPr indent="-50800" lvl="2" marL="50800" algn="r">
+            <a:lvl3pPr indent="-38100" lvl="2" marL="38100" marR="0" algn="r">
               <a:lnSpc>
                 <a:spcPct val="100000"/>
               </a:lnSpc>
@@ -8167,7 +8219,7 @@
               <a:buSzPts val="1067"/>
               <a:buFont typeface="Montserrat"/>
               <a:buNone/>
-              <a:defRPr b="1" sz="1067">
+              <a:defRPr b="1" i="0" sz="1067" u="none" cap="none" strike="noStrike">
                 <a:solidFill>
                   <a:srgbClr val="E0DAFF"/>
                 </a:solidFill>
@@ -8177,7 +8229,7 @@
                 <a:sym typeface="Montserrat"/>
               </a:defRPr>
             </a:lvl3pPr>
-            <a:lvl4pPr indent="-50800" lvl="3" marL="50800" algn="r">
+            <a:lvl4pPr indent="-38100" lvl="3" marL="38100" marR="0" algn="r">
               <a:lnSpc>
                 <a:spcPct val="100000"/>
               </a:lnSpc>
@@ -8193,7 +8245,7 @@
               <a:buSzPts val="1067"/>
               <a:buFont typeface="Montserrat"/>
               <a:buNone/>
-              <a:defRPr b="1" sz="1067">
+              <a:defRPr b="1" i="0" sz="1067" u="none" cap="none" strike="noStrike">
                 <a:solidFill>
                   <a:srgbClr val="E0DAFF"/>
                 </a:solidFill>
@@ -8203,7 +8255,7 @@
                 <a:sym typeface="Montserrat"/>
               </a:defRPr>
             </a:lvl4pPr>
-            <a:lvl5pPr indent="-50800" lvl="4" marL="50800" algn="r">
+            <a:lvl5pPr indent="-38100" lvl="4" marL="38100" marR="0" algn="r">
               <a:lnSpc>
                 <a:spcPct val="100000"/>
               </a:lnSpc>
@@ -8219,7 +8271,7 @@
               <a:buSzPts val="1067"/>
               <a:buFont typeface="Montserrat"/>
               <a:buNone/>
-              <a:defRPr b="1" sz="1067">
+              <a:defRPr b="1" i="0" sz="1067" u="none" cap="none" strike="noStrike">
                 <a:solidFill>
                   <a:srgbClr val="E0DAFF"/>
                 </a:solidFill>
@@ -8229,7 +8281,7 @@
                 <a:sym typeface="Montserrat"/>
               </a:defRPr>
             </a:lvl5pPr>
-            <a:lvl6pPr indent="-50800" lvl="5" marL="50800" algn="r">
+            <a:lvl6pPr indent="-38100" lvl="5" marL="38100" marR="0" algn="r">
               <a:lnSpc>
                 <a:spcPct val="100000"/>
               </a:lnSpc>
@@ -8245,7 +8297,7 @@
               <a:buSzPts val="1067"/>
               <a:buFont typeface="Montserrat"/>
               <a:buNone/>
-              <a:defRPr b="1" sz="1067">
+              <a:defRPr b="1" i="0" sz="1067" u="none" cap="none" strike="noStrike">
                 <a:solidFill>
                   <a:srgbClr val="E0DAFF"/>
                 </a:solidFill>
@@ -8255,7 +8307,7 @@
                 <a:sym typeface="Montserrat"/>
               </a:defRPr>
             </a:lvl6pPr>
-            <a:lvl7pPr indent="-50800" lvl="6" marL="50800" algn="r">
+            <a:lvl7pPr indent="-38100" lvl="6" marL="38100" marR="0" algn="r">
               <a:lnSpc>
                 <a:spcPct val="100000"/>
               </a:lnSpc>
@@ -8271,7 +8323,7 @@
               <a:buSzPts val="1067"/>
               <a:buFont typeface="Montserrat"/>
               <a:buNone/>
-              <a:defRPr b="1" sz="1067">
+              <a:defRPr b="1" i="0" sz="1067" u="none" cap="none" strike="noStrike">
                 <a:solidFill>
                   <a:srgbClr val="E0DAFF"/>
                 </a:solidFill>
@@ -8281,7 +8333,7 @@
                 <a:sym typeface="Montserrat"/>
               </a:defRPr>
             </a:lvl7pPr>
-            <a:lvl8pPr indent="-50800" lvl="7" marL="50800" algn="r">
+            <a:lvl8pPr indent="-38100" lvl="7" marL="38100" marR="0" algn="r">
               <a:lnSpc>
                 <a:spcPct val="100000"/>
               </a:lnSpc>
@@ -8297,7 +8349,7 @@
               <a:buSzPts val="1067"/>
               <a:buFont typeface="Montserrat"/>
               <a:buNone/>
-              <a:defRPr b="1" sz="1067">
+              <a:defRPr b="1" i="0" sz="1067" u="none" cap="none" strike="noStrike">
                 <a:solidFill>
                   <a:srgbClr val="E0DAFF"/>
                 </a:solidFill>
@@ -8307,7 +8359,7 @@
                 <a:sym typeface="Montserrat"/>
               </a:defRPr>
             </a:lvl8pPr>
-            <a:lvl9pPr indent="-50800" lvl="8" marL="50800" algn="r">
+            <a:lvl9pPr indent="-38100" lvl="8" marL="38100" marR="0" algn="r">
               <a:lnSpc>
                 <a:spcPct val="100000"/>
               </a:lnSpc>
@@ -8323,7 +8375,7 @@
               <a:buSzPts val="1067"/>
               <a:buFont typeface="Montserrat"/>
               <a:buNone/>
-              <a:defRPr b="1" sz="1067">
+              <a:defRPr b="1" i="0" sz="1067" u="none" cap="none" strike="noStrike">
                 <a:solidFill>
                   <a:srgbClr val="E0DAFF"/>
                 </a:solidFill>
@@ -8335,7 +8387,7 @@
             </a:lvl9pPr>
           </a:lstStyle>
           <a:p>
-            <a:pPr indent="-50800" lvl="0" marL="50800" rtl="0" algn="r">
+            <a:pPr indent="-38100" lvl="0" marL="38100" rtl="0" algn="r">
               <a:spcBef>
                 <a:spcPts val="0"/>
               </a:spcBef>
@@ -8348,7 +8400,7 @@
               <a:rPr lang="en"/>
               <a:t>‹#›</a:t>
             </a:fld>
-            <a:endParaRPr i="0" u="none" cap="none" strike="noStrike"/>
+            <a:endParaRPr/>
           </a:p>
         </p:txBody>
       </p:sp>
@@ -8365,7 +8417,7 @@
   <p:cSld name="Title and image">
     <p:spTree>
       <p:nvGrpSpPr>
-        <p:cNvPr id="244" name="Shape 244"/>
+        <p:cNvPr id="233" name="Shape 233"/>
         <p:cNvGrpSpPr/>
         <p:nvPr/>
       </p:nvGrpSpPr>
@@ -8379,7 +8431,7 @@
       </p:grpSpPr>
       <p:sp>
         <p:nvSpPr>
-          <p:cNvPr id="245" name="Google Shape;245;p31"/>
+          <p:cNvPr id="234" name="Google Shape;234;p29"/>
           <p:cNvSpPr/>
           <p:nvPr>
             <p:ph idx="2" type="pic"/>
@@ -8387,8 +8439,8 @@
         </p:nvSpPr>
         <p:spPr>
           <a:xfrm>
-            <a:off x="369989" y="1560526"/>
-            <a:ext cx="11451714" cy="4919477"/>
+            <a:off x="369989" y="1560488"/>
+            <a:ext cx="11451732" cy="4919354"/>
           </a:xfrm>
           <a:prstGeom prst="rect">
             <a:avLst/>
@@ -8401,7 +8453,7 @@
       </p:sp>
       <p:sp>
         <p:nvSpPr>
-          <p:cNvPr id="246" name="Google Shape;246;p31"/>
+          <p:cNvPr id="235" name="Google Shape;235;p29"/>
           <p:cNvSpPr txBox="1"/>
           <p:nvPr>
             <p:ph type="title"/>
@@ -8409,8 +8461,8 @@
         </p:nvSpPr>
         <p:spPr>
           <a:xfrm>
-            <a:off x="726948" y="369989"/>
-            <a:ext cx="10737731" cy="795980"/>
+            <a:off x="726950" y="369980"/>
+            <a:ext cx="10737749" cy="795960"/>
           </a:xfrm>
           <a:prstGeom prst="rect">
             <a:avLst/>
@@ -8584,7 +8636,7 @@
       </p:sp>
       <p:sp>
         <p:nvSpPr>
-          <p:cNvPr id="247" name="Google Shape;247;p31"/>
+          <p:cNvPr id="236" name="Google Shape;236;p29"/>
           <p:cNvSpPr txBox="1"/>
           <p:nvPr>
             <p:ph idx="12" type="sldNum"/>
@@ -8592,8 +8644,8 @@
         </p:nvSpPr>
         <p:spPr>
           <a:xfrm>
-            <a:off x="5892653" y="6169928"/>
-            <a:ext cx="2844729" cy="369191"/>
+            <a:off x="5892663" y="6169774"/>
+            <a:ext cx="2844734" cy="369181"/>
           </a:xfrm>
           <a:prstGeom prst="rect">
             <a:avLst/>
@@ -8608,7 +8660,7 @@
             <a:spAutoFit/>
           </a:bodyPr>
           <a:lstStyle>
-            <a:lvl1pPr indent="0" lvl="0" marL="0" algn="r">
+            <a:lvl1pPr indent="0" lvl="0" marL="0" marR="0" algn="r">
               <a:lnSpc>
                 <a:spcPct val="100000"/>
               </a:lnSpc>
@@ -8624,13 +8676,17 @@
               <a:buSzPts val="1600"/>
               <a:buFont typeface="Arial"/>
               <a:buNone/>
-              <a:defRPr sz="1600">
+              <a:defRPr b="0" i="0" sz="1600" u="none" cap="none" strike="noStrike">
                 <a:solidFill>
                   <a:srgbClr val="000000"/>
                 </a:solidFill>
+                <a:latin typeface="Arial"/>
+                <a:ea typeface="Arial"/>
+                <a:cs typeface="Arial"/>
+                <a:sym typeface="Arial"/>
               </a:defRPr>
             </a:lvl1pPr>
-            <a:lvl2pPr indent="0" lvl="1" marL="0" algn="r">
+            <a:lvl2pPr indent="0" lvl="1" marL="0" marR="0" algn="r">
               <a:lnSpc>
                 <a:spcPct val="100000"/>
               </a:lnSpc>
@@ -8646,13 +8702,17 @@
               <a:buSzPts val="1600"/>
               <a:buFont typeface="Arial"/>
               <a:buNone/>
-              <a:defRPr sz="1600">
+              <a:defRPr b="0" i="0" sz="1600" u="none" cap="none" strike="noStrike">
                 <a:solidFill>
                   <a:srgbClr val="000000"/>
                 </a:solidFill>
+                <a:latin typeface="Arial"/>
+                <a:ea typeface="Arial"/>
+                <a:cs typeface="Arial"/>
+                <a:sym typeface="Arial"/>
               </a:defRPr>
             </a:lvl2pPr>
-            <a:lvl3pPr indent="0" lvl="2" marL="0" algn="r">
+            <a:lvl3pPr indent="0" lvl="2" marL="0" marR="0" algn="r">
               <a:lnSpc>
                 <a:spcPct val="100000"/>
               </a:lnSpc>
@@ -8668,13 +8728,17 @@
               <a:buSzPts val="1600"/>
               <a:buFont typeface="Arial"/>
               <a:buNone/>
-              <a:defRPr sz="1600">
+              <a:defRPr b="0" i="0" sz="1600" u="none" cap="none" strike="noStrike">
                 <a:solidFill>
                   <a:srgbClr val="000000"/>
                 </a:solidFill>
+                <a:latin typeface="Arial"/>
+                <a:ea typeface="Arial"/>
+                <a:cs typeface="Arial"/>
+                <a:sym typeface="Arial"/>
               </a:defRPr>
             </a:lvl3pPr>
-            <a:lvl4pPr indent="0" lvl="3" marL="0" algn="r">
+            <a:lvl4pPr indent="0" lvl="3" marL="0" marR="0" algn="r">
               <a:lnSpc>
                 <a:spcPct val="100000"/>
               </a:lnSpc>
@@ -8690,13 +8754,17 @@
               <a:buSzPts val="1600"/>
               <a:buFont typeface="Arial"/>
               <a:buNone/>
-              <a:defRPr sz="1600">
+              <a:defRPr b="0" i="0" sz="1600" u="none" cap="none" strike="noStrike">
                 <a:solidFill>
                   <a:srgbClr val="000000"/>
                 </a:solidFill>
+                <a:latin typeface="Arial"/>
+                <a:ea typeface="Arial"/>
+                <a:cs typeface="Arial"/>
+                <a:sym typeface="Arial"/>
               </a:defRPr>
             </a:lvl4pPr>
-            <a:lvl5pPr indent="0" lvl="4" marL="0" algn="r">
+            <a:lvl5pPr indent="0" lvl="4" marL="0" marR="0" algn="r">
               <a:lnSpc>
                 <a:spcPct val="100000"/>
               </a:lnSpc>
@@ -8712,13 +8780,17 @@
               <a:buSzPts val="1600"/>
               <a:buFont typeface="Arial"/>
               <a:buNone/>
-              <a:defRPr sz="1600">
+              <a:defRPr b="0" i="0" sz="1600" u="none" cap="none" strike="noStrike">
                 <a:solidFill>
                   <a:srgbClr val="000000"/>
                 </a:solidFill>
+                <a:latin typeface="Arial"/>
+                <a:ea typeface="Arial"/>
+                <a:cs typeface="Arial"/>
+                <a:sym typeface="Arial"/>
               </a:defRPr>
             </a:lvl5pPr>
-            <a:lvl6pPr indent="0" lvl="5" marL="0" algn="r">
+            <a:lvl6pPr indent="0" lvl="5" marL="0" marR="0" algn="r">
               <a:lnSpc>
                 <a:spcPct val="100000"/>
               </a:lnSpc>
@@ -8734,13 +8806,17 @@
               <a:buSzPts val="1600"/>
               <a:buFont typeface="Arial"/>
               <a:buNone/>
-              <a:defRPr sz="1600">
+              <a:defRPr b="0" i="0" sz="1600" u="none" cap="none" strike="noStrike">
                 <a:solidFill>
                   <a:srgbClr val="000000"/>
                 </a:solidFill>
+                <a:latin typeface="Arial"/>
+                <a:ea typeface="Arial"/>
+                <a:cs typeface="Arial"/>
+                <a:sym typeface="Arial"/>
               </a:defRPr>
             </a:lvl6pPr>
-            <a:lvl7pPr indent="0" lvl="6" marL="0" algn="r">
+            <a:lvl7pPr indent="0" lvl="6" marL="0" marR="0" algn="r">
               <a:lnSpc>
                 <a:spcPct val="100000"/>
               </a:lnSpc>
@@ -8756,13 +8832,17 @@
               <a:buSzPts val="1600"/>
               <a:buFont typeface="Arial"/>
               <a:buNone/>
-              <a:defRPr sz="1600">
+              <a:defRPr b="0" i="0" sz="1600" u="none" cap="none" strike="noStrike">
                 <a:solidFill>
                   <a:srgbClr val="000000"/>
                 </a:solidFill>
+                <a:latin typeface="Arial"/>
+                <a:ea typeface="Arial"/>
+                <a:cs typeface="Arial"/>
+                <a:sym typeface="Arial"/>
               </a:defRPr>
             </a:lvl7pPr>
-            <a:lvl8pPr indent="0" lvl="7" marL="0" algn="r">
+            <a:lvl8pPr indent="0" lvl="7" marL="0" marR="0" algn="r">
               <a:lnSpc>
                 <a:spcPct val="100000"/>
               </a:lnSpc>
@@ -8778,13 +8858,17 @@
               <a:buSzPts val="1600"/>
               <a:buFont typeface="Arial"/>
               <a:buNone/>
-              <a:defRPr sz="1600">
+              <a:defRPr b="0" i="0" sz="1600" u="none" cap="none" strike="noStrike">
                 <a:solidFill>
                   <a:srgbClr val="000000"/>
                 </a:solidFill>
+                <a:latin typeface="Arial"/>
+                <a:ea typeface="Arial"/>
+                <a:cs typeface="Arial"/>
+                <a:sym typeface="Arial"/>
               </a:defRPr>
             </a:lvl8pPr>
-            <a:lvl9pPr indent="0" lvl="8" marL="0" algn="r">
+            <a:lvl9pPr indent="0" lvl="8" marL="0" marR="0" algn="r">
               <a:lnSpc>
                 <a:spcPct val="100000"/>
               </a:lnSpc>
@@ -8800,10 +8884,14 @@
               <a:buSzPts val="1600"/>
               <a:buFont typeface="Arial"/>
               <a:buNone/>
-              <a:defRPr sz="1600">
+              <a:defRPr b="0" i="0" sz="1600" u="none" cap="none" strike="noStrike">
                 <a:solidFill>
                   <a:srgbClr val="000000"/>
                 </a:solidFill>
+                <a:latin typeface="Arial"/>
+                <a:ea typeface="Arial"/>
+                <a:cs typeface="Arial"/>
+                <a:sym typeface="Arial"/>
               </a:defRPr>
             </a:lvl9pPr>
           </a:lstStyle>
@@ -9015,7 +9103,7 @@
     </p:bg>
     <p:spTree>
       <p:nvGrpSpPr>
-        <p:cNvPr id="248" name="Shape 248"/>
+        <p:cNvPr id="237" name="Shape 237"/>
         <p:cNvGrpSpPr/>
         <p:nvPr/>
       </p:nvGrpSpPr>
@@ -9029,14 +9117,14 @@
       </p:grpSpPr>
       <p:sp>
         <p:nvSpPr>
-          <p:cNvPr id="249" name="Google Shape;249;p32"/>
+          <p:cNvPr id="238" name="Google Shape;238;p30"/>
           <p:cNvSpPr/>
           <p:nvPr/>
         </p:nvSpPr>
         <p:spPr>
           <a:xfrm>
-            <a:off x="218060" y="205262"/>
-            <a:ext cx="11737706" cy="6426639"/>
+            <a:off x="218060" y="205258"/>
+            <a:ext cx="11737725" cy="6426478"/>
           </a:xfrm>
           <a:prstGeom prst="roundRect">
             <a:avLst>
@@ -9090,7 +9178,7 @@
       </p:sp>
       <p:sp>
         <p:nvSpPr>
-          <p:cNvPr id="250" name="Google Shape;250;p32"/>
+          <p:cNvPr id="239" name="Google Shape;239;p30"/>
           <p:cNvSpPr txBox="1"/>
           <p:nvPr>
             <p:ph type="title"/>
@@ -9098,8 +9186,8 @@
         </p:nvSpPr>
         <p:spPr>
           <a:xfrm>
-            <a:off x="609585" y="544516"/>
-            <a:ext cx="10855328" cy="692383"/>
+            <a:off x="609586" y="544502"/>
+            <a:ext cx="10855346" cy="692365"/>
           </a:xfrm>
           <a:prstGeom prst="rect">
             <a:avLst/>
@@ -9278,14 +9366,14 @@
       </p:sp>
       <p:sp>
         <p:nvSpPr>
-          <p:cNvPr id="251" name="Google Shape;251;p32"/>
+          <p:cNvPr id="240" name="Google Shape;240;p30"/>
           <p:cNvSpPr/>
           <p:nvPr/>
         </p:nvSpPr>
         <p:spPr>
           <a:xfrm>
-            <a:off x="10110579" y="6325275"/>
-            <a:ext cx="2081148" cy="532787"/>
+            <a:off x="10110595" y="6325116"/>
+            <a:ext cx="2081152" cy="532773"/>
           </a:xfrm>
           <a:prstGeom prst="roundRect">
             <a:avLst>
@@ -9339,7 +9427,7 @@
       </p:sp>
       <p:sp>
         <p:nvSpPr>
-          <p:cNvPr id="252" name="Google Shape;252;p32"/>
+          <p:cNvPr id="241" name="Google Shape;241;p30"/>
           <p:cNvSpPr txBox="1"/>
           <p:nvPr>
             <p:ph idx="1" type="body"/>
@@ -9347,8 +9435,8 @@
         </p:nvSpPr>
         <p:spPr>
           <a:xfrm>
-            <a:off x="609585" y="1237034"/>
-            <a:ext cx="5110272" cy="255994"/>
+            <a:off x="609586" y="1237004"/>
+            <a:ext cx="5110280" cy="255988"/>
           </a:xfrm>
           <a:prstGeom prst="rect">
             <a:avLst/>
@@ -9555,7 +9643,7 @@
       </p:sp>
       <p:pic>
         <p:nvPicPr>
-          <p:cNvPr descr="Logo-white.pngGoogle Shape;197;p17" id="253" name="Google Shape;253;p32"/>
+          <p:cNvPr descr="Logo-white.pngGoogle Shape;197;p17" id="242" name="Google Shape;242;p30"/>
           <p:cNvPicPr preferRelativeResize="0"/>
           <p:nvPr/>
         </p:nvPicPr>
@@ -9568,8 +9656,8 @@
         </p:blipFill>
         <p:spPr>
           <a:xfrm>
-            <a:off x="10348829" y="6426454"/>
-            <a:ext cx="1136556" cy="255982"/>
+            <a:off x="10348846" y="6426294"/>
+            <a:ext cx="1136558" cy="255975"/>
           </a:xfrm>
           <a:prstGeom prst="rect">
             <a:avLst/>
@@ -9582,7 +9670,7 @@
       </p:pic>
       <p:sp>
         <p:nvSpPr>
-          <p:cNvPr id="254" name="Google Shape;254;p32"/>
+          <p:cNvPr id="243" name="Google Shape;243;p30"/>
           <p:cNvSpPr txBox="1"/>
           <p:nvPr>
             <p:ph idx="2" type="body"/>
@@ -9590,8 +9678,8 @@
         </p:nvSpPr>
         <p:spPr>
           <a:xfrm>
-            <a:off x="609585" y="2203010"/>
-            <a:ext cx="5486663" cy="2630734"/>
+            <a:off x="609586" y="2202954"/>
+            <a:ext cx="5486672" cy="2630669"/>
           </a:xfrm>
           <a:prstGeom prst="rect">
             <a:avLst/>
@@ -9738,7 +9826,7 @@
       </p:sp>
       <p:sp>
         <p:nvSpPr>
-          <p:cNvPr id="255" name="Google Shape;255;p32"/>
+          <p:cNvPr id="244" name="Google Shape;244;p30"/>
           <p:cNvSpPr txBox="1"/>
           <p:nvPr>
             <p:ph idx="12" type="sldNum"/>
@@ -9746,8 +9834,8 @@
         </p:nvSpPr>
         <p:spPr>
           <a:xfrm>
-            <a:off x="11767890" y="6471821"/>
-            <a:ext cx="169196" cy="163996"/>
+            <a:off x="11767910" y="6471659"/>
+            <a:ext cx="169196" cy="163992"/>
           </a:xfrm>
           <a:prstGeom prst="rect">
             <a:avLst/>
@@ -9762,7 +9850,7 @@
             <a:spAutoFit/>
           </a:bodyPr>
           <a:lstStyle>
-            <a:lvl1pPr indent="-50800" lvl="0" marL="50800" algn="r">
+            <a:lvl1pPr indent="-38100" lvl="0" marL="38100" marR="0" algn="r">
               <a:lnSpc>
                 <a:spcPct val="100000"/>
               </a:lnSpc>
@@ -9778,7 +9866,7 @@
               <a:buSzPts val="1067"/>
               <a:buFont typeface="Montserrat"/>
               <a:buNone/>
-              <a:defRPr b="1" sz="1067">
+              <a:defRPr b="1" i="0" sz="1067" u="none" cap="none" strike="noStrike">
                 <a:solidFill>
                   <a:srgbClr val="E0DAFF"/>
                 </a:solidFill>
@@ -9788,7 +9876,7 @@
                 <a:sym typeface="Montserrat"/>
               </a:defRPr>
             </a:lvl1pPr>
-            <a:lvl2pPr indent="-50800" lvl="1" marL="50800" algn="r">
+            <a:lvl2pPr indent="-38100" lvl="1" marL="38100" marR="0" algn="r">
               <a:lnSpc>
                 <a:spcPct val="100000"/>
               </a:lnSpc>
@@ -9804,7 +9892,7 @@
               <a:buSzPts val="1067"/>
               <a:buFont typeface="Montserrat"/>
               <a:buNone/>
-              <a:defRPr b="1" sz="1067">
+              <a:defRPr b="1" i="0" sz="1067" u="none" cap="none" strike="noStrike">
                 <a:solidFill>
                   <a:srgbClr val="E0DAFF"/>
                 </a:solidFill>
@@ -9814,7 +9902,7 @@
                 <a:sym typeface="Montserrat"/>
               </a:defRPr>
             </a:lvl2pPr>
-            <a:lvl3pPr indent="-50800" lvl="2" marL="50800" algn="r">
+            <a:lvl3pPr indent="-38100" lvl="2" marL="38100" marR="0" algn="r">
               <a:lnSpc>
                 <a:spcPct val="100000"/>
               </a:lnSpc>
@@ -9830,7 +9918,7 @@
               <a:buSzPts val="1067"/>
               <a:buFont typeface="Montserrat"/>
               <a:buNone/>
-              <a:defRPr b="1" sz="1067">
+              <a:defRPr b="1" i="0" sz="1067" u="none" cap="none" strike="noStrike">
                 <a:solidFill>
                   <a:srgbClr val="E0DAFF"/>
                 </a:solidFill>
@@ -9840,7 +9928,7 @@
                 <a:sym typeface="Montserrat"/>
               </a:defRPr>
             </a:lvl3pPr>
-            <a:lvl4pPr indent="-50800" lvl="3" marL="50800" algn="r">
+            <a:lvl4pPr indent="-38100" lvl="3" marL="38100" marR="0" algn="r">
               <a:lnSpc>
                 <a:spcPct val="100000"/>
               </a:lnSpc>
@@ -9856,7 +9944,7 @@
               <a:buSzPts val="1067"/>
               <a:buFont typeface="Montserrat"/>
               <a:buNone/>
-              <a:defRPr b="1" sz="1067">
+              <a:defRPr b="1" i="0" sz="1067" u="none" cap="none" strike="noStrike">
                 <a:solidFill>
                   <a:srgbClr val="E0DAFF"/>
                 </a:solidFill>
@@ -9866,7 +9954,7 @@
                 <a:sym typeface="Montserrat"/>
               </a:defRPr>
             </a:lvl4pPr>
-            <a:lvl5pPr indent="-50800" lvl="4" marL="50800" algn="r">
+            <a:lvl5pPr indent="-38100" lvl="4" marL="38100" marR="0" algn="r">
               <a:lnSpc>
                 <a:spcPct val="100000"/>
               </a:lnSpc>
@@ -9882,7 +9970,7 @@
               <a:buSzPts val="1067"/>
               <a:buFont typeface="Montserrat"/>
               <a:buNone/>
-              <a:defRPr b="1" sz="1067">
+              <a:defRPr b="1" i="0" sz="1067" u="none" cap="none" strike="noStrike">
                 <a:solidFill>
                   <a:srgbClr val="E0DAFF"/>
                 </a:solidFill>
@@ -9892,7 +9980,7 @@
                 <a:sym typeface="Montserrat"/>
               </a:defRPr>
             </a:lvl5pPr>
-            <a:lvl6pPr indent="-50800" lvl="5" marL="50800" algn="r">
+            <a:lvl6pPr indent="-38100" lvl="5" marL="38100" marR="0" algn="r">
               <a:lnSpc>
                 <a:spcPct val="100000"/>
               </a:lnSpc>
@@ -9908,7 +9996,7 @@
               <a:buSzPts val="1067"/>
               <a:buFont typeface="Montserrat"/>
               <a:buNone/>
-              <a:defRPr b="1" sz="1067">
+              <a:defRPr b="1" i="0" sz="1067" u="none" cap="none" strike="noStrike">
                 <a:solidFill>
                   <a:srgbClr val="E0DAFF"/>
                 </a:solidFill>
@@ -9918,7 +10006,7 @@
                 <a:sym typeface="Montserrat"/>
               </a:defRPr>
             </a:lvl6pPr>
-            <a:lvl7pPr indent="-50800" lvl="6" marL="50800" algn="r">
+            <a:lvl7pPr indent="-38100" lvl="6" marL="38100" marR="0" algn="r">
               <a:lnSpc>
                 <a:spcPct val="100000"/>
               </a:lnSpc>
@@ -9934,7 +10022,7 @@
               <a:buSzPts val="1067"/>
               <a:buFont typeface="Montserrat"/>
               <a:buNone/>
-              <a:defRPr b="1" sz="1067">
+              <a:defRPr b="1" i="0" sz="1067" u="none" cap="none" strike="noStrike">
                 <a:solidFill>
                   <a:srgbClr val="E0DAFF"/>
                 </a:solidFill>
@@ -9944,7 +10032,7 @@
                 <a:sym typeface="Montserrat"/>
               </a:defRPr>
             </a:lvl7pPr>
-            <a:lvl8pPr indent="-50800" lvl="7" marL="50800" algn="r">
+            <a:lvl8pPr indent="-38100" lvl="7" marL="38100" marR="0" algn="r">
               <a:lnSpc>
                 <a:spcPct val="100000"/>
               </a:lnSpc>
@@ -9960,7 +10048,7 @@
               <a:buSzPts val="1067"/>
               <a:buFont typeface="Montserrat"/>
               <a:buNone/>
-              <a:defRPr b="1" sz="1067">
+              <a:defRPr b="1" i="0" sz="1067" u="none" cap="none" strike="noStrike">
                 <a:solidFill>
                   <a:srgbClr val="E0DAFF"/>
                 </a:solidFill>
@@ -9970,7 +10058,7 @@
                 <a:sym typeface="Montserrat"/>
               </a:defRPr>
             </a:lvl8pPr>
-            <a:lvl9pPr indent="-50800" lvl="8" marL="50800" algn="r">
+            <a:lvl9pPr indent="-38100" lvl="8" marL="38100" marR="0" algn="r">
               <a:lnSpc>
                 <a:spcPct val="100000"/>
               </a:lnSpc>
@@ -9986,7 +10074,7 @@
               <a:buSzPts val="1067"/>
               <a:buFont typeface="Montserrat"/>
               <a:buNone/>
-              <a:defRPr b="1" sz="1067">
+              <a:defRPr b="1" i="0" sz="1067" u="none" cap="none" strike="noStrike">
                 <a:solidFill>
                   <a:srgbClr val="E0DAFF"/>
                 </a:solidFill>
@@ -9998,7 +10086,7 @@
             </a:lvl9pPr>
           </a:lstStyle>
           <a:p>
-            <a:pPr indent="-50800" lvl="0" marL="50800" rtl="0" algn="r">
+            <a:pPr indent="-38100" lvl="0" marL="38100" rtl="0" algn="r">
               <a:spcBef>
                 <a:spcPts val="0"/>
               </a:spcBef>
@@ -10011,7 +10099,7 @@
               <a:rPr lang="en"/>
               <a:t>‹#›</a:t>
             </a:fld>
-            <a:endParaRPr i="0" u="none" cap="none" strike="noStrike"/>
+            <a:endParaRPr/>
           </a:p>
         </p:txBody>
       </p:sp>
@@ -10035,7 +10123,7 @@
     </p:bg>
     <p:spTree>
       <p:nvGrpSpPr>
-        <p:cNvPr id="256" name="Shape 256"/>
+        <p:cNvPr id="245" name="Shape 245"/>
         <p:cNvGrpSpPr/>
         <p:nvPr/>
       </p:nvGrpSpPr>
@@ -10049,14 +10137,14 @@
       </p:grpSpPr>
       <p:sp>
         <p:nvSpPr>
-          <p:cNvPr id="257" name="Google Shape;257;p33"/>
+          <p:cNvPr id="246" name="Google Shape;246;p31"/>
           <p:cNvSpPr/>
           <p:nvPr/>
         </p:nvSpPr>
         <p:spPr>
           <a:xfrm>
-            <a:off x="218061" y="205262"/>
-            <a:ext cx="11737706" cy="6426639"/>
+            <a:off x="218061" y="205258"/>
+            <a:ext cx="11737725" cy="6426478"/>
           </a:xfrm>
           <a:prstGeom prst="roundRect">
             <a:avLst>
@@ -10071,7 +10159,7 @@
           </a:ln>
         </p:spPr>
         <p:txBody>
-          <a:bodyPr anchorCtr="0" anchor="ctr" bIns="45699" lIns="45699" spcFirstLastPara="1" rIns="45699" wrap="square" tIns="45699">
+          <a:bodyPr anchorCtr="0" anchor="ctr" bIns="45666" lIns="45666" spcFirstLastPara="1" rIns="45666" wrap="square" tIns="45666">
             <a:noAutofit/>
           </a:bodyPr>
           <a:lstStyle/>
@@ -10110,7 +10198,7 @@
       </p:sp>
       <p:sp>
         <p:nvSpPr>
-          <p:cNvPr id="258" name="Google Shape;258;p33"/>
+          <p:cNvPr id="247" name="Google Shape;247;p31"/>
           <p:cNvSpPr txBox="1"/>
           <p:nvPr>
             <p:ph type="title"/>
@@ -10118,8 +10206,8 @@
         </p:nvSpPr>
         <p:spPr>
           <a:xfrm>
-            <a:off x="609585" y="544514"/>
-            <a:ext cx="10855328" cy="692383"/>
+            <a:off x="609586" y="544501"/>
+            <a:ext cx="10855346" cy="692365"/>
           </a:xfrm>
           <a:prstGeom prst="rect">
             <a:avLst/>
@@ -10298,14 +10386,14 @@
       </p:sp>
       <p:sp>
         <p:nvSpPr>
-          <p:cNvPr id="259" name="Google Shape;259;p33"/>
+          <p:cNvPr id="248" name="Google Shape;248;p31"/>
           <p:cNvSpPr/>
           <p:nvPr/>
         </p:nvSpPr>
         <p:spPr>
           <a:xfrm>
-            <a:off x="10110579" y="6325274"/>
-            <a:ext cx="2081148" cy="532787"/>
+            <a:off x="10110595" y="6325116"/>
+            <a:ext cx="2081152" cy="532773"/>
           </a:xfrm>
           <a:prstGeom prst="roundRect">
             <a:avLst>
@@ -10320,7 +10408,7 @@
           </a:ln>
         </p:spPr>
         <p:txBody>
-          <a:bodyPr anchorCtr="0" anchor="ctr" bIns="45699" lIns="45699" spcFirstLastPara="1" rIns="45699" wrap="square" tIns="45699">
+          <a:bodyPr anchorCtr="0" anchor="ctr" bIns="45666" lIns="45666" spcFirstLastPara="1" rIns="45666" wrap="square" tIns="45666">
             <a:noAutofit/>
           </a:bodyPr>
           <a:lstStyle/>
@@ -10359,7 +10447,7 @@
       </p:sp>
       <p:sp>
         <p:nvSpPr>
-          <p:cNvPr id="260" name="Google Shape;260;p33"/>
+          <p:cNvPr id="249" name="Google Shape;249;p31"/>
           <p:cNvSpPr txBox="1"/>
           <p:nvPr>
             <p:ph idx="1" type="body"/>
@@ -10367,8 +10455,8 @@
         </p:nvSpPr>
         <p:spPr>
           <a:xfrm>
-            <a:off x="609585" y="1237036"/>
-            <a:ext cx="5110272" cy="255994"/>
+            <a:off x="609586" y="1237005"/>
+            <a:ext cx="5110280" cy="255988"/>
           </a:xfrm>
           <a:prstGeom prst="rect">
             <a:avLst/>
@@ -10575,7 +10663,7 @@
       </p:sp>
       <p:pic>
         <p:nvPicPr>
-          <p:cNvPr descr="Logo-white.pngGoogle Shape;197;p17" id="261" name="Google Shape;261;p33"/>
+          <p:cNvPr descr="Logo-white.pngGoogle Shape;197;p17" id="250" name="Google Shape;250;p31"/>
           <p:cNvPicPr preferRelativeResize="0"/>
           <p:nvPr/>
         </p:nvPicPr>
@@ -10588,8 +10676,8 @@
         </p:blipFill>
         <p:spPr>
           <a:xfrm>
-            <a:off x="10348828" y="6426455"/>
-            <a:ext cx="1136569" cy="255983"/>
+            <a:off x="10348845" y="6426294"/>
+            <a:ext cx="1136570" cy="255976"/>
           </a:xfrm>
           <a:prstGeom prst="rect">
             <a:avLst/>
@@ -10602,7 +10690,7 @@
       </p:pic>
       <p:sp>
         <p:nvSpPr>
-          <p:cNvPr id="262" name="Google Shape;262;p33"/>
+          <p:cNvPr id="251" name="Google Shape;251;p31"/>
           <p:cNvSpPr txBox="1"/>
           <p:nvPr>
             <p:ph idx="2" type="body"/>
@@ -10610,8 +10698,8 @@
         </p:nvSpPr>
         <p:spPr>
           <a:xfrm>
-            <a:off x="609585" y="2203012"/>
-            <a:ext cx="5486663" cy="2630734"/>
+            <a:off x="609586" y="2202957"/>
+            <a:ext cx="5486672" cy="2630669"/>
           </a:xfrm>
           <a:prstGeom prst="rect">
             <a:avLst/>
@@ -10758,7 +10846,7 @@
       </p:sp>
       <p:sp>
         <p:nvSpPr>
-          <p:cNvPr id="263" name="Google Shape;263;p33"/>
+          <p:cNvPr id="252" name="Google Shape;252;p31"/>
           <p:cNvSpPr txBox="1"/>
           <p:nvPr>
             <p:ph idx="12" type="sldNum"/>
@@ -10766,8 +10854,8 @@
         </p:nvSpPr>
         <p:spPr>
           <a:xfrm>
-            <a:off x="11767890" y="6471821"/>
-            <a:ext cx="169196" cy="143596"/>
+            <a:off x="11767910" y="6471659"/>
+            <a:ext cx="169196" cy="143592"/>
           </a:xfrm>
           <a:prstGeom prst="rect">
             <a:avLst/>
@@ -10782,7 +10870,7 @@
             <a:spAutoFit/>
           </a:bodyPr>
           <a:lstStyle>
-            <a:lvl1pPr indent="-50797" lvl="0" marL="50797" algn="r">
+            <a:lvl1pPr indent="-38100" lvl="0" marL="38100" marR="0" algn="r">
               <a:lnSpc>
                 <a:spcPct val="100000"/>
               </a:lnSpc>
@@ -10798,7 +10886,7 @@
               <a:buSzPts val="933"/>
               <a:buFont typeface="Montserrat"/>
               <a:buNone/>
-              <a:defRPr b="1" sz="933">
+              <a:defRPr b="1" i="0" sz="933" u="none" cap="none" strike="noStrike">
                 <a:solidFill>
                   <a:srgbClr val="E0DAFF"/>
                 </a:solidFill>
@@ -10808,7 +10896,7 @@
                 <a:sym typeface="Montserrat"/>
               </a:defRPr>
             </a:lvl1pPr>
-            <a:lvl2pPr indent="-50797" lvl="1" marL="50797" algn="r">
+            <a:lvl2pPr indent="-38100" lvl="1" marL="38100" marR="0" algn="r">
               <a:lnSpc>
                 <a:spcPct val="100000"/>
               </a:lnSpc>
@@ -10824,7 +10912,7 @@
               <a:buSzPts val="933"/>
               <a:buFont typeface="Montserrat"/>
               <a:buNone/>
-              <a:defRPr b="1" sz="933">
+              <a:defRPr b="1" i="0" sz="933" u="none" cap="none" strike="noStrike">
                 <a:solidFill>
                   <a:srgbClr val="E0DAFF"/>
                 </a:solidFill>
@@ -10834,7 +10922,7 @@
                 <a:sym typeface="Montserrat"/>
               </a:defRPr>
             </a:lvl2pPr>
-            <a:lvl3pPr indent="-50797" lvl="2" marL="50797" algn="r">
+            <a:lvl3pPr indent="-38100" lvl="2" marL="38100" marR="0" algn="r">
               <a:lnSpc>
                 <a:spcPct val="100000"/>
               </a:lnSpc>
@@ -10850,7 +10938,7 @@
               <a:buSzPts val="933"/>
               <a:buFont typeface="Montserrat"/>
               <a:buNone/>
-              <a:defRPr b="1" sz="933">
+              <a:defRPr b="1" i="0" sz="933" u="none" cap="none" strike="noStrike">
                 <a:solidFill>
                   <a:srgbClr val="E0DAFF"/>
                 </a:solidFill>
@@ -10860,7 +10948,7 @@
                 <a:sym typeface="Montserrat"/>
               </a:defRPr>
             </a:lvl3pPr>
-            <a:lvl4pPr indent="-50797" lvl="3" marL="50797" algn="r">
+            <a:lvl4pPr indent="-38100" lvl="3" marL="38100" marR="0" algn="r">
               <a:lnSpc>
                 <a:spcPct val="100000"/>
               </a:lnSpc>
@@ -10876,7 +10964,7 @@
               <a:buSzPts val="933"/>
               <a:buFont typeface="Montserrat"/>
               <a:buNone/>
-              <a:defRPr b="1" sz="933">
+              <a:defRPr b="1" i="0" sz="933" u="none" cap="none" strike="noStrike">
                 <a:solidFill>
                   <a:srgbClr val="E0DAFF"/>
                 </a:solidFill>
@@ -10886,7 +10974,7 @@
                 <a:sym typeface="Montserrat"/>
               </a:defRPr>
             </a:lvl4pPr>
-            <a:lvl5pPr indent="-50797" lvl="4" marL="50797" algn="r">
+            <a:lvl5pPr indent="-38100" lvl="4" marL="38100" marR="0" algn="r">
               <a:lnSpc>
                 <a:spcPct val="100000"/>
               </a:lnSpc>
@@ -10902,7 +10990,7 @@
               <a:buSzPts val="933"/>
               <a:buFont typeface="Montserrat"/>
               <a:buNone/>
-              <a:defRPr b="1" sz="933">
+              <a:defRPr b="1" i="0" sz="933" u="none" cap="none" strike="noStrike">
                 <a:solidFill>
                   <a:srgbClr val="E0DAFF"/>
                 </a:solidFill>
@@ -10912,7 +11000,7 @@
                 <a:sym typeface="Montserrat"/>
               </a:defRPr>
             </a:lvl5pPr>
-            <a:lvl6pPr indent="-50797" lvl="5" marL="50797" algn="r">
+            <a:lvl6pPr indent="-38100" lvl="5" marL="38100" marR="0" algn="r">
               <a:lnSpc>
                 <a:spcPct val="100000"/>
               </a:lnSpc>
@@ -10928,7 +11016,7 @@
               <a:buSzPts val="933"/>
               <a:buFont typeface="Montserrat"/>
               <a:buNone/>
-              <a:defRPr b="1" sz="933">
+              <a:defRPr b="1" i="0" sz="933" u="none" cap="none" strike="noStrike">
                 <a:solidFill>
                   <a:srgbClr val="E0DAFF"/>
                 </a:solidFill>
@@ -10938,7 +11026,7 @@
                 <a:sym typeface="Montserrat"/>
               </a:defRPr>
             </a:lvl6pPr>
-            <a:lvl7pPr indent="-50797" lvl="6" marL="50797" algn="r">
+            <a:lvl7pPr indent="-38100" lvl="6" marL="38100" marR="0" algn="r">
               <a:lnSpc>
                 <a:spcPct val="100000"/>
               </a:lnSpc>
@@ -10954,7 +11042,7 @@
               <a:buSzPts val="933"/>
               <a:buFont typeface="Montserrat"/>
               <a:buNone/>
-              <a:defRPr b="1" sz="933">
+              <a:defRPr b="1" i="0" sz="933" u="none" cap="none" strike="noStrike">
                 <a:solidFill>
                   <a:srgbClr val="E0DAFF"/>
                 </a:solidFill>
@@ -10964,7 +11052,7 @@
                 <a:sym typeface="Montserrat"/>
               </a:defRPr>
             </a:lvl7pPr>
-            <a:lvl8pPr indent="-50797" lvl="7" marL="50797" algn="r">
+            <a:lvl8pPr indent="-38100" lvl="7" marL="38100" marR="0" algn="r">
               <a:lnSpc>
                 <a:spcPct val="100000"/>
               </a:lnSpc>
@@ -10980,7 +11068,7 @@
               <a:buSzPts val="933"/>
               <a:buFont typeface="Montserrat"/>
               <a:buNone/>
-              <a:defRPr b="1" sz="933">
+              <a:defRPr b="1" i="0" sz="933" u="none" cap="none" strike="noStrike">
                 <a:solidFill>
                   <a:srgbClr val="E0DAFF"/>
                 </a:solidFill>
@@ -10990,7 +11078,7 @@
                 <a:sym typeface="Montserrat"/>
               </a:defRPr>
             </a:lvl8pPr>
-            <a:lvl9pPr indent="-50797" lvl="8" marL="50797" algn="r">
+            <a:lvl9pPr indent="-38100" lvl="8" marL="38100" marR="0" algn="r">
               <a:lnSpc>
                 <a:spcPct val="100000"/>
               </a:lnSpc>
@@ -11006,7 +11094,7 @@
               <a:buSzPts val="933"/>
               <a:buFont typeface="Montserrat"/>
               <a:buNone/>
-              <a:defRPr b="1" sz="933">
+              <a:defRPr b="1" i="0" sz="933" u="none" cap="none" strike="noStrike">
                 <a:solidFill>
                   <a:srgbClr val="E0DAFF"/>
                 </a:solidFill>
@@ -11018,7 +11106,7 @@
             </a:lvl9pPr>
           </a:lstStyle>
           <a:p>
-            <a:pPr indent="-50797" lvl="0" marL="50797" rtl="0" algn="r">
+            <a:pPr indent="-38100" lvl="0" marL="38100" rtl="0" algn="r">
               <a:spcBef>
                 <a:spcPts val="0"/>
               </a:spcBef>
@@ -11031,7 +11119,7 @@
               <a:rPr lang="en"/>
               <a:t>‹#›</a:t>
             </a:fld>
-            <a:endParaRPr i="0" u="none" cap="none" strike="noStrike"/>
+            <a:endParaRPr/>
           </a:p>
         </p:txBody>
       </p:sp>
@@ -11055,7 +11143,7 @@
     </p:bg>
     <p:spTree>
       <p:nvGrpSpPr>
-        <p:cNvPr id="264" name="Shape 264"/>
+        <p:cNvPr id="253" name="Shape 253"/>
         <p:cNvGrpSpPr/>
         <p:nvPr/>
       </p:nvGrpSpPr>
@@ -11069,7 +11157,7 @@
       </p:grpSpPr>
       <p:sp>
         <p:nvSpPr>
-          <p:cNvPr id="265" name="Google Shape;265;p34"/>
+          <p:cNvPr id="254" name="Google Shape;254;p32"/>
           <p:cNvSpPr txBox="1"/>
           <p:nvPr>
             <p:ph idx="12" type="sldNum"/>
@@ -11077,8 +11165,8 @@
         </p:nvSpPr>
         <p:spPr>
           <a:xfrm>
-            <a:off x="11673899" y="6332976"/>
-            <a:ext cx="466388" cy="471988"/>
+            <a:off x="11673919" y="6332818"/>
+            <a:ext cx="466388" cy="471976"/>
           </a:xfrm>
           <a:prstGeom prst="rect">
             <a:avLst/>
@@ -11093,7 +11181,7 @@
             <a:spAutoFit/>
           </a:bodyPr>
           <a:lstStyle>
-            <a:lvl1pPr indent="0" lvl="0" marL="0" algn="r">
+            <a:lvl1pPr indent="0" lvl="0" marL="0" marR="0" algn="r">
               <a:lnSpc>
                 <a:spcPct val="100000"/>
               </a:lnSpc>
@@ -11109,13 +11197,17 @@
               <a:buSzPts val="1600"/>
               <a:buFont typeface="Arial"/>
               <a:buNone/>
-              <a:defRPr sz="1600">
+              <a:defRPr b="0" i="0" sz="1600" u="none" cap="none" strike="noStrike">
                 <a:solidFill>
                   <a:srgbClr val="000000"/>
                 </a:solidFill>
+                <a:latin typeface="Arial"/>
+                <a:ea typeface="Arial"/>
+                <a:cs typeface="Arial"/>
+                <a:sym typeface="Arial"/>
               </a:defRPr>
             </a:lvl1pPr>
-            <a:lvl2pPr indent="0" lvl="1" marL="0" algn="r">
+            <a:lvl2pPr indent="0" lvl="1" marL="0" marR="0" algn="r">
               <a:lnSpc>
                 <a:spcPct val="100000"/>
               </a:lnSpc>
@@ -11131,13 +11223,17 @@
               <a:buSzPts val="1600"/>
               <a:buFont typeface="Arial"/>
               <a:buNone/>
-              <a:defRPr sz="1600">
+              <a:defRPr b="0" i="0" sz="1600" u="none" cap="none" strike="noStrike">
                 <a:solidFill>
                   <a:srgbClr val="000000"/>
                 </a:solidFill>
+                <a:latin typeface="Arial"/>
+                <a:ea typeface="Arial"/>
+                <a:cs typeface="Arial"/>
+                <a:sym typeface="Arial"/>
               </a:defRPr>
             </a:lvl2pPr>
-            <a:lvl3pPr indent="0" lvl="2" marL="0" algn="r">
+            <a:lvl3pPr indent="0" lvl="2" marL="0" marR="0" algn="r">
               <a:lnSpc>
                 <a:spcPct val="100000"/>
               </a:lnSpc>
@@ -11153,13 +11249,17 @@
               <a:buSzPts val="1600"/>
               <a:buFont typeface="Arial"/>
               <a:buNone/>
-              <a:defRPr sz="1600">
+              <a:defRPr b="0" i="0" sz="1600" u="none" cap="none" strike="noStrike">
                 <a:solidFill>
                   <a:srgbClr val="000000"/>
                 </a:solidFill>
+                <a:latin typeface="Arial"/>
+                <a:ea typeface="Arial"/>
+                <a:cs typeface="Arial"/>
+                <a:sym typeface="Arial"/>
               </a:defRPr>
             </a:lvl3pPr>
-            <a:lvl4pPr indent="0" lvl="3" marL="0" algn="r">
+            <a:lvl4pPr indent="0" lvl="3" marL="0" marR="0" algn="r">
               <a:lnSpc>
                 <a:spcPct val="100000"/>
               </a:lnSpc>
@@ -11175,13 +11275,17 @@
               <a:buSzPts val="1600"/>
               <a:buFont typeface="Arial"/>
               <a:buNone/>
-              <a:defRPr sz="1600">
+              <a:defRPr b="0" i="0" sz="1600" u="none" cap="none" strike="noStrike">
                 <a:solidFill>
                   <a:srgbClr val="000000"/>
                 </a:solidFill>
+                <a:latin typeface="Arial"/>
+                <a:ea typeface="Arial"/>
+                <a:cs typeface="Arial"/>
+                <a:sym typeface="Arial"/>
               </a:defRPr>
             </a:lvl4pPr>
-            <a:lvl5pPr indent="0" lvl="4" marL="0" algn="r">
+            <a:lvl5pPr indent="0" lvl="4" marL="0" marR="0" algn="r">
               <a:lnSpc>
                 <a:spcPct val="100000"/>
               </a:lnSpc>
@@ -11197,13 +11301,17 @@
               <a:buSzPts val="1600"/>
               <a:buFont typeface="Arial"/>
               <a:buNone/>
-              <a:defRPr sz="1600">
+              <a:defRPr b="0" i="0" sz="1600" u="none" cap="none" strike="noStrike">
                 <a:solidFill>
                   <a:srgbClr val="000000"/>
                 </a:solidFill>
+                <a:latin typeface="Arial"/>
+                <a:ea typeface="Arial"/>
+                <a:cs typeface="Arial"/>
+                <a:sym typeface="Arial"/>
               </a:defRPr>
             </a:lvl5pPr>
-            <a:lvl6pPr indent="0" lvl="5" marL="0" algn="r">
+            <a:lvl6pPr indent="0" lvl="5" marL="0" marR="0" algn="r">
               <a:lnSpc>
                 <a:spcPct val="100000"/>
               </a:lnSpc>
@@ -11219,13 +11327,17 @@
               <a:buSzPts val="1600"/>
               <a:buFont typeface="Arial"/>
               <a:buNone/>
-              <a:defRPr sz="1600">
+              <a:defRPr b="0" i="0" sz="1600" u="none" cap="none" strike="noStrike">
                 <a:solidFill>
                   <a:srgbClr val="000000"/>
                 </a:solidFill>
+                <a:latin typeface="Arial"/>
+                <a:ea typeface="Arial"/>
+                <a:cs typeface="Arial"/>
+                <a:sym typeface="Arial"/>
               </a:defRPr>
             </a:lvl6pPr>
-            <a:lvl7pPr indent="0" lvl="6" marL="0" algn="r">
+            <a:lvl7pPr indent="0" lvl="6" marL="0" marR="0" algn="r">
               <a:lnSpc>
                 <a:spcPct val="100000"/>
               </a:lnSpc>
@@ -11241,13 +11353,17 @@
               <a:buSzPts val="1600"/>
               <a:buFont typeface="Arial"/>
               <a:buNone/>
-              <a:defRPr sz="1600">
+              <a:defRPr b="0" i="0" sz="1600" u="none" cap="none" strike="noStrike">
                 <a:solidFill>
                   <a:srgbClr val="000000"/>
                 </a:solidFill>
+                <a:latin typeface="Arial"/>
+                <a:ea typeface="Arial"/>
+                <a:cs typeface="Arial"/>
+                <a:sym typeface="Arial"/>
               </a:defRPr>
             </a:lvl7pPr>
-            <a:lvl8pPr indent="0" lvl="7" marL="0" algn="r">
+            <a:lvl8pPr indent="0" lvl="7" marL="0" marR="0" algn="r">
               <a:lnSpc>
                 <a:spcPct val="100000"/>
               </a:lnSpc>
@@ -11263,13 +11379,17 @@
               <a:buSzPts val="1600"/>
               <a:buFont typeface="Arial"/>
               <a:buNone/>
-              <a:defRPr sz="1600">
+              <a:defRPr b="0" i="0" sz="1600" u="none" cap="none" strike="noStrike">
                 <a:solidFill>
                   <a:srgbClr val="000000"/>
                 </a:solidFill>
+                <a:latin typeface="Arial"/>
+                <a:ea typeface="Arial"/>
+                <a:cs typeface="Arial"/>
+                <a:sym typeface="Arial"/>
               </a:defRPr>
             </a:lvl8pPr>
-            <a:lvl9pPr indent="0" lvl="8" marL="0" algn="r">
+            <a:lvl9pPr indent="0" lvl="8" marL="0" marR="0" algn="r">
               <a:lnSpc>
                 <a:spcPct val="100000"/>
               </a:lnSpc>
@@ -11285,10 +11405,14 @@
               <a:buSzPts val="1600"/>
               <a:buFont typeface="Arial"/>
               <a:buNone/>
-              <a:defRPr sz="1600">
+              <a:defRPr b="0" i="0" sz="1600" u="none" cap="none" strike="noStrike">
                 <a:solidFill>
                   <a:srgbClr val="000000"/>
                 </a:solidFill>
+                <a:latin typeface="Arial"/>
+                <a:ea typeface="Arial"/>
+                <a:cs typeface="Arial"/>
+                <a:sym typeface="Arial"/>
               </a:defRPr>
             </a:lvl9pPr>
           </a:lstStyle>
@@ -11306,12 +11430,7 @@
               <a:rPr lang="en"/>
               <a:t>‹#›</a:t>
             </a:fld>
-            <a:endParaRPr b="0" i="0" u="none" cap="none" strike="noStrike">
-              <a:latin typeface="Arial"/>
-              <a:ea typeface="Arial"/>
-              <a:cs typeface="Arial"/>
-              <a:sym typeface="Arial"/>
-            </a:endParaRPr>
+            <a:endParaRPr/>
           </a:p>
         </p:txBody>
       </p:sp>
@@ -11335,7 +11454,7 @@
     </p:bg>
     <p:spTree>
       <p:nvGrpSpPr>
-        <p:cNvPr id="91" name="Shape 91"/>
+        <p:cNvPr id="80" name="Shape 80"/>
         <p:cNvGrpSpPr/>
         <p:nvPr/>
       </p:nvGrpSpPr>
@@ -11349,7 +11468,7 @@
       </p:grpSpPr>
       <p:sp>
         <p:nvSpPr>
-          <p:cNvPr id="92" name="Google Shape;92;p17"/>
+          <p:cNvPr id="81" name="Google Shape;81;p15"/>
           <p:cNvSpPr txBox="1"/>
           <p:nvPr>
             <p:ph type="title"/>
@@ -11357,8 +11476,8 @@
         </p:nvSpPr>
         <p:spPr>
           <a:xfrm>
-            <a:off x="369989" y="554985"/>
-            <a:ext cx="11451714" cy="1179970"/>
+            <a:off x="369989" y="554971"/>
+            <a:ext cx="11451732" cy="1179941"/>
           </a:xfrm>
           <a:prstGeom prst="rect">
             <a:avLst/>
@@ -11537,7 +11656,7 @@
       </p:sp>
       <p:sp>
         <p:nvSpPr>
-          <p:cNvPr id="93" name="Google Shape;93;p17"/>
+          <p:cNvPr id="82" name="Google Shape;82;p15"/>
           <p:cNvSpPr txBox="1"/>
           <p:nvPr>
             <p:ph idx="1" type="body"/>
@@ -11545,8 +11664,8 @@
         </p:nvSpPr>
         <p:spPr>
           <a:xfrm>
-            <a:off x="369989" y="371791"/>
-            <a:ext cx="5110272" cy="183195"/>
+            <a:off x="369989" y="371781"/>
+            <a:ext cx="5110280" cy="183190"/>
           </a:xfrm>
           <a:prstGeom prst="rect">
             <a:avLst/>
@@ -11733,7 +11852,7 @@
       </p:sp>
       <p:sp>
         <p:nvSpPr>
-          <p:cNvPr id="94" name="Google Shape;94;p17"/>
+          <p:cNvPr id="83" name="Google Shape;83;p15"/>
           <p:cNvSpPr txBox="1"/>
           <p:nvPr>
             <p:ph idx="12" type="sldNum"/>
@@ -11741,8 +11860,8 @@
         </p:nvSpPr>
         <p:spPr>
           <a:xfrm>
-            <a:off x="11652438" y="6343529"/>
-            <a:ext cx="169196" cy="163996"/>
+            <a:off x="11652456" y="6343371"/>
+            <a:ext cx="169196" cy="163992"/>
           </a:xfrm>
           <a:prstGeom prst="rect">
             <a:avLst/>
@@ -11757,7 +11876,7 @@
             <a:spAutoFit/>
           </a:bodyPr>
           <a:lstStyle>
-            <a:lvl1pPr indent="-50800" lvl="0" marL="50800" algn="r">
+            <a:lvl1pPr indent="-38100" lvl="0" marL="38100" marR="0" algn="r">
               <a:lnSpc>
                 <a:spcPct val="100000"/>
               </a:lnSpc>
@@ -11773,7 +11892,7 @@
               <a:buSzPts val="1067"/>
               <a:buFont typeface="Montserrat"/>
               <a:buNone/>
-              <a:defRPr b="1" sz="1067">
+              <a:defRPr b="1" i="0" sz="1067" u="none" cap="none" strike="noStrike">
                 <a:solidFill>
                   <a:srgbClr val="E0DAFF"/>
                 </a:solidFill>
@@ -11783,7 +11902,7 @@
                 <a:sym typeface="Montserrat"/>
               </a:defRPr>
             </a:lvl1pPr>
-            <a:lvl2pPr indent="-50800" lvl="1" marL="50800" algn="r">
+            <a:lvl2pPr indent="-38100" lvl="1" marL="38100" marR="0" algn="r">
               <a:lnSpc>
                 <a:spcPct val="100000"/>
               </a:lnSpc>
@@ -11799,7 +11918,7 @@
               <a:buSzPts val="1067"/>
               <a:buFont typeface="Montserrat"/>
               <a:buNone/>
-              <a:defRPr b="1" sz="1067">
+              <a:defRPr b="1" i="0" sz="1067" u="none" cap="none" strike="noStrike">
                 <a:solidFill>
                   <a:srgbClr val="E0DAFF"/>
                 </a:solidFill>
@@ -11809,7 +11928,7 @@
                 <a:sym typeface="Montserrat"/>
               </a:defRPr>
             </a:lvl2pPr>
-            <a:lvl3pPr indent="-50800" lvl="2" marL="50800" algn="r">
+            <a:lvl3pPr indent="-38100" lvl="2" marL="38100" marR="0" algn="r">
               <a:lnSpc>
                 <a:spcPct val="100000"/>
               </a:lnSpc>
@@ -11825,7 +11944,7 @@
               <a:buSzPts val="1067"/>
               <a:buFont typeface="Montserrat"/>
               <a:buNone/>
-              <a:defRPr b="1" sz="1067">
+              <a:defRPr b="1" i="0" sz="1067" u="none" cap="none" strike="noStrike">
                 <a:solidFill>
                   <a:srgbClr val="E0DAFF"/>
                 </a:solidFill>
@@ -11835,7 +11954,7 @@
                 <a:sym typeface="Montserrat"/>
               </a:defRPr>
             </a:lvl3pPr>
-            <a:lvl4pPr indent="-50800" lvl="3" marL="50800" algn="r">
+            <a:lvl4pPr indent="-38100" lvl="3" marL="38100" marR="0" algn="r">
               <a:lnSpc>
                 <a:spcPct val="100000"/>
               </a:lnSpc>
@@ -11851,7 +11970,7 @@
               <a:buSzPts val="1067"/>
               <a:buFont typeface="Montserrat"/>
               <a:buNone/>
-              <a:defRPr b="1" sz="1067">
+              <a:defRPr b="1" i="0" sz="1067" u="none" cap="none" strike="noStrike">
                 <a:solidFill>
                   <a:srgbClr val="E0DAFF"/>
                 </a:solidFill>
@@ -11861,7 +11980,7 @@
                 <a:sym typeface="Montserrat"/>
               </a:defRPr>
             </a:lvl4pPr>
-            <a:lvl5pPr indent="-50800" lvl="4" marL="50800" algn="r">
+            <a:lvl5pPr indent="-38100" lvl="4" marL="38100" marR="0" algn="r">
               <a:lnSpc>
                 <a:spcPct val="100000"/>
               </a:lnSpc>
@@ -11877,7 +11996,7 @@
               <a:buSzPts val="1067"/>
               <a:buFont typeface="Montserrat"/>
               <a:buNone/>
-              <a:defRPr b="1" sz="1067">
+              <a:defRPr b="1" i="0" sz="1067" u="none" cap="none" strike="noStrike">
                 <a:solidFill>
                   <a:srgbClr val="E0DAFF"/>
                 </a:solidFill>
@@ -11887,7 +12006,7 @@
                 <a:sym typeface="Montserrat"/>
               </a:defRPr>
             </a:lvl5pPr>
-            <a:lvl6pPr indent="-50800" lvl="5" marL="50800" algn="r">
+            <a:lvl6pPr indent="-38100" lvl="5" marL="38100" marR="0" algn="r">
               <a:lnSpc>
                 <a:spcPct val="100000"/>
               </a:lnSpc>
@@ -11903,7 +12022,7 @@
               <a:buSzPts val="1067"/>
               <a:buFont typeface="Montserrat"/>
               <a:buNone/>
-              <a:defRPr b="1" sz="1067">
+              <a:defRPr b="1" i="0" sz="1067" u="none" cap="none" strike="noStrike">
                 <a:solidFill>
                   <a:srgbClr val="E0DAFF"/>
                 </a:solidFill>
@@ -11913,7 +12032,7 @@
                 <a:sym typeface="Montserrat"/>
               </a:defRPr>
             </a:lvl6pPr>
-            <a:lvl7pPr indent="-50800" lvl="6" marL="50800" algn="r">
+            <a:lvl7pPr indent="-38100" lvl="6" marL="38100" marR="0" algn="r">
               <a:lnSpc>
                 <a:spcPct val="100000"/>
               </a:lnSpc>
@@ -11929,7 +12048,7 @@
               <a:buSzPts val="1067"/>
               <a:buFont typeface="Montserrat"/>
               <a:buNone/>
-              <a:defRPr b="1" sz="1067">
+              <a:defRPr b="1" i="0" sz="1067" u="none" cap="none" strike="noStrike">
                 <a:solidFill>
                   <a:srgbClr val="E0DAFF"/>
                 </a:solidFill>
@@ -11939,7 +12058,7 @@
                 <a:sym typeface="Montserrat"/>
               </a:defRPr>
             </a:lvl7pPr>
-            <a:lvl8pPr indent="-50800" lvl="7" marL="50800" algn="r">
+            <a:lvl8pPr indent="-38100" lvl="7" marL="38100" marR="0" algn="r">
               <a:lnSpc>
                 <a:spcPct val="100000"/>
               </a:lnSpc>
@@ -11955,7 +12074,7 @@
               <a:buSzPts val="1067"/>
               <a:buFont typeface="Montserrat"/>
               <a:buNone/>
-              <a:defRPr b="1" sz="1067">
+              <a:defRPr b="1" i="0" sz="1067" u="none" cap="none" strike="noStrike">
                 <a:solidFill>
                   <a:srgbClr val="E0DAFF"/>
                 </a:solidFill>
@@ -11965,7 +12084,7 @@
                 <a:sym typeface="Montserrat"/>
               </a:defRPr>
             </a:lvl8pPr>
-            <a:lvl9pPr indent="-50800" lvl="8" marL="50800" algn="r">
+            <a:lvl9pPr indent="-38100" lvl="8" marL="38100" marR="0" algn="r">
               <a:lnSpc>
                 <a:spcPct val="100000"/>
               </a:lnSpc>
@@ -11981,7 +12100,7 @@
               <a:buSzPts val="1067"/>
               <a:buFont typeface="Montserrat"/>
               <a:buNone/>
-              <a:defRPr b="1" sz="1067">
+              <a:defRPr b="1" i="0" sz="1067" u="none" cap="none" strike="noStrike">
                 <a:solidFill>
                   <a:srgbClr val="E0DAFF"/>
                 </a:solidFill>
@@ -11993,7 +12112,7 @@
             </a:lvl9pPr>
           </a:lstStyle>
           <a:p>
-            <a:pPr indent="-50800" lvl="0" marL="50800" rtl="0" algn="r">
+            <a:pPr indent="-38100" lvl="0" marL="38100" rtl="0" algn="r">
               <a:spcBef>
                 <a:spcPts val="0"/>
               </a:spcBef>
@@ -12006,7 +12125,7 @@
               <a:rPr lang="en"/>
               <a:t>‹#›</a:t>
             </a:fld>
-            <a:endParaRPr i="0" u="none" cap="none" strike="noStrike"/>
+            <a:endParaRPr/>
           </a:p>
         </p:txBody>
       </p:sp>
@@ -12030,7 +12149,7 @@
     </p:bg>
     <p:spTree>
       <p:nvGrpSpPr>
-        <p:cNvPr id="95" name="Shape 95"/>
+        <p:cNvPr id="84" name="Shape 84"/>
         <p:cNvGrpSpPr/>
         <p:nvPr/>
       </p:nvGrpSpPr>
@@ -12044,14 +12163,14 @@
       </p:grpSpPr>
       <p:sp>
         <p:nvSpPr>
-          <p:cNvPr id="96" name="Google Shape;96;p18"/>
+          <p:cNvPr id="85" name="Google Shape;85;p16"/>
           <p:cNvSpPr/>
           <p:nvPr/>
         </p:nvSpPr>
         <p:spPr>
           <a:xfrm>
-            <a:off x="375889" y="368323"/>
-            <a:ext cx="11451714" cy="6131847"/>
+            <a:off x="375889" y="368313"/>
+            <a:ext cx="11451732" cy="6131693"/>
           </a:xfrm>
           <a:prstGeom prst="roundRect">
             <a:avLst>
@@ -12113,7 +12232,7 @@
       </p:sp>
       <p:sp>
         <p:nvSpPr>
-          <p:cNvPr id="97" name="Google Shape;97;p18"/>
+          <p:cNvPr id="86" name="Google Shape;86;p16"/>
           <p:cNvSpPr txBox="1"/>
           <p:nvPr>
             <p:ph type="title"/>
@@ -12121,8 +12240,8 @@
         </p:nvSpPr>
         <p:spPr>
           <a:xfrm>
-            <a:off x="3464545" y="4657317"/>
-            <a:ext cx="7980200" cy="1326367"/>
+            <a:off x="3464551" y="4657201"/>
+            <a:ext cx="7980214" cy="1326333"/>
           </a:xfrm>
           <a:prstGeom prst="rect">
             <a:avLst/>
@@ -12297,7 +12416,7 @@
       </p:sp>
       <p:sp>
         <p:nvSpPr>
-          <p:cNvPr id="98" name="Google Shape;98;p18"/>
+          <p:cNvPr id="87" name="Google Shape;87;p16"/>
           <p:cNvSpPr txBox="1"/>
           <p:nvPr>
             <p:ph idx="12" type="sldNum"/>
@@ -12305,8 +12424,8 @@
         </p:nvSpPr>
         <p:spPr>
           <a:xfrm>
-            <a:off x="5892653" y="6169928"/>
-            <a:ext cx="2844729" cy="369191"/>
+            <a:off x="5892663" y="6169774"/>
+            <a:ext cx="2844734" cy="369181"/>
           </a:xfrm>
           <a:prstGeom prst="rect">
             <a:avLst/>
@@ -12321,7 +12440,7 @@
             <a:spAutoFit/>
           </a:bodyPr>
           <a:lstStyle>
-            <a:lvl1pPr indent="0" lvl="0" marL="0" algn="r">
+            <a:lvl1pPr indent="0" lvl="0" marL="0" marR="0" algn="r">
               <a:lnSpc>
                 <a:spcPct val="100000"/>
               </a:lnSpc>
@@ -12337,13 +12456,17 @@
               <a:buSzPts val="1600"/>
               <a:buFont typeface="Arial"/>
               <a:buNone/>
-              <a:defRPr sz="1600">
+              <a:defRPr b="0" i="0" sz="1600" u="none" cap="none" strike="noStrike">
                 <a:solidFill>
                   <a:srgbClr val="000000"/>
                 </a:solidFill>
+                <a:latin typeface="Arial"/>
+                <a:ea typeface="Arial"/>
+                <a:cs typeface="Arial"/>
+                <a:sym typeface="Arial"/>
               </a:defRPr>
             </a:lvl1pPr>
-            <a:lvl2pPr indent="0" lvl="1" marL="0" algn="r">
+            <a:lvl2pPr indent="0" lvl="1" marL="0" marR="0" algn="r">
               <a:lnSpc>
                 <a:spcPct val="100000"/>
               </a:lnSpc>
@@ -12359,13 +12482,17 @@
               <a:buSzPts val="1600"/>
               <a:buFont typeface="Arial"/>
               <a:buNone/>
-              <a:defRPr sz="1600">
+              <a:defRPr b="0" i="0" sz="1600" u="none" cap="none" strike="noStrike">
                 <a:solidFill>
                   <a:srgbClr val="000000"/>
                 </a:solidFill>
+                <a:latin typeface="Arial"/>
+                <a:ea typeface="Arial"/>
+                <a:cs typeface="Arial"/>
+                <a:sym typeface="Arial"/>
               </a:defRPr>
             </a:lvl2pPr>
-            <a:lvl3pPr indent="0" lvl="2" marL="0" algn="r">
+            <a:lvl3pPr indent="0" lvl="2" marL="0" marR="0" algn="r">
               <a:lnSpc>
                 <a:spcPct val="100000"/>
               </a:lnSpc>
@@ -12381,13 +12508,17 @@
               <a:buSzPts val="1600"/>
               <a:buFont typeface="Arial"/>
               <a:buNone/>
-              <a:defRPr sz="1600">
+              <a:defRPr b="0" i="0" sz="1600" u="none" cap="none" strike="noStrike">
                 <a:solidFill>
                   <a:srgbClr val="000000"/>
                 </a:solidFill>
+                <a:latin typeface="Arial"/>
+                <a:ea typeface="Arial"/>
+                <a:cs typeface="Arial"/>
+                <a:sym typeface="Arial"/>
               </a:defRPr>
             </a:lvl3pPr>
-            <a:lvl4pPr indent="0" lvl="3" marL="0" algn="r">
+            <a:lvl4pPr indent="0" lvl="3" marL="0" marR="0" algn="r">
               <a:lnSpc>
                 <a:spcPct val="100000"/>
               </a:lnSpc>
@@ -12403,13 +12534,17 @@
               <a:buSzPts val="1600"/>
               <a:buFont typeface="Arial"/>
               <a:buNone/>
-              <a:defRPr sz="1600">
+              <a:defRPr b="0" i="0" sz="1600" u="none" cap="none" strike="noStrike">
                 <a:solidFill>
                   <a:srgbClr val="000000"/>
                 </a:solidFill>
+                <a:latin typeface="Arial"/>
+                <a:ea typeface="Arial"/>
+                <a:cs typeface="Arial"/>
+                <a:sym typeface="Arial"/>
               </a:defRPr>
             </a:lvl4pPr>
-            <a:lvl5pPr indent="0" lvl="4" marL="0" algn="r">
+            <a:lvl5pPr indent="0" lvl="4" marL="0" marR="0" algn="r">
               <a:lnSpc>
                 <a:spcPct val="100000"/>
               </a:lnSpc>
@@ -12425,13 +12560,17 @@
               <a:buSzPts val="1600"/>
               <a:buFont typeface="Arial"/>
               <a:buNone/>
-              <a:defRPr sz="1600">
+              <a:defRPr b="0" i="0" sz="1600" u="none" cap="none" strike="noStrike">
                 <a:solidFill>
                   <a:srgbClr val="000000"/>
                 </a:solidFill>
+                <a:latin typeface="Arial"/>
+                <a:ea typeface="Arial"/>
+                <a:cs typeface="Arial"/>
+                <a:sym typeface="Arial"/>
               </a:defRPr>
             </a:lvl5pPr>
-            <a:lvl6pPr indent="0" lvl="5" marL="0" algn="r">
+            <a:lvl6pPr indent="0" lvl="5" marL="0" marR="0" algn="r">
               <a:lnSpc>
                 <a:spcPct val="100000"/>
               </a:lnSpc>
@@ -12447,13 +12586,17 @@
               <a:buSzPts val="1600"/>
               <a:buFont typeface="Arial"/>
               <a:buNone/>
-              <a:defRPr sz="1600">
+              <a:defRPr b="0" i="0" sz="1600" u="none" cap="none" strike="noStrike">
                 <a:solidFill>
                   <a:srgbClr val="000000"/>
                 </a:solidFill>
+                <a:latin typeface="Arial"/>
+                <a:ea typeface="Arial"/>
+                <a:cs typeface="Arial"/>
+                <a:sym typeface="Arial"/>
               </a:defRPr>
             </a:lvl6pPr>
-            <a:lvl7pPr indent="0" lvl="6" marL="0" algn="r">
+            <a:lvl7pPr indent="0" lvl="6" marL="0" marR="0" algn="r">
               <a:lnSpc>
                 <a:spcPct val="100000"/>
               </a:lnSpc>
@@ -12469,13 +12612,17 @@
               <a:buSzPts val="1600"/>
               <a:buFont typeface="Arial"/>
               <a:buNone/>
-              <a:defRPr sz="1600">
+              <a:defRPr b="0" i="0" sz="1600" u="none" cap="none" strike="noStrike">
                 <a:solidFill>
                   <a:srgbClr val="000000"/>
                 </a:solidFill>
+                <a:latin typeface="Arial"/>
+                <a:ea typeface="Arial"/>
+                <a:cs typeface="Arial"/>
+                <a:sym typeface="Arial"/>
               </a:defRPr>
             </a:lvl7pPr>
-            <a:lvl8pPr indent="0" lvl="7" marL="0" algn="r">
+            <a:lvl8pPr indent="0" lvl="7" marL="0" marR="0" algn="r">
               <a:lnSpc>
                 <a:spcPct val="100000"/>
               </a:lnSpc>
@@ -12491,13 +12638,17 @@
               <a:buSzPts val="1600"/>
               <a:buFont typeface="Arial"/>
               <a:buNone/>
-              <a:defRPr sz="1600">
+              <a:defRPr b="0" i="0" sz="1600" u="none" cap="none" strike="noStrike">
                 <a:solidFill>
                   <a:srgbClr val="000000"/>
                 </a:solidFill>
+                <a:latin typeface="Arial"/>
+                <a:ea typeface="Arial"/>
+                <a:cs typeface="Arial"/>
+                <a:sym typeface="Arial"/>
               </a:defRPr>
             </a:lvl8pPr>
-            <a:lvl9pPr indent="0" lvl="8" marL="0" algn="r">
+            <a:lvl9pPr indent="0" lvl="8" marL="0" marR="0" algn="r">
               <a:lnSpc>
                 <a:spcPct val="100000"/>
               </a:lnSpc>
@@ -12513,10 +12664,14 @@
               <a:buSzPts val="1600"/>
               <a:buFont typeface="Arial"/>
               <a:buNone/>
-              <a:defRPr sz="1600">
+              <a:defRPr b="0" i="0" sz="1600" u="none" cap="none" strike="noStrike">
                 <a:solidFill>
                   <a:srgbClr val="000000"/>
                 </a:solidFill>
+                <a:latin typeface="Arial"/>
+                <a:ea typeface="Arial"/>
+                <a:cs typeface="Arial"/>
+                <a:sym typeface="Arial"/>
               </a:defRPr>
             </a:lvl9pPr>
           </a:lstStyle>
@@ -12558,7 +12713,7 @@
     </p:bg>
     <p:spTree>
       <p:nvGrpSpPr>
-        <p:cNvPr id="99" name="Shape 99"/>
+        <p:cNvPr id="88" name="Shape 88"/>
         <p:cNvGrpSpPr/>
         <p:nvPr/>
       </p:nvGrpSpPr>
@@ -12572,7 +12727,7 @@
       </p:grpSpPr>
       <p:sp>
         <p:nvSpPr>
-          <p:cNvPr id="100" name="Google Shape;100;p19"/>
+          <p:cNvPr id="89" name="Google Shape;89;p17"/>
           <p:cNvSpPr txBox="1"/>
           <p:nvPr>
             <p:ph idx="1" type="body"/>
@@ -12580,8 +12735,8 @@
         </p:nvSpPr>
         <p:spPr>
           <a:xfrm>
-            <a:off x="557234" y="3550890"/>
-            <a:ext cx="1783155" cy="521187"/>
+            <a:off x="557235" y="3550802"/>
+            <a:ext cx="1783158" cy="521174"/>
           </a:xfrm>
           <a:prstGeom prst="rect">
             <a:avLst/>
@@ -12788,7 +12943,7 @@
       </p:sp>
       <p:sp>
         <p:nvSpPr>
-          <p:cNvPr id="101" name="Google Shape;101;p19"/>
+          <p:cNvPr id="90" name="Google Shape;90;p17"/>
           <p:cNvSpPr txBox="1"/>
           <p:nvPr>
             <p:ph idx="2" type="body"/>
@@ -12796,8 +12951,8 @@
         </p:nvSpPr>
         <p:spPr>
           <a:xfrm>
-            <a:off x="557067" y="4250340"/>
-            <a:ext cx="1783155" cy="1569161"/>
+            <a:off x="557067" y="4250234"/>
+            <a:ext cx="1783158" cy="1569122"/>
           </a:xfrm>
           <a:prstGeom prst="rect">
             <a:avLst/>
@@ -12944,7 +13099,7 @@
       </p:sp>
       <p:sp>
         <p:nvSpPr>
-          <p:cNvPr id="102" name="Google Shape;102;p19"/>
+          <p:cNvPr id="91" name="Google Shape;91;p17"/>
           <p:cNvSpPr txBox="1"/>
           <p:nvPr>
             <p:ph idx="3" type="body"/>
@@ -12952,8 +13107,8 @@
         </p:nvSpPr>
         <p:spPr>
           <a:xfrm>
-            <a:off x="2889694" y="4250340"/>
-            <a:ext cx="1783155" cy="1569161"/>
+            <a:off x="2889698" y="4250234"/>
+            <a:ext cx="1783158" cy="1569122"/>
           </a:xfrm>
           <a:prstGeom prst="rect">
             <a:avLst/>
@@ -13100,7 +13255,7 @@
       </p:sp>
       <p:sp>
         <p:nvSpPr>
-          <p:cNvPr id="103" name="Google Shape;103;p19"/>
+          <p:cNvPr id="92" name="Google Shape;92;p17"/>
           <p:cNvSpPr txBox="1"/>
           <p:nvPr>
             <p:ph idx="4" type="body"/>
@@ -13108,8 +13263,8 @@
         </p:nvSpPr>
         <p:spPr>
           <a:xfrm>
-            <a:off x="5204270" y="4250340"/>
-            <a:ext cx="1783155" cy="1569161"/>
+            <a:off x="5204279" y="4250234"/>
+            <a:ext cx="1783158" cy="1569122"/>
           </a:xfrm>
           <a:prstGeom prst="rect">
             <a:avLst/>
@@ -13256,7 +13411,7 @@
       </p:sp>
       <p:sp>
         <p:nvSpPr>
-          <p:cNvPr id="104" name="Google Shape;104;p19"/>
+          <p:cNvPr id="93" name="Google Shape;93;p17"/>
           <p:cNvSpPr txBox="1"/>
           <p:nvPr>
             <p:ph idx="5" type="body"/>
@@ -13264,8 +13419,8 @@
         </p:nvSpPr>
         <p:spPr>
           <a:xfrm>
-            <a:off x="7531310" y="4250340"/>
-            <a:ext cx="1783155" cy="1569161"/>
+            <a:off x="7531322" y="4250234"/>
+            <a:ext cx="1783158" cy="1569122"/>
           </a:xfrm>
           <a:prstGeom prst="rect">
             <a:avLst/>
@@ -13412,7 +13567,7 @@
       </p:sp>
       <p:sp>
         <p:nvSpPr>
-          <p:cNvPr id="105" name="Google Shape;105;p19"/>
+          <p:cNvPr id="94" name="Google Shape;94;p17"/>
           <p:cNvSpPr txBox="1"/>
           <p:nvPr>
             <p:ph idx="6" type="body"/>
@@ -13420,8 +13575,8 @@
         </p:nvSpPr>
         <p:spPr>
           <a:xfrm>
-            <a:off x="9846808" y="4250340"/>
-            <a:ext cx="1783155" cy="1569161"/>
+            <a:off x="9846824" y="4250234"/>
+            <a:ext cx="1783158" cy="1569122"/>
           </a:xfrm>
           <a:prstGeom prst="rect">
             <a:avLst/>
@@ -13568,7 +13723,7 @@
       </p:sp>
       <p:sp>
         <p:nvSpPr>
-          <p:cNvPr id="106" name="Google Shape;106;p19"/>
+          <p:cNvPr id="95" name="Google Shape;95;p17"/>
           <p:cNvSpPr txBox="1"/>
           <p:nvPr>
             <p:ph type="title"/>
@@ -13576,8 +13731,8 @@
         </p:nvSpPr>
         <p:spPr>
           <a:xfrm>
-            <a:off x="369989" y="554985"/>
-            <a:ext cx="11451714" cy="1179970"/>
+            <a:off x="369989" y="554971"/>
+            <a:ext cx="11451732" cy="1179941"/>
           </a:xfrm>
           <a:prstGeom prst="rect">
             <a:avLst/>
@@ -13756,7 +13911,7 @@
       </p:sp>
       <p:pic>
         <p:nvPicPr>
-          <p:cNvPr descr="Logo2.pngGoogle Shape;37;p4" id="107" name="Google Shape;107;p19"/>
+          <p:cNvPr descr="Logo2.pngGoogle Shape;37;p4" id="96" name="Google Shape;96;p17"/>
           <p:cNvPicPr preferRelativeResize="0"/>
           <p:nvPr/>
         </p:nvPicPr>
@@ -13769,8 +13924,8 @@
         </p:blipFill>
         <p:spPr>
           <a:xfrm>
-            <a:off x="10648199" y="273526"/>
-            <a:ext cx="1184038" cy="337125"/>
+            <a:off x="10648216" y="273520"/>
+            <a:ext cx="1184040" cy="337117"/>
           </a:xfrm>
           <a:prstGeom prst="rect">
             <a:avLst/>
@@ -13783,7 +13938,7 @@
       </p:pic>
       <p:sp>
         <p:nvSpPr>
-          <p:cNvPr id="108" name="Google Shape;108;p19"/>
+          <p:cNvPr id="97" name="Google Shape;97;p17"/>
           <p:cNvSpPr txBox="1"/>
           <p:nvPr>
             <p:ph idx="12" type="sldNum"/>
@@ -13791,8 +13946,8 @@
         </p:nvSpPr>
         <p:spPr>
           <a:xfrm>
-            <a:off x="11652438" y="6343529"/>
-            <a:ext cx="169196" cy="163996"/>
+            <a:off x="11652456" y="6343371"/>
+            <a:ext cx="169196" cy="163992"/>
           </a:xfrm>
           <a:prstGeom prst="rect">
             <a:avLst/>
@@ -13807,7 +13962,7 @@
             <a:spAutoFit/>
           </a:bodyPr>
           <a:lstStyle>
-            <a:lvl1pPr indent="-50800" lvl="0" marL="50800" algn="r">
+            <a:lvl1pPr indent="-38100" lvl="0" marL="38100" marR="0" algn="r">
               <a:lnSpc>
                 <a:spcPct val="100000"/>
               </a:lnSpc>
@@ -13823,7 +13978,7 @@
               <a:buSzPts val="1067"/>
               <a:buFont typeface="Montserrat"/>
               <a:buNone/>
-              <a:defRPr b="1" sz="1067">
+              <a:defRPr b="1" i="0" sz="1067" u="none" cap="none" strike="noStrike">
                 <a:solidFill>
                   <a:srgbClr val="E0DAFF"/>
                 </a:solidFill>
@@ -13833,7 +13988,7 @@
                 <a:sym typeface="Montserrat"/>
               </a:defRPr>
             </a:lvl1pPr>
-            <a:lvl2pPr indent="-50800" lvl="1" marL="50800" algn="r">
+            <a:lvl2pPr indent="-38100" lvl="1" marL="38100" marR="0" algn="r">
               <a:lnSpc>
                 <a:spcPct val="100000"/>
               </a:lnSpc>
@@ -13849,7 +14004,7 @@
               <a:buSzPts val="1067"/>
               <a:buFont typeface="Montserrat"/>
               <a:buNone/>
-              <a:defRPr b="1" sz="1067">
+              <a:defRPr b="1" i="0" sz="1067" u="none" cap="none" strike="noStrike">
                 <a:solidFill>
                   <a:srgbClr val="E0DAFF"/>
                 </a:solidFill>
@@ -13859,7 +14014,7 @@
                 <a:sym typeface="Montserrat"/>
               </a:defRPr>
             </a:lvl2pPr>
-            <a:lvl3pPr indent="-50800" lvl="2" marL="50800" algn="r">
+            <a:lvl3pPr indent="-38100" lvl="2" marL="38100" marR="0" algn="r">
               <a:lnSpc>
                 <a:spcPct val="100000"/>
               </a:lnSpc>
@@ -13875,7 +14030,7 @@
               <a:buSzPts val="1067"/>
               <a:buFont typeface="Montserrat"/>
               <a:buNone/>
-              <a:defRPr b="1" sz="1067">
+              <a:defRPr b="1" i="0" sz="1067" u="none" cap="none" strike="noStrike">
                 <a:solidFill>
                   <a:srgbClr val="E0DAFF"/>
                 </a:solidFill>
@@ -13885,7 +14040,7 @@
                 <a:sym typeface="Montserrat"/>
               </a:defRPr>
             </a:lvl3pPr>
-            <a:lvl4pPr indent="-50800" lvl="3" marL="50800" algn="r">
+            <a:lvl4pPr indent="-38100" lvl="3" marL="38100" marR="0" algn="r">
               <a:lnSpc>
                 <a:spcPct val="100000"/>
               </a:lnSpc>
@@ -13901,7 +14056,7 @@
               <a:buSzPts val="1067"/>
               <a:buFont typeface="Montserrat"/>
               <a:buNone/>
-              <a:defRPr b="1" sz="1067">
+              <a:defRPr b="1" i="0" sz="1067" u="none" cap="none" strike="noStrike">
                 <a:solidFill>
                   <a:srgbClr val="E0DAFF"/>
                 </a:solidFill>
@@ -13911,7 +14066,7 @@
                 <a:sym typeface="Montserrat"/>
               </a:defRPr>
             </a:lvl4pPr>
-            <a:lvl5pPr indent="-50800" lvl="4" marL="50800" algn="r">
+            <a:lvl5pPr indent="-38100" lvl="4" marL="38100" marR="0" algn="r">
               <a:lnSpc>
                 <a:spcPct val="100000"/>
               </a:lnSpc>
@@ -13927,7 +14082,7 @@
               <a:buSzPts val="1067"/>
               <a:buFont typeface="Montserrat"/>
               <a:buNone/>
-              <a:defRPr b="1" sz="1067">
+              <a:defRPr b="1" i="0" sz="1067" u="none" cap="none" strike="noStrike">
                 <a:solidFill>
                   <a:srgbClr val="E0DAFF"/>
                 </a:solidFill>
@@ -13937,7 +14092,7 @@
                 <a:sym typeface="Montserrat"/>
               </a:defRPr>
             </a:lvl5pPr>
-            <a:lvl6pPr indent="-50800" lvl="5" marL="50800" algn="r">
+            <a:lvl6pPr indent="-38100" lvl="5" marL="38100" marR="0" algn="r">
               <a:lnSpc>
                 <a:spcPct val="100000"/>
               </a:lnSpc>
@@ -13953,7 +14108,7 @@
               <a:buSzPts val="1067"/>
               <a:buFont typeface="Montserrat"/>
               <a:buNone/>
-              <a:defRPr b="1" sz="1067">
+              <a:defRPr b="1" i="0" sz="1067" u="none" cap="none" strike="noStrike">
                 <a:solidFill>
                   <a:srgbClr val="E0DAFF"/>
                 </a:solidFill>
@@ -13963,7 +14118,7 @@
                 <a:sym typeface="Montserrat"/>
               </a:defRPr>
             </a:lvl6pPr>
-            <a:lvl7pPr indent="-50800" lvl="6" marL="50800" algn="r">
+            <a:lvl7pPr indent="-38100" lvl="6" marL="38100" marR="0" algn="r">
               <a:lnSpc>
                 <a:spcPct val="100000"/>
               </a:lnSpc>
@@ -13979,7 +14134,7 @@
               <a:buSzPts val="1067"/>
               <a:buFont typeface="Montserrat"/>
               <a:buNone/>
-              <a:defRPr b="1" sz="1067">
+              <a:defRPr b="1" i="0" sz="1067" u="none" cap="none" strike="noStrike">
                 <a:solidFill>
                   <a:srgbClr val="E0DAFF"/>
                 </a:solidFill>
@@ -13989,7 +14144,7 @@
                 <a:sym typeface="Montserrat"/>
               </a:defRPr>
             </a:lvl7pPr>
-            <a:lvl8pPr indent="-50800" lvl="7" marL="50800" algn="r">
+            <a:lvl8pPr indent="-38100" lvl="7" marL="38100" marR="0" algn="r">
               <a:lnSpc>
                 <a:spcPct val="100000"/>
               </a:lnSpc>
@@ -14005,7 +14160,7 @@
               <a:buSzPts val="1067"/>
               <a:buFont typeface="Montserrat"/>
               <a:buNone/>
-              <a:defRPr b="1" sz="1067">
+              <a:defRPr b="1" i="0" sz="1067" u="none" cap="none" strike="noStrike">
                 <a:solidFill>
                   <a:srgbClr val="E0DAFF"/>
                 </a:solidFill>
@@ -14015,7 +14170,7 @@
                 <a:sym typeface="Montserrat"/>
               </a:defRPr>
             </a:lvl8pPr>
-            <a:lvl9pPr indent="-50800" lvl="8" marL="50800" algn="r">
+            <a:lvl9pPr indent="-38100" lvl="8" marL="38100" marR="0" algn="r">
               <a:lnSpc>
                 <a:spcPct val="100000"/>
               </a:lnSpc>
@@ -14031,7 +14186,7 @@
               <a:buSzPts val="1067"/>
               <a:buFont typeface="Montserrat"/>
               <a:buNone/>
-              <a:defRPr b="1" sz="1067">
+              <a:defRPr b="1" i="0" sz="1067" u="none" cap="none" strike="noStrike">
                 <a:solidFill>
                   <a:srgbClr val="E0DAFF"/>
                 </a:solidFill>
@@ -14043,7 +14198,7 @@
             </a:lvl9pPr>
           </a:lstStyle>
           <a:p>
-            <a:pPr indent="-50800" lvl="0" marL="50800" rtl="0" algn="r">
+            <a:pPr indent="-38100" lvl="0" marL="38100" rtl="0" algn="r">
               <a:spcBef>
                 <a:spcPts val="0"/>
               </a:spcBef>
@@ -14056,7 +14211,7 @@
               <a:rPr lang="en"/>
               <a:t>‹#›</a:t>
             </a:fld>
-            <a:endParaRPr i="0" u="none" cap="none" strike="noStrike"/>
+            <a:endParaRPr/>
           </a:p>
         </p:txBody>
       </p:sp>
@@ -14080,7 +14235,7 @@
     </p:bg>
     <p:spTree>
       <p:nvGrpSpPr>
-        <p:cNvPr id="109" name="Shape 109"/>
+        <p:cNvPr id="98" name="Shape 98"/>
         <p:cNvGrpSpPr/>
         <p:nvPr/>
       </p:nvGrpSpPr>
@@ -14094,7 +14249,7 @@
       </p:grpSpPr>
       <p:sp>
         <p:nvSpPr>
-          <p:cNvPr id="110" name="Google Shape;110;p20"/>
+          <p:cNvPr id="99" name="Google Shape;99;p18"/>
           <p:cNvSpPr txBox="1"/>
           <p:nvPr>
             <p:ph type="title"/>
@@ -14102,8 +14257,8 @@
         </p:nvSpPr>
         <p:spPr>
           <a:xfrm>
-            <a:off x="379790" y="1883053"/>
-            <a:ext cx="5225469" cy="3010725"/>
+            <a:off x="379790" y="1883006"/>
+            <a:ext cx="5225477" cy="3010650"/>
           </a:xfrm>
           <a:prstGeom prst="rect">
             <a:avLst/>
@@ -14278,14 +14433,14 @@
       </p:sp>
       <p:sp>
         <p:nvSpPr>
-          <p:cNvPr id="111" name="Google Shape;111;p20"/>
+          <p:cNvPr id="100" name="Google Shape;100;p18"/>
           <p:cNvSpPr/>
           <p:nvPr/>
         </p:nvSpPr>
         <p:spPr>
           <a:xfrm>
-            <a:off x="6108981" y="0"/>
-            <a:ext cx="6082648" cy="6857828"/>
+            <a:off x="6108991" y="0"/>
+            <a:ext cx="6082658" cy="6857656"/>
           </a:xfrm>
           <a:prstGeom prst="rect">
             <a:avLst/>
@@ -14345,7 +14500,7 @@
       </p:sp>
       <p:sp>
         <p:nvSpPr>
-          <p:cNvPr id="112" name="Google Shape;112;p20"/>
+          <p:cNvPr id="101" name="Google Shape;101;p18"/>
           <p:cNvSpPr txBox="1"/>
           <p:nvPr>
             <p:ph idx="1" type="body"/>
@@ -14353,8 +14508,8 @@
         </p:nvSpPr>
         <p:spPr>
           <a:xfrm>
-            <a:off x="369989" y="371791"/>
-            <a:ext cx="5110272" cy="183195"/>
+            <a:off x="369989" y="371781"/>
+            <a:ext cx="5110280" cy="183190"/>
           </a:xfrm>
           <a:prstGeom prst="rect">
             <a:avLst/>
@@ -14541,20 +14696,20 @@
       </p:sp>
       <p:cxnSp>
         <p:nvCxnSpPr>
-          <p:cNvPr id="113" name="Google Shape;113;p20"/>
+          <p:cNvPr id="102" name="Google Shape;102;p18"/>
           <p:cNvCxnSpPr/>
           <p:nvPr/>
         </p:nvCxnSpPr>
         <p:spPr>
           <a:xfrm rot="10800000">
-            <a:off x="6113895" y="1770224"/>
-            <a:ext cx="6082648" cy="0"/>
+            <a:off x="6113904" y="1770180"/>
+            <a:ext cx="6082658" cy="0"/>
           </a:xfrm>
           <a:prstGeom prst="straightConnector1">
             <a:avLst/>
           </a:prstGeom>
           <a:noFill/>
-          <a:ln cap="flat" cmpd="sng" w="12700">
+          <a:ln cap="flat" cmpd="sng" w="16933">
             <a:solidFill>
               <a:schemeClr val="accent5"/>
             </a:solidFill>
@@ -14567,20 +14722,20 @@
       </p:cxnSp>
       <p:cxnSp>
         <p:nvCxnSpPr>
-          <p:cNvPr id="114" name="Google Shape;114;p20"/>
+          <p:cNvPr id="103" name="Google Shape;103;p18"/>
           <p:cNvCxnSpPr/>
           <p:nvPr/>
         </p:nvCxnSpPr>
         <p:spPr>
           <a:xfrm rot="10800000">
-            <a:off x="6113895" y="2419558"/>
-            <a:ext cx="6082648" cy="0"/>
+            <a:off x="6113904" y="2419498"/>
+            <a:ext cx="6082658" cy="0"/>
           </a:xfrm>
           <a:prstGeom prst="straightConnector1">
             <a:avLst/>
           </a:prstGeom>
           <a:noFill/>
-          <a:ln cap="flat" cmpd="sng" w="12700">
+          <a:ln cap="flat" cmpd="sng" w="16933">
             <a:solidFill>
               <a:schemeClr val="accent5"/>
             </a:solidFill>
@@ -14593,20 +14748,20 @@
       </p:cxnSp>
       <p:cxnSp>
         <p:nvCxnSpPr>
-          <p:cNvPr id="115" name="Google Shape;115;p20"/>
+          <p:cNvPr id="104" name="Google Shape;104;p18"/>
           <p:cNvCxnSpPr/>
           <p:nvPr/>
         </p:nvCxnSpPr>
         <p:spPr>
           <a:xfrm rot="10800000">
-            <a:off x="6113895" y="3068962"/>
-            <a:ext cx="6082648" cy="0"/>
+            <a:off x="6113904" y="3068886"/>
+            <a:ext cx="6082658" cy="0"/>
           </a:xfrm>
           <a:prstGeom prst="straightConnector1">
             <a:avLst/>
           </a:prstGeom>
           <a:noFill/>
-          <a:ln cap="flat" cmpd="sng" w="12700">
+          <a:ln cap="flat" cmpd="sng" w="16933">
             <a:solidFill>
               <a:schemeClr val="accent5"/>
             </a:solidFill>
@@ -14619,20 +14774,20 @@
       </p:cxnSp>
       <p:cxnSp>
         <p:nvCxnSpPr>
-          <p:cNvPr id="116" name="Google Shape;116;p20"/>
+          <p:cNvPr id="105" name="Google Shape;105;p18"/>
           <p:cNvCxnSpPr/>
           <p:nvPr/>
         </p:nvCxnSpPr>
         <p:spPr>
           <a:xfrm rot="10800000">
-            <a:off x="6113895" y="3718362"/>
-            <a:ext cx="6082648" cy="0"/>
+            <a:off x="6113904" y="3718270"/>
+            <a:ext cx="6082658" cy="0"/>
           </a:xfrm>
           <a:prstGeom prst="straightConnector1">
             <a:avLst/>
           </a:prstGeom>
           <a:noFill/>
-          <a:ln cap="flat" cmpd="sng" w="12700">
+          <a:ln cap="flat" cmpd="sng" w="16933">
             <a:solidFill>
               <a:schemeClr val="accent5"/>
             </a:solidFill>
@@ -14645,20 +14800,20 @@
       </p:cxnSp>
       <p:cxnSp>
         <p:nvCxnSpPr>
-          <p:cNvPr id="117" name="Google Shape;117;p20"/>
+          <p:cNvPr id="106" name="Google Shape;106;p18"/>
           <p:cNvCxnSpPr/>
           <p:nvPr/>
         </p:nvCxnSpPr>
         <p:spPr>
           <a:xfrm rot="10800000">
-            <a:off x="6113895" y="4367767"/>
-            <a:ext cx="6082648" cy="0"/>
+            <a:off x="6113904" y="4367657"/>
+            <a:ext cx="6082658" cy="0"/>
           </a:xfrm>
           <a:prstGeom prst="straightConnector1">
             <a:avLst/>
           </a:prstGeom>
           <a:noFill/>
-          <a:ln cap="flat" cmpd="sng" w="12700">
+          <a:ln cap="flat" cmpd="sng" w="16933">
             <a:solidFill>
               <a:schemeClr val="accent5"/>
             </a:solidFill>
@@ -14671,20 +14826,20 @@
       </p:cxnSp>
       <p:cxnSp>
         <p:nvCxnSpPr>
-          <p:cNvPr id="118" name="Google Shape;118;p20"/>
+          <p:cNvPr id="107" name="Google Shape;107;p18"/>
           <p:cNvCxnSpPr/>
           <p:nvPr/>
         </p:nvCxnSpPr>
         <p:spPr>
           <a:xfrm rot="10800000">
-            <a:off x="6113895" y="5017098"/>
-            <a:ext cx="6082648" cy="0"/>
+            <a:off x="6113904" y="5016973"/>
+            <a:ext cx="6082658" cy="0"/>
           </a:xfrm>
           <a:prstGeom prst="straightConnector1">
             <a:avLst/>
           </a:prstGeom>
           <a:noFill/>
-          <a:ln cap="flat" cmpd="sng" w="12700">
+          <a:ln cap="flat" cmpd="sng" w="16933">
             <a:solidFill>
               <a:schemeClr val="accent5"/>
             </a:solidFill>
@@ -14697,20 +14852,20 @@
       </p:cxnSp>
       <p:cxnSp>
         <p:nvCxnSpPr>
-          <p:cNvPr id="119" name="Google Shape;119;p20"/>
+          <p:cNvPr id="108" name="Google Shape;108;p18"/>
           <p:cNvCxnSpPr/>
           <p:nvPr/>
         </p:nvCxnSpPr>
         <p:spPr>
           <a:xfrm rot="10800000">
-            <a:off x="6113895" y="5666504"/>
-            <a:ext cx="6082648" cy="0"/>
+            <a:off x="6113904" y="5666362"/>
+            <a:ext cx="6082658" cy="0"/>
           </a:xfrm>
           <a:prstGeom prst="straightConnector1">
             <a:avLst/>
           </a:prstGeom>
           <a:noFill/>
-          <a:ln cap="flat" cmpd="sng" w="12700">
+          <a:ln cap="flat" cmpd="sng" w="16933">
             <a:solidFill>
               <a:schemeClr val="accent5"/>
             </a:solidFill>
@@ -14723,20 +14878,20 @@
       </p:cxnSp>
       <p:cxnSp>
         <p:nvCxnSpPr>
-          <p:cNvPr id="120" name="Google Shape;120;p20"/>
+          <p:cNvPr id="109" name="Google Shape;109;p18"/>
           <p:cNvCxnSpPr/>
           <p:nvPr/>
         </p:nvCxnSpPr>
         <p:spPr>
           <a:xfrm rot="10800000">
-            <a:off x="6113895" y="6315803"/>
-            <a:ext cx="6082648" cy="0"/>
+            <a:off x="6113904" y="6315645"/>
+            <a:ext cx="6082658" cy="0"/>
           </a:xfrm>
           <a:prstGeom prst="straightConnector1">
             <a:avLst/>
           </a:prstGeom>
           <a:noFill/>
-          <a:ln cap="flat" cmpd="sng" w="12700">
+          <a:ln cap="flat" cmpd="sng" w="16933">
             <a:solidFill>
               <a:schemeClr val="accent5"/>
             </a:solidFill>
@@ -14749,20 +14904,20 @@
       </p:cxnSp>
       <p:cxnSp>
         <p:nvCxnSpPr>
-          <p:cNvPr id="121" name="Google Shape;121;p20"/>
+          <p:cNvPr id="110" name="Google Shape;110;p18"/>
           <p:cNvCxnSpPr/>
           <p:nvPr/>
         </p:nvCxnSpPr>
         <p:spPr>
           <a:xfrm rot="10800000">
-            <a:off x="6113895" y="471416"/>
-            <a:ext cx="6082648" cy="0"/>
+            <a:off x="6113904" y="471404"/>
+            <a:ext cx="6082658" cy="0"/>
           </a:xfrm>
           <a:prstGeom prst="straightConnector1">
             <a:avLst/>
           </a:prstGeom>
           <a:noFill/>
-          <a:ln cap="flat" cmpd="sng" w="12700">
+          <a:ln cap="flat" cmpd="sng" w="16933">
             <a:solidFill>
               <a:schemeClr val="accent5"/>
             </a:solidFill>
@@ -14775,20 +14930,20 @@
       </p:cxnSp>
       <p:cxnSp>
         <p:nvCxnSpPr>
-          <p:cNvPr id="122" name="Google Shape;122;p20"/>
+          <p:cNvPr id="111" name="Google Shape;111;p18"/>
           <p:cNvCxnSpPr/>
           <p:nvPr/>
         </p:nvCxnSpPr>
         <p:spPr>
           <a:xfrm rot="10800000">
-            <a:off x="6113895" y="1120820"/>
-            <a:ext cx="6082648" cy="0"/>
+            <a:off x="6113904" y="1120792"/>
+            <a:ext cx="6082658" cy="0"/>
           </a:xfrm>
           <a:prstGeom prst="straightConnector1">
             <a:avLst/>
           </a:prstGeom>
           <a:noFill/>
-          <a:ln cap="flat" cmpd="sng" w="12700">
+          <a:ln cap="flat" cmpd="sng" w="16933">
             <a:solidFill>
               <a:schemeClr val="accent5"/>
             </a:solidFill>
@@ -14801,34 +14956,34 @@
       </p:cxnSp>
       <p:grpSp>
         <p:nvGrpSpPr>
-          <p:cNvPr id="123" name="Google Shape;123;p20"/>
+          <p:cNvPr id="112" name="Google Shape;112;p18"/>
           <p:cNvGrpSpPr/>
           <p:nvPr/>
         </p:nvGrpSpPr>
         <p:grpSpPr>
           <a:xfrm>
-            <a:off x="6115352" y="-136"/>
-            <a:ext cx="5783155" cy="6857828"/>
+            <a:off x="6115362" y="-136"/>
+            <a:ext cx="5783166" cy="6857656"/>
             <a:chOff x="1" y="0"/>
-            <a:chExt cx="5783155" cy="6857828"/>
+            <a:chExt cx="7710682" cy="9143542"/>
           </a:xfrm>
         </p:grpSpPr>
         <p:cxnSp>
           <p:nvCxnSpPr>
-            <p:cNvPr id="124" name="Google Shape;124;p20"/>
+            <p:cNvPr id="113" name="Google Shape;113;p18"/>
             <p:cNvCxnSpPr/>
             <p:nvPr/>
           </p:nvCxnSpPr>
           <p:spPr>
             <a:xfrm>
               <a:off x="1" y="0"/>
-              <a:ext cx="0" cy="6857828"/>
+              <a:ext cx="0" cy="9143542"/>
             </a:xfrm>
             <a:prstGeom prst="straightConnector1">
               <a:avLst/>
             </a:prstGeom>
             <a:noFill/>
-            <a:ln cap="flat" cmpd="sng" w="12700">
+            <a:ln cap="flat" cmpd="sng" w="16933">
               <a:solidFill>
                 <a:schemeClr val="accent5"/>
               </a:solidFill>
@@ -14841,20 +14996,20 @@
         </p:cxnSp>
         <p:cxnSp>
           <p:nvCxnSpPr>
-            <p:cNvPr id="125" name="Google Shape;125;p20"/>
+            <p:cNvPr id="114" name="Google Shape;114;p18"/>
             <p:cNvCxnSpPr/>
             <p:nvPr/>
           </p:nvCxnSpPr>
           <p:spPr>
             <a:xfrm>
-              <a:off x="642537" y="0"/>
-              <a:ext cx="0" cy="6857828"/>
+              <a:off x="856695" y="0"/>
+              <a:ext cx="0" cy="9143542"/>
             </a:xfrm>
             <a:prstGeom prst="straightConnector1">
               <a:avLst/>
             </a:prstGeom>
             <a:noFill/>
-            <a:ln cap="flat" cmpd="sng" w="12700">
+            <a:ln cap="flat" cmpd="sng" w="16933">
               <a:solidFill>
                 <a:schemeClr val="accent5"/>
               </a:solidFill>
@@ -14867,20 +15022,20 @@
         </p:cxnSp>
         <p:cxnSp>
           <p:nvCxnSpPr>
-            <p:cNvPr id="126" name="Google Shape;126;p20"/>
+            <p:cNvPr id="115" name="Google Shape;115;p18"/>
             <p:cNvCxnSpPr/>
             <p:nvPr/>
           </p:nvCxnSpPr>
           <p:spPr>
             <a:xfrm>
-              <a:off x="1285075" y="0"/>
-              <a:ext cx="0" cy="6857828"/>
+              <a:off x="1713390" y="0"/>
+              <a:ext cx="0" cy="9143542"/>
             </a:xfrm>
             <a:prstGeom prst="straightConnector1">
               <a:avLst/>
             </a:prstGeom>
             <a:noFill/>
-            <a:ln cap="flat" cmpd="sng" w="12700">
+            <a:ln cap="flat" cmpd="sng" w="16933">
               <a:solidFill>
                 <a:schemeClr val="accent5"/>
               </a:solidFill>
@@ -14893,20 +15048,20 @@
         </p:cxnSp>
         <p:cxnSp>
           <p:nvCxnSpPr>
-            <p:cNvPr id="127" name="Google Shape;127;p20"/>
+            <p:cNvPr id="116" name="Google Shape;116;p18"/>
             <p:cNvCxnSpPr/>
             <p:nvPr/>
           </p:nvCxnSpPr>
           <p:spPr>
             <a:xfrm>
-              <a:off x="1927612" y="0"/>
-              <a:ext cx="0" cy="6857828"/>
+              <a:off x="2570085" y="0"/>
+              <a:ext cx="0" cy="9143542"/>
             </a:xfrm>
             <a:prstGeom prst="straightConnector1">
               <a:avLst/>
             </a:prstGeom>
             <a:noFill/>
-            <a:ln cap="flat" cmpd="sng" w="12700">
+            <a:ln cap="flat" cmpd="sng" w="16933">
               <a:solidFill>
                 <a:schemeClr val="accent5"/>
               </a:solidFill>
@@ -14919,20 +15074,20 @@
         </p:cxnSp>
         <p:cxnSp>
           <p:nvCxnSpPr>
-            <p:cNvPr id="128" name="Google Shape;128;p20"/>
+            <p:cNvPr id="117" name="Google Shape;117;p18"/>
             <p:cNvCxnSpPr/>
             <p:nvPr/>
           </p:nvCxnSpPr>
           <p:spPr>
             <a:xfrm>
-              <a:off x="2570148" y="0"/>
-              <a:ext cx="0" cy="6857828"/>
+              <a:off x="3426778" y="0"/>
+              <a:ext cx="0" cy="9143542"/>
             </a:xfrm>
             <a:prstGeom prst="straightConnector1">
               <a:avLst/>
             </a:prstGeom>
             <a:noFill/>
-            <a:ln cap="flat" cmpd="sng" w="12700">
+            <a:ln cap="flat" cmpd="sng" w="16933">
               <a:solidFill>
                 <a:schemeClr val="accent5"/>
               </a:solidFill>
@@ -14945,20 +15100,20 @@
         </p:cxnSp>
         <p:cxnSp>
           <p:nvCxnSpPr>
-            <p:cNvPr id="129" name="Google Shape;129;p20"/>
+            <p:cNvPr id="118" name="Google Shape;118;p18"/>
             <p:cNvCxnSpPr/>
             <p:nvPr/>
           </p:nvCxnSpPr>
           <p:spPr>
             <a:xfrm>
-              <a:off x="3212685" y="0"/>
-              <a:ext cx="0" cy="6857828"/>
+              <a:off x="4283473" y="0"/>
+              <a:ext cx="0" cy="9143542"/>
             </a:xfrm>
             <a:prstGeom prst="straightConnector1">
               <a:avLst/>
             </a:prstGeom>
             <a:noFill/>
-            <a:ln cap="flat" cmpd="sng" w="12700">
+            <a:ln cap="flat" cmpd="sng" w="16933">
               <a:solidFill>
                 <a:schemeClr val="accent5"/>
               </a:solidFill>
@@ -14971,20 +15126,20 @@
         </p:cxnSp>
         <p:cxnSp>
           <p:nvCxnSpPr>
-            <p:cNvPr id="130" name="Google Shape;130;p20"/>
+            <p:cNvPr id="119" name="Google Shape;119;p18"/>
             <p:cNvCxnSpPr/>
             <p:nvPr/>
           </p:nvCxnSpPr>
           <p:spPr>
             <a:xfrm>
-              <a:off x="3855329" y="0"/>
-              <a:ext cx="0" cy="6857828"/>
+              <a:off x="5140310" y="0"/>
+              <a:ext cx="0" cy="9143542"/>
             </a:xfrm>
             <a:prstGeom prst="straightConnector1">
               <a:avLst/>
             </a:prstGeom>
             <a:noFill/>
-            <a:ln cap="flat" cmpd="sng" w="12700">
+            <a:ln cap="flat" cmpd="sng" w="16933">
               <a:solidFill>
                 <a:schemeClr val="accent5"/>
               </a:solidFill>
@@ -14997,20 +15152,20 @@
         </p:cxnSp>
         <p:cxnSp>
           <p:nvCxnSpPr>
-            <p:cNvPr id="131" name="Google Shape;131;p20"/>
+            <p:cNvPr id="120" name="Google Shape;120;p18"/>
             <p:cNvCxnSpPr/>
             <p:nvPr/>
           </p:nvCxnSpPr>
           <p:spPr>
             <a:xfrm>
-              <a:off x="4497865" y="0"/>
-              <a:ext cx="0" cy="6857828"/>
+              <a:off x="5997003" y="0"/>
+              <a:ext cx="0" cy="9143542"/>
             </a:xfrm>
             <a:prstGeom prst="straightConnector1">
               <a:avLst/>
             </a:prstGeom>
             <a:noFill/>
-            <a:ln cap="flat" cmpd="sng" w="12700">
+            <a:ln cap="flat" cmpd="sng" w="16933">
               <a:solidFill>
                 <a:schemeClr val="accent5"/>
               </a:solidFill>
@@ -15023,20 +15178,20 @@
         </p:cxnSp>
         <p:cxnSp>
           <p:nvCxnSpPr>
-            <p:cNvPr id="132" name="Google Shape;132;p20"/>
+            <p:cNvPr id="121" name="Google Shape;121;p18"/>
             <p:cNvCxnSpPr/>
             <p:nvPr/>
           </p:nvCxnSpPr>
           <p:spPr>
             <a:xfrm>
-              <a:off x="5140523" y="0"/>
-              <a:ext cx="0" cy="6857828"/>
+              <a:off x="6853859" y="0"/>
+              <a:ext cx="0" cy="9143542"/>
             </a:xfrm>
             <a:prstGeom prst="straightConnector1">
               <a:avLst/>
             </a:prstGeom>
             <a:noFill/>
-            <a:ln cap="flat" cmpd="sng" w="12700">
+            <a:ln cap="flat" cmpd="sng" w="16933">
               <a:solidFill>
                 <a:schemeClr val="accent5"/>
               </a:solidFill>
@@ -15049,20 +15204,20 @@
         </p:cxnSp>
         <p:cxnSp>
           <p:nvCxnSpPr>
-            <p:cNvPr id="133" name="Google Shape;133;p20"/>
+            <p:cNvPr id="122" name="Google Shape;122;p18"/>
             <p:cNvCxnSpPr/>
             <p:nvPr/>
           </p:nvCxnSpPr>
           <p:spPr>
             <a:xfrm>
-              <a:off x="5783157" y="0"/>
-              <a:ext cx="0" cy="6857828"/>
+              <a:off x="7710683" y="0"/>
+              <a:ext cx="0" cy="9143542"/>
             </a:xfrm>
             <a:prstGeom prst="straightConnector1">
               <a:avLst/>
             </a:prstGeom>
             <a:noFill/>
-            <a:ln cap="flat" cmpd="sng" w="12700">
+            <a:ln cap="flat" cmpd="sng" w="16933">
               <a:solidFill>
                 <a:schemeClr val="accent5"/>
               </a:solidFill>
@@ -15076,7 +15231,7 @@
       </p:grpSp>
       <p:sp>
         <p:nvSpPr>
-          <p:cNvPr id="134" name="Google Shape;134;p20"/>
+          <p:cNvPr id="123" name="Google Shape;123;p18"/>
           <p:cNvSpPr txBox="1"/>
           <p:nvPr>
             <p:ph idx="12" type="sldNum"/>
@@ -15084,8 +15239,8 @@
         </p:nvSpPr>
         <p:spPr>
           <a:xfrm>
-            <a:off x="5892653" y="6169928"/>
-            <a:ext cx="2844729" cy="369191"/>
+            <a:off x="5892663" y="6169774"/>
+            <a:ext cx="2844734" cy="369181"/>
           </a:xfrm>
           <a:prstGeom prst="rect">
             <a:avLst/>
@@ -15100,7 +15255,7 @@
             <a:spAutoFit/>
           </a:bodyPr>
           <a:lstStyle>
-            <a:lvl1pPr indent="0" lvl="0" marL="0" algn="r">
+            <a:lvl1pPr indent="0" lvl="0" marL="0" marR="0" algn="r">
               <a:lnSpc>
                 <a:spcPct val="100000"/>
               </a:lnSpc>
@@ -15116,13 +15271,17 @@
               <a:buSzPts val="1600"/>
               <a:buFont typeface="Arial"/>
               <a:buNone/>
-              <a:defRPr sz="1600">
+              <a:defRPr b="0" i="0" sz="1600" u="none" cap="none" strike="noStrike">
                 <a:solidFill>
                   <a:srgbClr val="000000"/>
                 </a:solidFill>
+                <a:latin typeface="Arial"/>
+                <a:ea typeface="Arial"/>
+                <a:cs typeface="Arial"/>
+                <a:sym typeface="Arial"/>
               </a:defRPr>
             </a:lvl1pPr>
-            <a:lvl2pPr indent="0" lvl="1" marL="0" algn="r">
+            <a:lvl2pPr indent="0" lvl="1" marL="0" marR="0" algn="r">
               <a:lnSpc>
                 <a:spcPct val="100000"/>
               </a:lnSpc>
@@ -15138,13 +15297,17 @@
               <a:buSzPts val="1600"/>
               <a:buFont typeface="Arial"/>
               <a:buNone/>
-              <a:defRPr sz="1600">
+              <a:defRPr b="0" i="0" sz="1600" u="none" cap="none" strike="noStrike">
                 <a:solidFill>
                   <a:srgbClr val="000000"/>
                 </a:solidFill>
+                <a:latin typeface="Arial"/>
+                <a:ea typeface="Arial"/>
+                <a:cs typeface="Arial"/>
+                <a:sym typeface="Arial"/>
               </a:defRPr>
             </a:lvl2pPr>
-            <a:lvl3pPr indent="0" lvl="2" marL="0" algn="r">
+            <a:lvl3pPr indent="0" lvl="2" marL="0" marR="0" algn="r">
               <a:lnSpc>
                 <a:spcPct val="100000"/>
               </a:lnSpc>
@@ -15160,13 +15323,17 @@
               <a:buSzPts val="1600"/>
               <a:buFont typeface="Arial"/>
               <a:buNone/>
-              <a:defRPr sz="1600">
+              <a:defRPr b="0" i="0" sz="1600" u="none" cap="none" strike="noStrike">
                 <a:solidFill>
                   <a:srgbClr val="000000"/>
                 </a:solidFill>
+                <a:latin typeface="Arial"/>
+                <a:ea typeface="Arial"/>
+                <a:cs typeface="Arial"/>
+                <a:sym typeface="Arial"/>
               </a:defRPr>
             </a:lvl3pPr>
-            <a:lvl4pPr indent="0" lvl="3" marL="0" algn="r">
+            <a:lvl4pPr indent="0" lvl="3" marL="0" marR="0" algn="r">
               <a:lnSpc>
                 <a:spcPct val="100000"/>
               </a:lnSpc>
@@ -15182,13 +15349,17 @@
               <a:buSzPts val="1600"/>
               <a:buFont typeface="Arial"/>
               <a:buNone/>
-              <a:defRPr sz="1600">
+              <a:defRPr b="0" i="0" sz="1600" u="none" cap="none" strike="noStrike">
                 <a:solidFill>
                   <a:srgbClr val="000000"/>
                 </a:solidFill>
+                <a:latin typeface="Arial"/>
+                <a:ea typeface="Arial"/>
+                <a:cs typeface="Arial"/>
+                <a:sym typeface="Arial"/>
               </a:defRPr>
             </a:lvl4pPr>
-            <a:lvl5pPr indent="0" lvl="4" marL="0" algn="r">
+            <a:lvl5pPr indent="0" lvl="4" marL="0" marR="0" algn="r">
               <a:lnSpc>
                 <a:spcPct val="100000"/>
               </a:lnSpc>
@@ -15204,13 +15375,17 @@
               <a:buSzPts val="1600"/>
               <a:buFont typeface="Arial"/>
               <a:buNone/>
-              <a:defRPr sz="1600">
+              <a:defRPr b="0" i="0" sz="1600" u="none" cap="none" strike="noStrike">
                 <a:solidFill>
                   <a:srgbClr val="000000"/>
                 </a:solidFill>
+                <a:latin typeface="Arial"/>
+                <a:ea typeface="Arial"/>
+                <a:cs typeface="Arial"/>
+                <a:sym typeface="Arial"/>
               </a:defRPr>
             </a:lvl5pPr>
-            <a:lvl6pPr indent="0" lvl="5" marL="0" algn="r">
+            <a:lvl6pPr indent="0" lvl="5" marL="0" marR="0" algn="r">
               <a:lnSpc>
                 <a:spcPct val="100000"/>
               </a:lnSpc>
@@ -15226,13 +15401,17 @@
               <a:buSzPts val="1600"/>
               <a:buFont typeface="Arial"/>
               <a:buNone/>
-              <a:defRPr sz="1600">
+              <a:defRPr b="0" i="0" sz="1600" u="none" cap="none" strike="noStrike">
                 <a:solidFill>
                   <a:srgbClr val="000000"/>
                 </a:solidFill>
+                <a:latin typeface="Arial"/>
+                <a:ea typeface="Arial"/>
+                <a:cs typeface="Arial"/>
+                <a:sym typeface="Arial"/>
               </a:defRPr>
             </a:lvl6pPr>
-            <a:lvl7pPr indent="0" lvl="6" marL="0" algn="r">
+            <a:lvl7pPr indent="0" lvl="6" marL="0" marR="0" algn="r">
               <a:lnSpc>
                 <a:spcPct val="100000"/>
               </a:lnSpc>
@@ -15248,13 +15427,17 @@
               <a:buSzPts val="1600"/>
               <a:buFont typeface="Arial"/>
               <a:buNone/>
-              <a:defRPr sz="1600">
+              <a:defRPr b="0" i="0" sz="1600" u="none" cap="none" strike="noStrike">
                 <a:solidFill>
                   <a:srgbClr val="000000"/>
                 </a:solidFill>
+                <a:latin typeface="Arial"/>
+                <a:ea typeface="Arial"/>
+                <a:cs typeface="Arial"/>
+                <a:sym typeface="Arial"/>
               </a:defRPr>
             </a:lvl7pPr>
-            <a:lvl8pPr indent="0" lvl="7" marL="0" algn="r">
+            <a:lvl8pPr indent="0" lvl="7" marL="0" marR="0" algn="r">
               <a:lnSpc>
                 <a:spcPct val="100000"/>
               </a:lnSpc>
@@ -15270,13 +15453,17 @@
               <a:buSzPts val="1600"/>
               <a:buFont typeface="Arial"/>
               <a:buNone/>
-              <a:defRPr sz="1600">
+              <a:defRPr b="0" i="0" sz="1600" u="none" cap="none" strike="noStrike">
                 <a:solidFill>
                   <a:srgbClr val="000000"/>
                 </a:solidFill>
+                <a:latin typeface="Arial"/>
+                <a:ea typeface="Arial"/>
+                <a:cs typeface="Arial"/>
+                <a:sym typeface="Arial"/>
               </a:defRPr>
             </a:lvl8pPr>
-            <a:lvl9pPr indent="0" lvl="8" marL="0" algn="r">
+            <a:lvl9pPr indent="0" lvl="8" marL="0" marR="0" algn="r">
               <a:lnSpc>
                 <a:spcPct val="100000"/>
               </a:lnSpc>
@@ -15292,10 +15479,14 @@
               <a:buSzPts val="1600"/>
               <a:buFont typeface="Arial"/>
               <a:buNone/>
-              <a:defRPr sz="1600">
+              <a:defRPr b="0" i="0" sz="1600" u="none" cap="none" strike="noStrike">
                 <a:solidFill>
                   <a:srgbClr val="000000"/>
                 </a:solidFill>
+                <a:latin typeface="Arial"/>
+                <a:ea typeface="Arial"/>
+                <a:cs typeface="Arial"/>
+                <a:sym typeface="Arial"/>
               </a:defRPr>
             </a:lvl9pPr>
           </a:lstStyle>
@@ -15337,7 +15528,7 @@
     </p:bg>
     <p:spTree>
       <p:nvGrpSpPr>
-        <p:cNvPr id="135" name="Shape 135"/>
+        <p:cNvPr id="124" name="Shape 124"/>
         <p:cNvGrpSpPr/>
         <p:nvPr/>
       </p:nvGrpSpPr>
@@ -15351,14 +15542,14 @@
       </p:grpSpPr>
       <p:sp>
         <p:nvSpPr>
-          <p:cNvPr id="136" name="Google Shape;136;p21"/>
+          <p:cNvPr id="125" name="Google Shape;125;p19"/>
           <p:cNvSpPr/>
           <p:nvPr/>
         </p:nvSpPr>
         <p:spPr>
           <a:xfrm rot="10800000">
-            <a:off x="375891" y="368324"/>
-            <a:ext cx="11451714" cy="6131847"/>
+            <a:off x="375892" y="368315"/>
+            <a:ext cx="11451732" cy="6131693"/>
           </a:xfrm>
           <a:prstGeom prst="roundRect">
             <a:avLst>
@@ -15420,7 +15611,7 @@
       </p:sp>
       <p:sp>
         <p:nvSpPr>
-          <p:cNvPr id="137" name="Google Shape;137;p21"/>
+          <p:cNvPr id="126" name="Google Shape;126;p19"/>
           <p:cNvSpPr txBox="1"/>
           <p:nvPr>
             <p:ph idx="1" type="body"/>
@@ -15428,8 +15619,8 @@
         </p:nvSpPr>
         <p:spPr>
           <a:xfrm>
-            <a:off x="1094643" y="5230676"/>
-            <a:ext cx="7812205" cy="603585"/>
+            <a:off x="1094645" y="5230545"/>
+            <a:ext cx="7812218" cy="603570"/>
           </a:xfrm>
           <a:prstGeom prst="rect">
             <a:avLst/>
@@ -15621,20 +15812,20 @@
       </p:sp>
       <p:cxnSp>
         <p:nvCxnSpPr>
-          <p:cNvPr id="138" name="Google Shape;138;p21"/>
+          <p:cNvPr id="127" name="Google Shape;127;p19"/>
           <p:cNvCxnSpPr/>
           <p:nvPr/>
         </p:nvCxnSpPr>
         <p:spPr>
           <a:xfrm>
-            <a:off x="734482" y="1056740"/>
-            <a:ext cx="10736931" cy="0"/>
+            <a:off x="734483" y="1056714"/>
+            <a:ext cx="10736949" cy="0"/>
           </a:xfrm>
           <a:prstGeom prst="straightConnector1">
             <a:avLst/>
           </a:prstGeom>
           <a:noFill/>
-          <a:ln cap="flat" cmpd="sng" w="12700">
+          <a:ln cap="flat" cmpd="sng" w="16933">
             <a:solidFill>
               <a:schemeClr val="accent2"/>
             </a:solidFill>
@@ -15647,20 +15838,20 @@
       </p:cxnSp>
       <p:cxnSp>
         <p:nvCxnSpPr>
-          <p:cNvPr id="139" name="Google Shape;139;p21"/>
+          <p:cNvPr id="128" name="Google Shape;128;p19"/>
           <p:cNvCxnSpPr/>
           <p:nvPr/>
         </p:nvCxnSpPr>
         <p:spPr>
           <a:xfrm>
-            <a:off x="734482" y="6028883"/>
-            <a:ext cx="10726532" cy="0"/>
+            <a:off x="734483" y="6028732"/>
+            <a:ext cx="10726549" cy="0"/>
           </a:xfrm>
           <a:prstGeom prst="straightConnector1">
             <a:avLst/>
           </a:prstGeom>
           <a:noFill/>
-          <a:ln cap="flat" cmpd="sng" w="12700">
+          <a:ln cap="flat" cmpd="sng" w="16933">
             <a:solidFill>
               <a:schemeClr val="accent2"/>
             </a:solidFill>
@@ -15673,7 +15864,7 @@
       </p:cxnSp>
       <p:sp>
         <p:nvSpPr>
-          <p:cNvPr id="140" name="Google Shape;140;p21"/>
+          <p:cNvPr id="129" name="Google Shape;129;p19"/>
           <p:cNvSpPr txBox="1"/>
           <p:nvPr>
             <p:ph type="title"/>
@@ -15681,8 +15872,8 @@
         </p:nvSpPr>
         <p:spPr>
           <a:xfrm>
-            <a:off x="1060672" y="2992532"/>
-            <a:ext cx="8162196" cy="1880753"/>
+            <a:off x="1060673" y="2992457"/>
+            <a:ext cx="8162209" cy="1880706"/>
           </a:xfrm>
           <a:prstGeom prst="rect">
             <a:avLst/>
@@ -15857,7 +16048,7 @@
       </p:sp>
       <p:pic>
         <p:nvPicPr>
-          <p:cNvPr descr="Logo-white.pngGoogle Shape;16;p2" id="141" name="Google Shape;141;p21"/>
+          <p:cNvPr descr="Logo-white.pngGoogle Shape;16;p2" id="130" name="Google Shape;130;p19"/>
           <p:cNvPicPr preferRelativeResize="0"/>
           <p:nvPr/>
         </p:nvPicPr>
@@ -15870,8 +16061,8 @@
         </p:blipFill>
         <p:spPr>
           <a:xfrm>
-            <a:off x="734480" y="622178"/>
-            <a:ext cx="1482766" cy="277161"/>
+            <a:off x="734482" y="622163"/>
+            <a:ext cx="1482730" cy="277154"/>
           </a:xfrm>
           <a:prstGeom prst="rect">
             <a:avLst/>
@@ -15884,7 +16075,7 @@
       </p:pic>
       <p:sp>
         <p:nvSpPr>
-          <p:cNvPr id="142" name="Google Shape;142;p21"/>
+          <p:cNvPr id="131" name="Google Shape;131;p19"/>
           <p:cNvSpPr txBox="1"/>
           <p:nvPr>
             <p:ph idx="12" type="sldNum"/>
@@ -15892,8 +16083,8 @@
         </p:nvSpPr>
         <p:spPr>
           <a:xfrm>
-            <a:off x="5892653" y="6169928"/>
-            <a:ext cx="2844729" cy="369191"/>
+            <a:off x="5892663" y="6169774"/>
+            <a:ext cx="2844734" cy="369181"/>
           </a:xfrm>
           <a:prstGeom prst="rect">
             <a:avLst/>
@@ -15908,7 +16099,7 @@
             <a:spAutoFit/>
           </a:bodyPr>
           <a:lstStyle>
-            <a:lvl1pPr indent="0" lvl="0" marL="0" algn="r">
+            <a:lvl1pPr indent="0" lvl="0" marL="0" marR="0" algn="r">
               <a:lnSpc>
                 <a:spcPct val="100000"/>
               </a:lnSpc>
@@ -15924,13 +16115,17 @@
               <a:buSzPts val="1600"/>
               <a:buFont typeface="Arial"/>
               <a:buNone/>
-              <a:defRPr sz="1600">
+              <a:defRPr b="0" i="0" sz="1600" u="none" cap="none" strike="noStrike">
                 <a:solidFill>
                   <a:srgbClr val="000000"/>
                 </a:solidFill>
+                <a:latin typeface="Arial"/>
+                <a:ea typeface="Arial"/>
+                <a:cs typeface="Arial"/>
+                <a:sym typeface="Arial"/>
               </a:defRPr>
             </a:lvl1pPr>
-            <a:lvl2pPr indent="0" lvl="1" marL="0" algn="r">
+            <a:lvl2pPr indent="0" lvl="1" marL="0" marR="0" algn="r">
               <a:lnSpc>
                 <a:spcPct val="100000"/>
               </a:lnSpc>
@@ -15946,13 +16141,17 @@
               <a:buSzPts val="1600"/>
               <a:buFont typeface="Arial"/>
               <a:buNone/>
-              <a:defRPr sz="1600">
+              <a:defRPr b="0" i="0" sz="1600" u="none" cap="none" strike="noStrike">
                 <a:solidFill>
                   <a:srgbClr val="000000"/>
                 </a:solidFill>
+                <a:latin typeface="Arial"/>
+                <a:ea typeface="Arial"/>
+                <a:cs typeface="Arial"/>
+                <a:sym typeface="Arial"/>
               </a:defRPr>
             </a:lvl2pPr>
-            <a:lvl3pPr indent="0" lvl="2" marL="0" algn="r">
+            <a:lvl3pPr indent="0" lvl="2" marL="0" marR="0" algn="r">
               <a:lnSpc>
                 <a:spcPct val="100000"/>
               </a:lnSpc>
@@ -15968,13 +16167,17 @@
               <a:buSzPts val="1600"/>
               <a:buFont typeface="Arial"/>
               <a:buNone/>
-              <a:defRPr sz="1600">
+              <a:defRPr b="0" i="0" sz="1600" u="none" cap="none" strike="noStrike">
                 <a:solidFill>
                   <a:srgbClr val="000000"/>
                 </a:solidFill>
+                <a:latin typeface="Arial"/>
+                <a:ea typeface="Arial"/>
+                <a:cs typeface="Arial"/>
+                <a:sym typeface="Arial"/>
               </a:defRPr>
             </a:lvl3pPr>
-            <a:lvl4pPr indent="0" lvl="3" marL="0" algn="r">
+            <a:lvl4pPr indent="0" lvl="3" marL="0" marR="0" algn="r">
               <a:lnSpc>
                 <a:spcPct val="100000"/>
               </a:lnSpc>
@@ -15990,13 +16193,17 @@
               <a:buSzPts val="1600"/>
               <a:buFont typeface="Arial"/>
               <a:buNone/>
-              <a:defRPr sz="1600">
+              <a:defRPr b="0" i="0" sz="1600" u="none" cap="none" strike="noStrike">
                 <a:solidFill>
                   <a:srgbClr val="000000"/>
                 </a:solidFill>
+                <a:latin typeface="Arial"/>
+                <a:ea typeface="Arial"/>
+                <a:cs typeface="Arial"/>
+                <a:sym typeface="Arial"/>
               </a:defRPr>
             </a:lvl4pPr>
-            <a:lvl5pPr indent="0" lvl="4" marL="0" algn="r">
+            <a:lvl5pPr indent="0" lvl="4" marL="0" marR="0" algn="r">
               <a:lnSpc>
                 <a:spcPct val="100000"/>
               </a:lnSpc>
@@ -16012,13 +16219,17 @@
               <a:buSzPts val="1600"/>
               <a:buFont typeface="Arial"/>
               <a:buNone/>
-              <a:defRPr sz="1600">
+              <a:defRPr b="0" i="0" sz="1600" u="none" cap="none" strike="noStrike">
                 <a:solidFill>
                   <a:srgbClr val="000000"/>
                 </a:solidFill>
+                <a:latin typeface="Arial"/>
+                <a:ea typeface="Arial"/>
+                <a:cs typeface="Arial"/>
+                <a:sym typeface="Arial"/>
               </a:defRPr>
             </a:lvl5pPr>
-            <a:lvl6pPr indent="0" lvl="5" marL="0" algn="r">
+            <a:lvl6pPr indent="0" lvl="5" marL="0" marR="0" algn="r">
               <a:lnSpc>
                 <a:spcPct val="100000"/>
               </a:lnSpc>
@@ -16034,13 +16245,17 @@
               <a:buSzPts val="1600"/>
               <a:buFont typeface="Arial"/>
               <a:buNone/>
-              <a:defRPr sz="1600">
+              <a:defRPr b="0" i="0" sz="1600" u="none" cap="none" strike="noStrike">
                 <a:solidFill>
                   <a:srgbClr val="000000"/>
                 </a:solidFill>
+                <a:latin typeface="Arial"/>
+                <a:ea typeface="Arial"/>
+                <a:cs typeface="Arial"/>
+                <a:sym typeface="Arial"/>
               </a:defRPr>
             </a:lvl6pPr>
-            <a:lvl7pPr indent="0" lvl="6" marL="0" algn="r">
+            <a:lvl7pPr indent="0" lvl="6" marL="0" marR="0" algn="r">
               <a:lnSpc>
                 <a:spcPct val="100000"/>
               </a:lnSpc>
@@ -16056,13 +16271,17 @@
               <a:buSzPts val="1600"/>
               <a:buFont typeface="Arial"/>
               <a:buNone/>
-              <a:defRPr sz="1600">
+              <a:defRPr b="0" i="0" sz="1600" u="none" cap="none" strike="noStrike">
                 <a:solidFill>
                   <a:srgbClr val="000000"/>
                 </a:solidFill>
+                <a:latin typeface="Arial"/>
+                <a:ea typeface="Arial"/>
+                <a:cs typeface="Arial"/>
+                <a:sym typeface="Arial"/>
               </a:defRPr>
             </a:lvl7pPr>
-            <a:lvl8pPr indent="0" lvl="7" marL="0" algn="r">
+            <a:lvl8pPr indent="0" lvl="7" marL="0" marR="0" algn="r">
               <a:lnSpc>
                 <a:spcPct val="100000"/>
               </a:lnSpc>
@@ -16078,13 +16297,17 @@
               <a:buSzPts val="1600"/>
               <a:buFont typeface="Arial"/>
               <a:buNone/>
-              <a:defRPr sz="1600">
+              <a:defRPr b="0" i="0" sz="1600" u="none" cap="none" strike="noStrike">
                 <a:solidFill>
                   <a:srgbClr val="000000"/>
                 </a:solidFill>
+                <a:latin typeface="Arial"/>
+                <a:ea typeface="Arial"/>
+                <a:cs typeface="Arial"/>
+                <a:sym typeface="Arial"/>
               </a:defRPr>
             </a:lvl8pPr>
-            <a:lvl9pPr indent="0" lvl="8" marL="0" algn="r">
+            <a:lvl9pPr indent="0" lvl="8" marL="0" marR="0" algn="r">
               <a:lnSpc>
                 <a:spcPct val="100000"/>
               </a:lnSpc>
@@ -16100,10 +16323,14 @@
               <a:buSzPts val="1600"/>
               <a:buFont typeface="Arial"/>
               <a:buNone/>
-              <a:defRPr sz="1600">
+              <a:defRPr b="0" i="0" sz="1600" u="none" cap="none" strike="noStrike">
                 <a:solidFill>
                   <a:srgbClr val="000000"/>
                 </a:solidFill>
+                <a:latin typeface="Arial"/>
+                <a:ea typeface="Arial"/>
+                <a:cs typeface="Arial"/>
+                <a:sym typeface="Arial"/>
               </a:defRPr>
             </a:lvl9pPr>
           </a:lstStyle>
@@ -16138,7 +16365,7 @@
   <p:cSld name="CUSTOM_21_1_1">
     <p:spTree>
       <p:nvGrpSpPr>
-        <p:cNvPr id="143" name="Shape 143"/>
+        <p:cNvPr id="132" name="Shape 132"/>
         <p:cNvGrpSpPr/>
         <p:nvPr/>
       </p:nvGrpSpPr>
@@ -16152,7 +16379,7 @@
       </p:grpSpPr>
       <p:sp>
         <p:nvSpPr>
-          <p:cNvPr id="144" name="Google Shape;144;p22"/>
+          <p:cNvPr id="133" name="Google Shape;133;p20"/>
           <p:cNvSpPr txBox="1"/>
           <p:nvPr>
             <p:ph type="title"/>
@@ -16160,8 +16387,8 @@
         </p:nvSpPr>
         <p:spPr>
           <a:xfrm>
-            <a:off x="369989" y="554985"/>
-            <a:ext cx="11451714" cy="1179970"/>
+            <a:off x="369989" y="554971"/>
+            <a:ext cx="11451732" cy="1179941"/>
           </a:xfrm>
           <a:prstGeom prst="rect">
             <a:avLst/>
@@ -16335,7 +16562,7 @@
       </p:sp>
       <p:sp>
         <p:nvSpPr>
-          <p:cNvPr id="145" name="Google Shape;145;p22"/>
+          <p:cNvPr id="134" name="Google Shape;134;p20"/>
           <p:cNvSpPr txBox="1"/>
           <p:nvPr>
             <p:ph idx="1" type="body"/>
@@ -16343,8 +16570,8 @@
         </p:nvSpPr>
         <p:spPr>
           <a:xfrm>
-            <a:off x="369989" y="371791"/>
-            <a:ext cx="5110272" cy="183195"/>
+            <a:off x="369989" y="371781"/>
+            <a:ext cx="5110280" cy="183190"/>
           </a:xfrm>
           <a:prstGeom prst="rect">
             <a:avLst/>
@@ -16511,7 +16738,7 @@
       </p:sp>
       <p:pic>
         <p:nvPicPr>
-          <p:cNvPr descr="Logo-white.pngGoogle Shape;42;p5" id="146" name="Google Shape;146;p22"/>
+          <p:cNvPr descr="Logo-white.pngGoogle Shape;42;p5" id="135" name="Google Shape;135;p20"/>
           <p:cNvPicPr preferRelativeResize="0"/>
           <p:nvPr/>
         </p:nvPicPr>
@@ -16524,8 +16751,8 @@
         </p:blipFill>
         <p:spPr>
           <a:xfrm>
-            <a:off x="10665200" y="303528"/>
-            <a:ext cx="1156572" cy="277161"/>
+            <a:off x="10665217" y="303520"/>
+            <a:ext cx="1156574" cy="277154"/>
           </a:xfrm>
           <a:prstGeom prst="rect">
             <a:avLst/>
@@ -16538,7 +16765,7 @@
       </p:pic>
       <p:sp>
         <p:nvSpPr>
-          <p:cNvPr id="147" name="Google Shape;147;p22"/>
+          <p:cNvPr id="136" name="Google Shape;136;p20"/>
           <p:cNvSpPr txBox="1"/>
           <p:nvPr>
             <p:ph idx="12" type="sldNum"/>
@@ -16546,8 +16773,8 @@
         </p:nvSpPr>
         <p:spPr>
           <a:xfrm>
-            <a:off x="11652438" y="6343529"/>
-            <a:ext cx="169196" cy="163996"/>
+            <a:off x="11652456" y="6343371"/>
+            <a:ext cx="169196" cy="163992"/>
           </a:xfrm>
           <a:prstGeom prst="rect">
             <a:avLst/>
@@ -16562,7 +16789,7 @@
             <a:spAutoFit/>
           </a:bodyPr>
           <a:lstStyle>
-            <a:lvl1pPr indent="-50800" lvl="0" marL="50800" algn="r">
+            <a:lvl1pPr indent="-38100" lvl="0" marL="38100" marR="0" algn="r">
               <a:lnSpc>
                 <a:spcPct val="100000"/>
               </a:lnSpc>
@@ -16578,7 +16805,7 @@
               <a:buSzPts val="1067"/>
               <a:buFont typeface="Montserrat"/>
               <a:buNone/>
-              <a:defRPr b="1" sz="1067">
+              <a:defRPr b="1" i="0" sz="1067" u="none" cap="none" strike="noStrike">
                 <a:solidFill>
                   <a:srgbClr val="E0DAFF"/>
                 </a:solidFill>
@@ -16588,7 +16815,7 @@
                 <a:sym typeface="Montserrat"/>
               </a:defRPr>
             </a:lvl1pPr>
-            <a:lvl2pPr indent="-50800" lvl="1" marL="50800" algn="r">
+            <a:lvl2pPr indent="-38100" lvl="1" marL="38100" marR="0" algn="r">
               <a:lnSpc>
                 <a:spcPct val="100000"/>
               </a:lnSpc>
@@ -16604,7 +16831,7 @@
               <a:buSzPts val="1067"/>
               <a:buFont typeface="Montserrat"/>
               <a:buNone/>
-              <a:defRPr b="1" sz="1067">
+              <a:defRPr b="1" i="0" sz="1067" u="none" cap="none" strike="noStrike">
                 <a:solidFill>
                   <a:srgbClr val="E0DAFF"/>
                 </a:solidFill>
@@ -16614,7 +16841,7 @@
                 <a:sym typeface="Montserrat"/>
               </a:defRPr>
             </a:lvl2pPr>
-            <a:lvl3pPr indent="-50800" lvl="2" marL="50800" algn="r">
+            <a:lvl3pPr indent="-38100" lvl="2" marL="38100" marR="0" algn="r">
               <a:lnSpc>
                 <a:spcPct val="100000"/>
               </a:lnSpc>
@@ -16630,7 +16857,7 @@
               <a:buSzPts val="1067"/>
               <a:buFont typeface="Montserrat"/>
               <a:buNone/>
-              <a:defRPr b="1" sz="1067">
+              <a:defRPr b="1" i="0" sz="1067" u="none" cap="none" strike="noStrike">
                 <a:solidFill>
                   <a:srgbClr val="E0DAFF"/>
                 </a:solidFill>
@@ -16640,7 +16867,7 @@
                 <a:sym typeface="Montserrat"/>
               </a:defRPr>
             </a:lvl3pPr>
-            <a:lvl4pPr indent="-50800" lvl="3" marL="50800" algn="r">
+            <a:lvl4pPr indent="-38100" lvl="3" marL="38100" marR="0" algn="r">
               <a:lnSpc>
                 <a:spcPct val="100000"/>
               </a:lnSpc>
@@ -16656,7 +16883,7 @@
               <a:buSzPts val="1067"/>
               <a:buFont typeface="Montserrat"/>
               <a:buNone/>
-              <a:defRPr b="1" sz="1067">
+              <a:defRPr b="1" i="0" sz="1067" u="none" cap="none" strike="noStrike">
                 <a:solidFill>
                   <a:srgbClr val="E0DAFF"/>
                 </a:solidFill>
@@ -16666,7 +16893,7 @@
                 <a:sym typeface="Montserrat"/>
               </a:defRPr>
             </a:lvl4pPr>
-            <a:lvl5pPr indent="-50800" lvl="4" marL="50800" algn="r">
+            <a:lvl5pPr indent="-38100" lvl="4" marL="38100" marR="0" algn="r">
               <a:lnSpc>
                 <a:spcPct val="100000"/>
               </a:lnSpc>
@@ -16682,7 +16909,7 @@
               <a:buSzPts val="1067"/>
               <a:buFont typeface="Montserrat"/>
               <a:buNone/>
-              <a:defRPr b="1" sz="1067">
+              <a:defRPr b="1" i="0" sz="1067" u="none" cap="none" strike="noStrike">
                 <a:solidFill>
                   <a:srgbClr val="E0DAFF"/>
                 </a:solidFill>
@@ -16692,7 +16919,7 @@
                 <a:sym typeface="Montserrat"/>
               </a:defRPr>
             </a:lvl5pPr>
-            <a:lvl6pPr indent="-50800" lvl="5" marL="50800" algn="r">
+            <a:lvl6pPr indent="-38100" lvl="5" marL="38100" marR="0" algn="r">
               <a:lnSpc>
                 <a:spcPct val="100000"/>
               </a:lnSpc>
@@ -16708,7 +16935,7 @@
               <a:buSzPts val="1067"/>
               <a:buFont typeface="Montserrat"/>
               <a:buNone/>
-              <a:defRPr b="1" sz="1067">
+              <a:defRPr b="1" i="0" sz="1067" u="none" cap="none" strike="noStrike">
                 <a:solidFill>
                   <a:srgbClr val="E0DAFF"/>
                 </a:solidFill>
@@ -16718,7 +16945,7 @@
                 <a:sym typeface="Montserrat"/>
               </a:defRPr>
             </a:lvl6pPr>
-            <a:lvl7pPr indent="-50800" lvl="6" marL="50800" algn="r">
+            <a:lvl7pPr indent="-38100" lvl="6" marL="38100" marR="0" algn="r">
               <a:lnSpc>
                 <a:spcPct val="100000"/>
               </a:lnSpc>
@@ -16734,7 +16961,7 @@
               <a:buSzPts val="1067"/>
               <a:buFont typeface="Montserrat"/>
               <a:buNone/>
-              <a:defRPr b="1" sz="1067">
+              <a:defRPr b="1" i="0" sz="1067" u="none" cap="none" strike="noStrike">
                 <a:solidFill>
                   <a:srgbClr val="E0DAFF"/>
                 </a:solidFill>
@@ -16744,7 +16971,7 @@
                 <a:sym typeface="Montserrat"/>
               </a:defRPr>
             </a:lvl7pPr>
-            <a:lvl8pPr indent="-50800" lvl="7" marL="50800" algn="r">
+            <a:lvl8pPr indent="-38100" lvl="7" marL="38100" marR="0" algn="r">
               <a:lnSpc>
                 <a:spcPct val="100000"/>
               </a:lnSpc>
@@ -16760,7 +16987,7 @@
               <a:buSzPts val="1067"/>
               <a:buFont typeface="Montserrat"/>
               <a:buNone/>
-              <a:defRPr b="1" sz="1067">
+              <a:defRPr b="1" i="0" sz="1067" u="none" cap="none" strike="noStrike">
                 <a:solidFill>
                   <a:srgbClr val="E0DAFF"/>
                 </a:solidFill>
@@ -16770,7 +16997,7 @@
                 <a:sym typeface="Montserrat"/>
               </a:defRPr>
             </a:lvl8pPr>
-            <a:lvl9pPr indent="-50800" lvl="8" marL="50800" algn="r">
+            <a:lvl9pPr indent="-38100" lvl="8" marL="38100" marR="0" algn="r">
               <a:lnSpc>
                 <a:spcPct val="100000"/>
               </a:lnSpc>
@@ -16786,7 +17013,7 @@
               <a:buSzPts val="1067"/>
               <a:buFont typeface="Montserrat"/>
               <a:buNone/>
-              <a:defRPr b="1" sz="1067">
+              <a:defRPr b="1" i="0" sz="1067" u="none" cap="none" strike="noStrike">
                 <a:solidFill>
                   <a:srgbClr val="E0DAFF"/>
                 </a:solidFill>
@@ -16798,7 +17025,7 @@
             </a:lvl9pPr>
           </a:lstStyle>
           <a:p>
-            <a:pPr indent="-50800" lvl="0" marL="50800" rtl="0" algn="r">
+            <a:pPr indent="-38100" lvl="0" marL="38100" rtl="0" algn="r">
               <a:spcBef>
                 <a:spcPts val="0"/>
               </a:spcBef>
@@ -16811,7 +17038,7 @@
               <a:rPr lang="en"/>
               <a:t>‹#›</a:t>
             </a:fld>
-            <a:endParaRPr i="0" u="none" cap="none" strike="noStrike"/>
+            <a:endParaRPr/>
           </a:p>
         </p:txBody>
       </p:sp>
@@ -16835,7 +17062,7 @@
     </p:bg>
     <p:spTree>
       <p:nvGrpSpPr>
-        <p:cNvPr id="148" name="Shape 148"/>
+        <p:cNvPr id="137" name="Shape 137"/>
         <p:cNvGrpSpPr/>
         <p:nvPr/>
       </p:nvGrpSpPr>
@@ -16849,20 +17076,20 @@
       </p:grpSpPr>
       <p:cxnSp>
         <p:nvCxnSpPr>
-          <p:cNvPr id="149" name="Google Shape;149;p23"/>
+          <p:cNvPr id="138" name="Google Shape;138;p21"/>
           <p:cNvCxnSpPr/>
           <p:nvPr/>
         </p:nvCxnSpPr>
         <p:spPr>
           <a:xfrm rot="10800000">
-            <a:off x="-25233" y="471427"/>
-            <a:ext cx="12208495" cy="0"/>
+            <a:off x="-25233" y="471415"/>
+            <a:ext cx="12208515" cy="0"/>
           </a:xfrm>
           <a:prstGeom prst="straightConnector1">
             <a:avLst/>
           </a:prstGeom>
           <a:noFill/>
-          <a:ln cap="flat" cmpd="sng" w="12700">
+          <a:ln cap="flat" cmpd="sng" w="16933">
             <a:solidFill>
               <a:schemeClr val="accent5"/>
             </a:solidFill>
@@ -16875,20 +17102,20 @@
       </p:cxnSp>
       <p:cxnSp>
         <p:nvCxnSpPr>
-          <p:cNvPr id="150" name="Google Shape;150;p23"/>
+          <p:cNvPr id="139" name="Google Shape;139;p21"/>
           <p:cNvCxnSpPr/>
           <p:nvPr/>
         </p:nvCxnSpPr>
         <p:spPr>
           <a:xfrm rot="10800000">
-            <a:off x="-25233" y="1120829"/>
-            <a:ext cx="12208495" cy="0"/>
+            <a:off x="-25233" y="1120801"/>
+            <a:ext cx="12208515" cy="0"/>
           </a:xfrm>
           <a:prstGeom prst="straightConnector1">
             <a:avLst/>
           </a:prstGeom>
           <a:noFill/>
-          <a:ln cap="flat" cmpd="sng" w="12700">
+          <a:ln cap="flat" cmpd="sng" w="16933">
             <a:solidFill>
               <a:schemeClr val="accent5"/>
             </a:solidFill>
@@ -16901,20 +17128,20 @@
       </p:cxnSp>
       <p:cxnSp>
         <p:nvCxnSpPr>
-          <p:cNvPr id="151" name="Google Shape;151;p23"/>
+          <p:cNvPr id="140" name="Google Shape;140;p21"/>
           <p:cNvCxnSpPr/>
           <p:nvPr/>
         </p:nvCxnSpPr>
         <p:spPr>
           <a:xfrm rot="10800000">
-            <a:off x="-25233" y="1770230"/>
-            <a:ext cx="12208495" cy="0"/>
+            <a:off x="-25233" y="1770185"/>
+            <a:ext cx="12208515" cy="0"/>
           </a:xfrm>
           <a:prstGeom prst="straightConnector1">
             <a:avLst/>
           </a:prstGeom>
           <a:noFill/>
-          <a:ln cap="flat" cmpd="sng" w="12700">
+          <a:ln cap="flat" cmpd="sng" w="16933">
             <a:solidFill>
               <a:schemeClr val="accent5"/>
             </a:solidFill>
@@ -16927,20 +17154,20 @@
       </p:cxnSp>
       <p:cxnSp>
         <p:nvCxnSpPr>
-          <p:cNvPr id="152" name="Google Shape;152;p23"/>
+          <p:cNvPr id="141" name="Google Shape;141;p21"/>
           <p:cNvCxnSpPr/>
           <p:nvPr/>
         </p:nvCxnSpPr>
         <p:spPr>
           <a:xfrm rot="10800000">
-            <a:off x="-25233" y="2419562"/>
-            <a:ext cx="12208495" cy="0"/>
+            <a:off x="-25233" y="2419502"/>
+            <a:ext cx="12208515" cy="0"/>
           </a:xfrm>
           <a:prstGeom prst="straightConnector1">
             <a:avLst/>
           </a:prstGeom>
           <a:noFill/>
-          <a:ln cap="flat" cmpd="sng" w="12700">
+          <a:ln cap="flat" cmpd="sng" w="16933">
             <a:solidFill>
               <a:schemeClr val="accent5"/>
             </a:solidFill>
@@ -16953,20 +17180,20 @@
       </p:cxnSp>
       <p:cxnSp>
         <p:nvCxnSpPr>
-          <p:cNvPr id="153" name="Google Shape;153;p23"/>
+          <p:cNvPr id="142" name="Google Shape;142;p21"/>
           <p:cNvCxnSpPr/>
           <p:nvPr/>
         </p:nvCxnSpPr>
         <p:spPr>
           <a:xfrm rot="10800000">
-            <a:off x="-25233" y="3068965"/>
-            <a:ext cx="12208495" cy="0"/>
+            <a:off x="-25233" y="3068889"/>
+            <a:ext cx="12208515" cy="0"/>
           </a:xfrm>
           <a:prstGeom prst="straightConnector1">
             <a:avLst/>
           </a:prstGeom>
           <a:noFill/>
-          <a:ln cap="flat" cmpd="sng" w="12700">
+          <a:ln cap="flat" cmpd="sng" w="16933">
             <a:solidFill>
               <a:schemeClr val="accent5"/>
             </a:solidFill>
@@ -16979,34 +17206,34 @@
       </p:cxnSp>
       <p:grpSp>
         <p:nvGrpSpPr>
-          <p:cNvPr id="154" name="Google Shape;154;p23"/>
+          <p:cNvPr id="143" name="Google Shape;143;p21"/>
           <p:cNvGrpSpPr/>
           <p:nvPr/>
         </p:nvGrpSpPr>
         <p:grpSpPr>
           <a:xfrm>
             <a:off x="-4699" y="-136"/>
-            <a:ext cx="12208632" cy="6857828"/>
+            <a:ext cx="12208652" cy="6857656"/>
             <a:chOff x="1" y="0"/>
-            <a:chExt cx="12208632" cy="6857828"/>
+            <a:chExt cx="16277769" cy="9143542"/>
           </a:xfrm>
         </p:grpSpPr>
         <p:cxnSp>
           <p:nvCxnSpPr>
-            <p:cNvPr id="155" name="Google Shape;155;p23"/>
+            <p:cNvPr id="144" name="Google Shape;144;p21"/>
             <p:cNvCxnSpPr/>
             <p:nvPr/>
           </p:nvCxnSpPr>
           <p:spPr>
             <a:xfrm>
-              <a:off x="642537" y="0"/>
-              <a:ext cx="0" cy="6857828"/>
+              <a:off x="856695" y="0"/>
+              <a:ext cx="0" cy="9143542"/>
             </a:xfrm>
             <a:prstGeom prst="straightConnector1">
               <a:avLst/>
             </a:prstGeom>
             <a:noFill/>
-            <a:ln cap="flat" cmpd="sng" w="12700">
+            <a:ln cap="flat" cmpd="sng" w="16933">
               <a:solidFill>
                 <a:schemeClr val="accent5"/>
               </a:solidFill>
@@ -17019,20 +17246,20 @@
         </p:cxnSp>
         <p:cxnSp>
           <p:nvCxnSpPr>
-            <p:cNvPr id="156" name="Google Shape;156;p23"/>
+            <p:cNvPr id="145" name="Google Shape;145;p21"/>
             <p:cNvCxnSpPr/>
             <p:nvPr/>
           </p:nvCxnSpPr>
           <p:spPr>
             <a:xfrm>
-              <a:off x="1285075" y="0"/>
-              <a:ext cx="0" cy="6857828"/>
+              <a:off x="1713390" y="0"/>
+              <a:ext cx="0" cy="9143542"/>
             </a:xfrm>
             <a:prstGeom prst="straightConnector1">
               <a:avLst/>
             </a:prstGeom>
             <a:noFill/>
-            <a:ln cap="flat" cmpd="sng" w="12700">
+            <a:ln cap="flat" cmpd="sng" w="16933">
               <a:solidFill>
                 <a:schemeClr val="accent5"/>
               </a:solidFill>
@@ -17045,20 +17272,20 @@
         </p:cxnSp>
         <p:cxnSp>
           <p:nvCxnSpPr>
-            <p:cNvPr id="157" name="Google Shape;157;p23"/>
+            <p:cNvPr id="146" name="Google Shape;146;p21"/>
             <p:cNvCxnSpPr/>
             <p:nvPr/>
           </p:nvCxnSpPr>
           <p:spPr>
             <a:xfrm>
-              <a:off x="1927612" y="0"/>
-              <a:ext cx="0" cy="6857828"/>
+              <a:off x="2570085" y="0"/>
+              <a:ext cx="0" cy="9143542"/>
             </a:xfrm>
             <a:prstGeom prst="straightConnector1">
               <a:avLst/>
             </a:prstGeom>
             <a:noFill/>
-            <a:ln cap="flat" cmpd="sng" w="12700">
+            <a:ln cap="flat" cmpd="sng" w="16933">
               <a:solidFill>
                 <a:schemeClr val="accent5"/>
               </a:solidFill>
@@ -17071,20 +17298,20 @@
         </p:cxnSp>
         <p:cxnSp>
           <p:nvCxnSpPr>
-            <p:cNvPr id="158" name="Google Shape;158;p23"/>
+            <p:cNvPr id="147" name="Google Shape;147;p21"/>
             <p:cNvCxnSpPr/>
             <p:nvPr/>
           </p:nvCxnSpPr>
           <p:spPr>
             <a:xfrm>
-              <a:off x="2570148" y="0"/>
-              <a:ext cx="0" cy="6857828"/>
+              <a:off x="3426778" y="0"/>
+              <a:ext cx="0" cy="9143542"/>
             </a:xfrm>
             <a:prstGeom prst="straightConnector1">
               <a:avLst/>
             </a:prstGeom>
             <a:noFill/>
-            <a:ln cap="flat" cmpd="sng" w="12700">
+            <a:ln cap="flat" cmpd="sng" w="16933">
               <a:solidFill>
                 <a:schemeClr val="accent5"/>
               </a:solidFill>
@@ -17097,20 +17324,20 @@
         </p:cxnSp>
         <p:cxnSp>
           <p:nvCxnSpPr>
-            <p:cNvPr id="159" name="Google Shape;159;p23"/>
+            <p:cNvPr id="148" name="Google Shape;148;p21"/>
             <p:cNvCxnSpPr/>
             <p:nvPr/>
           </p:nvCxnSpPr>
           <p:spPr>
             <a:xfrm>
-              <a:off x="3212686" y="0"/>
-              <a:ext cx="0" cy="6857828"/>
+              <a:off x="4283474" y="0"/>
+              <a:ext cx="0" cy="9143542"/>
             </a:xfrm>
             <a:prstGeom prst="straightConnector1">
               <a:avLst/>
             </a:prstGeom>
             <a:noFill/>
-            <a:ln cap="flat" cmpd="sng" w="12700">
+            <a:ln cap="flat" cmpd="sng" w="16933">
               <a:solidFill>
                 <a:schemeClr val="accent5"/>
               </a:solidFill>
@@ -17123,20 +17350,20 @@
         </p:cxnSp>
         <p:cxnSp>
           <p:nvCxnSpPr>
-            <p:cNvPr id="160" name="Google Shape;160;p23"/>
+            <p:cNvPr id="149" name="Google Shape;149;p21"/>
             <p:cNvCxnSpPr/>
             <p:nvPr/>
           </p:nvCxnSpPr>
           <p:spPr>
             <a:xfrm>
-              <a:off x="3855222" y="0"/>
-              <a:ext cx="0" cy="6857828"/>
+              <a:off x="5140167" y="0"/>
+              <a:ext cx="0" cy="9143542"/>
             </a:xfrm>
             <a:prstGeom prst="straightConnector1">
               <a:avLst/>
             </a:prstGeom>
             <a:noFill/>
-            <a:ln cap="flat" cmpd="sng" w="12700">
+            <a:ln cap="flat" cmpd="sng" w="16933">
               <a:solidFill>
                 <a:schemeClr val="accent5"/>
               </a:solidFill>
@@ -17149,20 +17376,20 @@
         </p:cxnSp>
         <p:cxnSp>
           <p:nvCxnSpPr>
-            <p:cNvPr id="161" name="Google Shape;161;p23"/>
+            <p:cNvPr id="150" name="Google Shape;150;p21"/>
             <p:cNvCxnSpPr/>
             <p:nvPr/>
           </p:nvCxnSpPr>
           <p:spPr>
             <a:xfrm>
               <a:off x="1" y="0"/>
-              <a:ext cx="0" cy="6857828"/>
+              <a:ext cx="0" cy="9143542"/>
             </a:xfrm>
             <a:prstGeom prst="straightConnector1">
               <a:avLst/>
             </a:prstGeom>
             <a:noFill/>
-            <a:ln cap="flat" cmpd="sng" w="12700">
+            <a:ln cap="flat" cmpd="sng" w="16933">
               <a:solidFill>
                 <a:schemeClr val="accent5"/>
               </a:solidFill>
@@ -17175,20 +17402,20 @@
         </p:cxnSp>
         <p:cxnSp>
           <p:nvCxnSpPr>
-            <p:cNvPr id="162" name="Google Shape;162;p23"/>
+            <p:cNvPr id="151" name="Google Shape;151;p21"/>
             <p:cNvCxnSpPr/>
             <p:nvPr/>
           </p:nvCxnSpPr>
           <p:spPr>
             <a:xfrm>
-              <a:off x="4497759" y="0"/>
-              <a:ext cx="0" cy="6857828"/>
+              <a:off x="5996862" y="0"/>
+              <a:ext cx="0" cy="9143542"/>
             </a:xfrm>
             <a:prstGeom prst="straightConnector1">
               <a:avLst/>
             </a:prstGeom>
             <a:noFill/>
-            <a:ln cap="flat" cmpd="sng" w="12700">
+            <a:ln cap="flat" cmpd="sng" w="16933">
               <a:solidFill>
                 <a:schemeClr val="accent5"/>
               </a:solidFill>
@@ -17201,20 +17428,20 @@
         </p:cxnSp>
         <p:cxnSp>
           <p:nvCxnSpPr>
-            <p:cNvPr id="163" name="Google Shape;163;p23"/>
+            <p:cNvPr id="152" name="Google Shape;152;p21"/>
             <p:cNvCxnSpPr/>
             <p:nvPr/>
           </p:nvCxnSpPr>
           <p:spPr>
             <a:xfrm>
-              <a:off x="5140297" y="0"/>
-              <a:ext cx="0" cy="6857828"/>
+              <a:off x="6853558" y="0"/>
+              <a:ext cx="0" cy="9143542"/>
             </a:xfrm>
             <a:prstGeom prst="straightConnector1">
               <a:avLst/>
             </a:prstGeom>
             <a:noFill/>
-            <a:ln cap="flat" cmpd="sng" w="12700">
+            <a:ln cap="flat" cmpd="sng" w="16933">
               <a:solidFill>
                 <a:schemeClr val="accent5"/>
               </a:solidFill>
@@ -17227,20 +17454,20 @@
         </p:cxnSp>
         <p:cxnSp>
           <p:nvCxnSpPr>
-            <p:cNvPr id="164" name="Google Shape;164;p23"/>
+            <p:cNvPr id="153" name="Google Shape;153;p21"/>
             <p:cNvCxnSpPr/>
             <p:nvPr/>
           </p:nvCxnSpPr>
           <p:spPr>
             <a:xfrm>
-              <a:off x="5782833" y="0"/>
-              <a:ext cx="0" cy="6857828"/>
+              <a:off x="7710251" y="0"/>
+              <a:ext cx="0" cy="9143542"/>
             </a:xfrm>
             <a:prstGeom prst="straightConnector1">
               <a:avLst/>
             </a:prstGeom>
             <a:noFill/>
-            <a:ln cap="flat" cmpd="sng" w="12700">
+            <a:ln cap="flat" cmpd="sng" w="16933">
               <a:solidFill>
                 <a:schemeClr val="accent5"/>
               </a:solidFill>
@@ -17253,20 +17480,20 @@
         </p:cxnSp>
         <p:cxnSp>
           <p:nvCxnSpPr>
-            <p:cNvPr id="165" name="Google Shape;165;p23"/>
+            <p:cNvPr id="154" name="Google Shape;154;p21"/>
             <p:cNvCxnSpPr/>
             <p:nvPr/>
           </p:nvCxnSpPr>
           <p:spPr>
             <a:xfrm>
-              <a:off x="6425370" y="0"/>
-              <a:ext cx="0" cy="6857828"/>
+              <a:off x="8566946" y="0"/>
+              <a:ext cx="0" cy="9143542"/>
             </a:xfrm>
             <a:prstGeom prst="straightConnector1">
               <a:avLst/>
             </a:prstGeom>
             <a:noFill/>
-            <a:ln cap="flat" cmpd="sng" w="12700">
+            <a:ln cap="flat" cmpd="sng" w="16933">
               <a:solidFill>
                 <a:schemeClr val="accent5"/>
               </a:solidFill>
@@ -17279,20 +17506,20 @@
         </p:cxnSp>
         <p:cxnSp>
           <p:nvCxnSpPr>
-            <p:cNvPr id="166" name="Google Shape;166;p23"/>
+            <p:cNvPr id="155" name="Google Shape;155;p21"/>
             <p:cNvCxnSpPr/>
             <p:nvPr/>
           </p:nvCxnSpPr>
           <p:spPr>
             <a:xfrm>
-              <a:off x="7067907" y="0"/>
-              <a:ext cx="0" cy="6857828"/>
+              <a:off x="9423640" y="0"/>
+              <a:ext cx="0" cy="9143542"/>
             </a:xfrm>
             <a:prstGeom prst="straightConnector1">
               <a:avLst/>
             </a:prstGeom>
             <a:noFill/>
-            <a:ln cap="flat" cmpd="sng" w="12700">
+            <a:ln cap="flat" cmpd="sng" w="16933">
               <a:solidFill>
                 <a:schemeClr val="accent5"/>
               </a:solidFill>
@@ -17305,20 +17532,20 @@
         </p:cxnSp>
         <p:cxnSp>
           <p:nvCxnSpPr>
-            <p:cNvPr id="167" name="Google Shape;167;p23"/>
+            <p:cNvPr id="156" name="Google Shape;156;p21"/>
             <p:cNvCxnSpPr/>
             <p:nvPr/>
           </p:nvCxnSpPr>
           <p:spPr>
             <a:xfrm>
-              <a:off x="7710444" y="0"/>
-              <a:ext cx="0" cy="6857828"/>
+              <a:off x="10280335" y="0"/>
+              <a:ext cx="0" cy="9143542"/>
             </a:xfrm>
             <a:prstGeom prst="straightConnector1">
               <a:avLst/>
             </a:prstGeom>
             <a:noFill/>
-            <a:ln cap="flat" cmpd="sng" w="12700">
+            <a:ln cap="flat" cmpd="sng" w="16933">
               <a:solidFill>
                 <a:schemeClr val="accent5"/>
               </a:solidFill>
@@ -17331,20 +17558,20 @@
         </p:cxnSp>
         <p:cxnSp>
           <p:nvCxnSpPr>
-            <p:cNvPr id="168" name="Google Shape;168;p23"/>
+            <p:cNvPr id="157" name="Google Shape;157;p21"/>
             <p:cNvCxnSpPr/>
             <p:nvPr/>
           </p:nvCxnSpPr>
           <p:spPr>
             <a:xfrm>
-              <a:off x="8352980" y="0"/>
-              <a:ext cx="0" cy="6857828"/>
+              <a:off x="11137028" y="0"/>
+              <a:ext cx="0" cy="9143542"/>
             </a:xfrm>
             <a:prstGeom prst="straightConnector1">
               <a:avLst/>
             </a:prstGeom>
             <a:noFill/>
-            <a:ln cap="flat" cmpd="sng" w="12700">
+            <a:ln cap="flat" cmpd="sng" w="16933">
               <a:solidFill>
                 <a:schemeClr val="accent5"/>
               </a:solidFill>
@@ -17357,20 +17584,20 @@
         </p:cxnSp>
         <p:cxnSp>
           <p:nvCxnSpPr>
-            <p:cNvPr id="169" name="Google Shape;169;p23"/>
+            <p:cNvPr id="158" name="Google Shape;158;p21"/>
             <p:cNvCxnSpPr/>
             <p:nvPr/>
           </p:nvCxnSpPr>
           <p:spPr>
             <a:xfrm>
-              <a:off x="8995518" y="0"/>
-              <a:ext cx="0" cy="6857828"/>
+              <a:off x="11993724" y="0"/>
+              <a:ext cx="0" cy="9143542"/>
             </a:xfrm>
             <a:prstGeom prst="straightConnector1">
               <a:avLst/>
             </a:prstGeom>
             <a:noFill/>
-            <a:ln cap="flat" cmpd="sng" w="12700">
+            <a:ln cap="flat" cmpd="sng" w="16933">
               <a:solidFill>
                 <a:schemeClr val="accent5"/>
               </a:solidFill>
@@ -17383,20 +17610,20 @@
         </p:cxnSp>
         <p:cxnSp>
           <p:nvCxnSpPr>
-            <p:cNvPr id="170" name="Google Shape;170;p23"/>
+            <p:cNvPr id="159" name="Google Shape;159;p21"/>
             <p:cNvCxnSpPr/>
             <p:nvPr/>
           </p:nvCxnSpPr>
           <p:spPr>
             <a:xfrm>
-              <a:off x="9638162" y="0"/>
-              <a:ext cx="0" cy="6857828"/>
+              <a:off x="12850561" y="0"/>
+              <a:ext cx="0" cy="9143542"/>
             </a:xfrm>
             <a:prstGeom prst="straightConnector1">
               <a:avLst/>
             </a:prstGeom>
             <a:noFill/>
-            <a:ln cap="flat" cmpd="sng" w="12700">
+            <a:ln cap="flat" cmpd="sng" w="16933">
               <a:solidFill>
                 <a:schemeClr val="accent5"/>
               </a:solidFill>
@@ -17409,20 +17636,20 @@
         </p:cxnSp>
         <p:cxnSp>
           <p:nvCxnSpPr>
-            <p:cNvPr id="171" name="Google Shape;171;p23"/>
+            <p:cNvPr id="160" name="Google Shape;160;p21"/>
             <p:cNvCxnSpPr/>
             <p:nvPr/>
           </p:nvCxnSpPr>
           <p:spPr>
             <a:xfrm>
-              <a:off x="10280699" y="0"/>
-              <a:ext cx="0" cy="6857828"/>
+              <a:off x="13707256" y="0"/>
+              <a:ext cx="0" cy="9143542"/>
             </a:xfrm>
             <a:prstGeom prst="straightConnector1">
               <a:avLst/>
             </a:prstGeom>
             <a:noFill/>
-            <a:ln cap="flat" cmpd="sng" w="12700">
+            <a:ln cap="flat" cmpd="sng" w="16933">
               <a:solidFill>
                 <a:schemeClr val="accent5"/>
               </a:solidFill>
@@ -17435,20 +17662,20 @@
         </p:cxnSp>
         <p:cxnSp>
           <p:nvCxnSpPr>
-            <p:cNvPr id="172" name="Google Shape;172;p23"/>
+            <p:cNvPr id="161" name="Google Shape;161;p21"/>
             <p:cNvCxnSpPr/>
             <p:nvPr/>
           </p:nvCxnSpPr>
           <p:spPr>
             <a:xfrm>
-              <a:off x="10923356" y="0"/>
-              <a:ext cx="0" cy="6857828"/>
+              <a:off x="14564110" y="0"/>
+              <a:ext cx="0" cy="9143542"/>
             </a:xfrm>
             <a:prstGeom prst="straightConnector1">
               <a:avLst/>
             </a:prstGeom>
             <a:noFill/>
-            <a:ln cap="flat" cmpd="sng" w="12700">
+            <a:ln cap="flat" cmpd="sng" w="16933">
               <a:solidFill>
                 <a:schemeClr val="accent5"/>
               </a:solidFill>
@@ -17461,34 +17688,34 @@
         </p:cxnSp>
         <p:grpSp>
           <p:nvGrpSpPr>
-            <p:cNvPr id="173" name="Google Shape;173;p23"/>
+            <p:cNvPr id="162" name="Google Shape;162;p21"/>
             <p:cNvGrpSpPr/>
             <p:nvPr/>
           </p:nvGrpSpPr>
           <p:grpSpPr>
             <a:xfrm>
-              <a:off x="11565989" y="0"/>
-              <a:ext cx="642644" cy="6857828"/>
+              <a:off x="15420933" y="0"/>
+              <a:ext cx="856837" cy="9143542"/>
               <a:chOff x="1" y="0"/>
-              <a:chExt cx="642644" cy="6857828"/>
+              <a:chExt cx="856837" cy="9143542"/>
             </a:xfrm>
           </p:grpSpPr>
           <p:cxnSp>
             <p:nvCxnSpPr>
-              <p:cNvPr id="174" name="Google Shape;174;p23"/>
+              <p:cNvPr id="163" name="Google Shape;163;p21"/>
               <p:cNvCxnSpPr/>
               <p:nvPr/>
             </p:nvCxnSpPr>
             <p:spPr>
               <a:xfrm>
                 <a:off x="1" y="0"/>
-                <a:ext cx="0" cy="6857828"/>
+                <a:ext cx="0" cy="9143542"/>
               </a:xfrm>
               <a:prstGeom prst="straightConnector1">
                 <a:avLst/>
               </a:prstGeom>
               <a:noFill/>
-              <a:ln cap="flat" cmpd="sng" w="12700">
+              <a:ln cap="flat" cmpd="sng" w="16933">
                 <a:solidFill>
                   <a:schemeClr val="accent5"/>
                 </a:solidFill>
@@ -17501,20 +17728,20 @@
           </p:cxnSp>
           <p:cxnSp>
             <p:nvCxnSpPr>
-              <p:cNvPr id="175" name="Google Shape;175;p23"/>
+              <p:cNvPr id="164" name="Google Shape;164;p21"/>
               <p:cNvCxnSpPr/>
               <p:nvPr/>
             </p:nvCxnSpPr>
             <p:spPr>
               <a:xfrm>
-                <a:off x="642645" y="0"/>
-                <a:ext cx="0" cy="6857828"/>
+                <a:off x="856839" y="0"/>
+                <a:ext cx="0" cy="9143542"/>
               </a:xfrm>
               <a:prstGeom prst="straightConnector1">
                 <a:avLst/>
               </a:prstGeom>
               <a:noFill/>
-              <a:ln cap="flat" cmpd="sng" w="12700">
+              <a:ln cap="flat" cmpd="sng" w="16933">
                 <a:solidFill>
                   <a:schemeClr val="accent5"/>
                 </a:solidFill>
@@ -17529,20 +17756,20 @@
       </p:grpSp>
       <p:cxnSp>
         <p:nvCxnSpPr>
-          <p:cNvPr id="176" name="Google Shape;176;p23"/>
+          <p:cNvPr id="165" name="Google Shape;165;p21"/>
           <p:cNvCxnSpPr/>
           <p:nvPr/>
         </p:nvCxnSpPr>
         <p:spPr>
           <a:xfrm rot="10800000">
-            <a:off x="-25233" y="3718362"/>
-            <a:ext cx="12208495" cy="0"/>
+            <a:off x="-25233" y="3718270"/>
+            <a:ext cx="12208515" cy="0"/>
           </a:xfrm>
           <a:prstGeom prst="straightConnector1">
             <a:avLst/>
           </a:prstGeom>
           <a:noFill/>
-          <a:ln cap="flat" cmpd="sng" w="12700">
+          <a:ln cap="flat" cmpd="sng" w="16933">
             <a:solidFill>
               <a:schemeClr val="accent5"/>
             </a:solidFill>
@@ -17555,20 +17782,20 @@
       </p:cxnSp>
       <p:cxnSp>
         <p:nvCxnSpPr>
-          <p:cNvPr id="177" name="Google Shape;177;p23"/>
+          <p:cNvPr id="166" name="Google Shape;166;p21"/>
           <p:cNvCxnSpPr/>
           <p:nvPr/>
         </p:nvCxnSpPr>
         <p:spPr>
           <a:xfrm rot="10800000">
-            <a:off x="-25233" y="4367765"/>
-            <a:ext cx="12208495" cy="0"/>
+            <a:off x="-25233" y="4367656"/>
+            <a:ext cx="12208515" cy="0"/>
           </a:xfrm>
           <a:prstGeom prst="straightConnector1">
             <a:avLst/>
           </a:prstGeom>
           <a:noFill/>
-          <a:ln cap="flat" cmpd="sng" w="12700">
+          <a:ln cap="flat" cmpd="sng" w="16933">
             <a:solidFill>
               <a:schemeClr val="accent5"/>
             </a:solidFill>
@@ -17581,20 +17808,20 @@
       </p:cxnSp>
       <p:cxnSp>
         <p:nvCxnSpPr>
-          <p:cNvPr id="178" name="Google Shape;178;p23"/>
+          <p:cNvPr id="167" name="Google Shape;167;p21"/>
           <p:cNvCxnSpPr/>
           <p:nvPr/>
         </p:nvCxnSpPr>
         <p:spPr>
           <a:xfrm rot="10800000">
-            <a:off x="-25233" y="5017094"/>
-            <a:ext cx="12208495" cy="0"/>
+            <a:off x="-25233" y="5016969"/>
+            <a:ext cx="12208515" cy="0"/>
           </a:xfrm>
           <a:prstGeom prst="straightConnector1">
             <a:avLst/>
           </a:prstGeom>
           <a:noFill/>
-          <a:ln cap="flat" cmpd="sng" w="12700">
+          <a:ln cap="flat" cmpd="sng" w="16933">
             <a:solidFill>
               <a:schemeClr val="accent5"/>
             </a:solidFill>
@@ -17607,20 +17834,20 @@
       </p:cxnSp>
       <p:cxnSp>
         <p:nvCxnSpPr>
-          <p:cNvPr id="179" name="Google Shape;179;p23"/>
+          <p:cNvPr id="168" name="Google Shape;168;p21"/>
           <p:cNvCxnSpPr/>
           <p:nvPr/>
         </p:nvCxnSpPr>
         <p:spPr>
           <a:xfrm rot="10800000">
-            <a:off x="-25233" y="5666497"/>
-            <a:ext cx="12208495" cy="0"/>
+            <a:off x="-25233" y="5666356"/>
+            <a:ext cx="12208515" cy="0"/>
           </a:xfrm>
           <a:prstGeom prst="straightConnector1">
             <a:avLst/>
           </a:prstGeom>
           <a:noFill/>
-          <a:ln cap="flat" cmpd="sng" w="12700">
+          <a:ln cap="flat" cmpd="sng" w="16933">
             <a:solidFill>
               <a:schemeClr val="accent5"/>
             </a:solidFill>
@@ -17633,20 +17860,20 @@
       </p:cxnSp>
       <p:cxnSp>
         <p:nvCxnSpPr>
-          <p:cNvPr id="180" name="Google Shape;180;p23"/>
+          <p:cNvPr id="169" name="Google Shape;169;p21"/>
           <p:cNvCxnSpPr/>
           <p:nvPr/>
         </p:nvCxnSpPr>
         <p:spPr>
           <a:xfrm rot="10800000">
-            <a:off x="-25233" y="6315794"/>
-            <a:ext cx="12208495" cy="0"/>
+            <a:off x="-25233" y="6315637"/>
+            <a:ext cx="12208515" cy="0"/>
           </a:xfrm>
           <a:prstGeom prst="straightConnector1">
             <a:avLst/>
           </a:prstGeom>
           <a:noFill/>
-          <a:ln cap="flat" cmpd="sng" w="12700">
+          <a:ln cap="flat" cmpd="sng" w="16933">
             <a:solidFill>
               <a:schemeClr val="accent5"/>
             </a:solidFill>
@@ -17659,7 +17886,7 @@
       </p:cxnSp>
       <p:sp>
         <p:nvSpPr>
-          <p:cNvPr id="181" name="Google Shape;181;p23"/>
+          <p:cNvPr id="170" name="Google Shape;170;p21"/>
           <p:cNvSpPr txBox="1"/>
           <p:nvPr>
             <p:ph type="title"/>
@@ -17667,8 +17894,8 @@
         </p:nvSpPr>
         <p:spPr>
           <a:xfrm>
-            <a:off x="1916919" y="1768556"/>
-            <a:ext cx="8344991" cy="2597535"/>
+            <a:off x="1916923" y="1768512"/>
+            <a:ext cx="8345005" cy="2597470"/>
           </a:xfrm>
           <a:prstGeom prst="rect">
             <a:avLst/>
@@ -17676,7 +17903,7 @@
           <a:solidFill>
             <a:srgbClr val="493691"/>
           </a:solidFill>
-          <a:ln cap="flat" cmpd="sng" w="12700">
+          <a:ln cap="flat" cmpd="sng" w="16933">
             <a:solidFill>
               <a:schemeClr val="accent5"/>
             </a:solidFill>
@@ -17851,7 +18078,7 @@
       </p:sp>
       <p:sp>
         <p:nvSpPr>
-          <p:cNvPr id="182" name="Google Shape;182;p23"/>
+          <p:cNvPr id="171" name="Google Shape;171;p21"/>
           <p:cNvSpPr txBox="1"/>
           <p:nvPr>
             <p:ph idx="12" type="sldNum"/>
@@ -17859,8 +18086,8 @@
         </p:nvSpPr>
         <p:spPr>
           <a:xfrm>
-            <a:off x="11652438" y="6343529"/>
-            <a:ext cx="169196" cy="163996"/>
+            <a:off x="11652456" y="6343371"/>
+            <a:ext cx="169196" cy="163992"/>
           </a:xfrm>
           <a:prstGeom prst="rect">
             <a:avLst/>
@@ -17875,7 +18102,7 @@
             <a:spAutoFit/>
           </a:bodyPr>
           <a:lstStyle>
-            <a:lvl1pPr indent="-50800" lvl="0" marL="50800" algn="r">
+            <a:lvl1pPr indent="-38100" lvl="0" marL="38100" marR="0" algn="r">
               <a:lnSpc>
                 <a:spcPct val="100000"/>
               </a:lnSpc>
@@ -17891,7 +18118,7 @@
               <a:buSzPts val="1067"/>
               <a:buFont typeface="Montserrat"/>
               <a:buNone/>
-              <a:defRPr b="1" sz="1067">
+              <a:defRPr b="1" i="0" sz="1067" u="none" cap="none" strike="noStrike">
                 <a:solidFill>
                   <a:srgbClr val="E0DAFF"/>
                 </a:solidFill>
@@ -17901,7 +18128,7 @@
                 <a:sym typeface="Montserrat"/>
               </a:defRPr>
             </a:lvl1pPr>
-            <a:lvl2pPr indent="-50800" lvl="1" marL="50800" algn="r">
+            <a:lvl2pPr indent="-38100" lvl="1" marL="38100" marR="0" algn="r">
               <a:lnSpc>
                 <a:spcPct val="100000"/>
               </a:lnSpc>
@@ -17917,7 +18144,7 @@
               <a:buSzPts val="1067"/>
               <a:buFont typeface="Montserrat"/>
               <a:buNone/>
-              <a:defRPr b="1" sz="1067">
+              <a:defRPr b="1" i="0" sz="1067" u="none" cap="none" strike="noStrike">
                 <a:solidFill>
                   <a:srgbClr val="E0DAFF"/>
                 </a:solidFill>
@@ -17927,7 +18154,7 @@
                 <a:sym typeface="Montserrat"/>
               </a:defRPr>
             </a:lvl2pPr>
-            <a:lvl3pPr indent="-50800" lvl="2" marL="50800" algn="r">
+            <a:lvl3pPr indent="-38100" lvl="2" marL="38100" marR="0" algn="r">
               <a:lnSpc>
                 <a:spcPct val="100000"/>
               </a:lnSpc>
@@ -17943,7 +18170,7 @@
               <a:buSzPts val="1067"/>
               <a:buFont typeface="Montserrat"/>
               <a:buNone/>
-              <a:defRPr b="1" sz="1067">
+              <a:defRPr b="1" i="0" sz="1067" u="none" cap="none" strike="noStrike">
                 <a:solidFill>
                   <a:srgbClr val="E0DAFF"/>
                 </a:solidFill>
@@ -17953,7 +18180,7 @@
                 <a:sym typeface="Montserrat"/>
               </a:defRPr>
             </a:lvl3pPr>
-            <a:lvl4pPr indent="-50800" lvl="3" marL="50800" algn="r">
+            <a:lvl4pPr indent="-38100" lvl="3" marL="38100" marR="0" algn="r">
               <a:lnSpc>
                 <a:spcPct val="100000"/>
               </a:lnSpc>
@@ -17969,7 +18196,7 @@
               <a:buSzPts val="1067"/>
               <a:buFont typeface="Montserrat"/>
               <a:buNone/>
-              <a:defRPr b="1" sz="1067">
+              <a:defRPr b="1" i="0" sz="1067" u="none" cap="none" strike="noStrike">
                 <a:solidFill>
                   <a:srgbClr val="E0DAFF"/>
                 </a:solidFill>
@@ -17979,7 +18206,7 @@
                 <a:sym typeface="Montserrat"/>
               </a:defRPr>
             </a:lvl4pPr>
-            <a:lvl5pPr indent="-50800" lvl="4" marL="50800" algn="r">
+            <a:lvl5pPr indent="-38100" lvl="4" marL="38100" marR="0" algn="r">
               <a:lnSpc>
                 <a:spcPct val="100000"/>
               </a:lnSpc>
@@ -17995,7 +18222,7 @@
               <a:buSzPts val="1067"/>
               <a:buFont typeface="Montserrat"/>
               <a:buNone/>
-              <a:defRPr b="1" sz="1067">
+              <a:defRPr b="1" i="0" sz="1067" u="none" cap="none" strike="noStrike">
                 <a:solidFill>
                   <a:srgbClr val="E0DAFF"/>
                 </a:solidFill>
@@ -18005,7 +18232,7 @@
                 <a:sym typeface="Montserrat"/>
               </a:defRPr>
             </a:lvl5pPr>
-            <a:lvl6pPr indent="-50800" lvl="5" marL="50800" algn="r">
+            <a:lvl6pPr indent="-38100" lvl="5" marL="38100" marR="0" algn="r">
               <a:lnSpc>
                 <a:spcPct val="100000"/>
               </a:lnSpc>
@@ -18021,7 +18248,7 @@
               <a:buSzPts val="1067"/>
               <a:buFont typeface="Montserrat"/>
               <a:buNone/>
-              <a:defRPr b="1" sz="1067">
+              <a:defRPr b="1" i="0" sz="1067" u="none" cap="none" strike="noStrike">
                 <a:solidFill>
                   <a:srgbClr val="E0DAFF"/>
                 </a:solidFill>
@@ -18031,7 +18258,7 @@
                 <a:sym typeface="Montserrat"/>
               </a:defRPr>
             </a:lvl6pPr>
-            <a:lvl7pPr indent="-50800" lvl="6" marL="50800" algn="r">
+            <a:lvl7pPr indent="-38100" lvl="6" marL="38100" marR="0" algn="r">
               <a:lnSpc>
                 <a:spcPct val="100000"/>
               </a:lnSpc>
@@ -18047,7 +18274,7 @@
               <a:buSzPts val="1067"/>
               <a:buFont typeface="Montserrat"/>
               <a:buNone/>
-              <a:defRPr b="1" sz="1067">
+              <a:defRPr b="1" i="0" sz="1067" u="none" cap="none" strike="noStrike">
                 <a:solidFill>
                   <a:srgbClr val="E0DAFF"/>
                 </a:solidFill>
@@ -18057,7 +18284,7 @@
                 <a:sym typeface="Montserrat"/>
               </a:defRPr>
             </a:lvl7pPr>
-            <a:lvl8pPr indent="-50800" lvl="7" marL="50800" algn="r">
+            <a:lvl8pPr indent="-38100" lvl="7" marL="38100" marR="0" algn="r">
               <a:lnSpc>
                 <a:spcPct val="100000"/>
               </a:lnSpc>
@@ -18073,7 +18300,7 @@
               <a:buSzPts val="1067"/>
               <a:buFont typeface="Montserrat"/>
               <a:buNone/>
-              <a:defRPr b="1" sz="1067">
+              <a:defRPr b="1" i="0" sz="1067" u="none" cap="none" strike="noStrike">
                 <a:solidFill>
                   <a:srgbClr val="E0DAFF"/>
                 </a:solidFill>
@@ -18083,7 +18310,7 @@
                 <a:sym typeface="Montserrat"/>
               </a:defRPr>
             </a:lvl8pPr>
-            <a:lvl9pPr indent="-50800" lvl="8" marL="50800" algn="r">
+            <a:lvl9pPr indent="-38100" lvl="8" marL="38100" marR="0" algn="r">
               <a:lnSpc>
                 <a:spcPct val="100000"/>
               </a:lnSpc>
@@ -18099,7 +18326,7 @@
               <a:buSzPts val="1067"/>
               <a:buFont typeface="Montserrat"/>
               <a:buNone/>
-              <a:defRPr b="1" sz="1067">
+              <a:defRPr b="1" i="0" sz="1067" u="none" cap="none" strike="noStrike">
                 <a:solidFill>
                   <a:srgbClr val="E0DAFF"/>
                 </a:solidFill>
@@ -18111,7 +18338,7 @@
             </a:lvl9pPr>
           </a:lstStyle>
           <a:p>
-            <a:pPr indent="-50800" lvl="0" marL="50800" rtl="0" algn="r">
+            <a:pPr indent="-38100" lvl="0" marL="38100" rtl="0" algn="r">
               <a:spcBef>
                 <a:spcPts val="0"/>
               </a:spcBef>
@@ -18124,7 +18351,7 @@
               <a:rPr lang="en"/>
               <a:t>‹#›</a:t>
             </a:fld>
-            <a:endParaRPr i="0" u="none" cap="none" strike="noStrike"/>
+            <a:endParaRPr/>
           </a:p>
         </p:txBody>
       </p:sp>
@@ -18387,7 +18614,7 @@
   <p:cSld name="BLANK_1_1_1_1_1_1_1_1_1_1_1">
     <p:spTree>
       <p:nvGrpSpPr>
-        <p:cNvPr id="183" name="Shape 183"/>
+        <p:cNvPr id="172" name="Shape 172"/>
         <p:cNvGrpSpPr/>
         <p:nvPr/>
       </p:nvGrpSpPr>
@@ -18401,7 +18628,7 @@
       </p:grpSpPr>
       <p:sp>
         <p:nvSpPr>
-          <p:cNvPr id="184" name="Google Shape;184;p24"/>
+          <p:cNvPr id="173" name="Google Shape;173;p22"/>
           <p:cNvSpPr txBox="1"/>
           <p:nvPr>
             <p:ph idx="1" type="body"/>
@@ -18409,8 +18636,8 @@
         </p:nvSpPr>
         <p:spPr>
           <a:xfrm>
-            <a:off x="6052947" y="2307264"/>
-            <a:ext cx="5767456" cy="603585"/>
+            <a:off x="6052957" y="2307206"/>
+            <a:ext cx="5767465" cy="603570"/>
           </a:xfrm>
           <a:prstGeom prst="rect">
             <a:avLst/>
@@ -18597,7 +18824,7 @@
       </p:sp>
       <p:sp>
         <p:nvSpPr>
-          <p:cNvPr id="185" name="Google Shape;185;p24"/>
+          <p:cNvPr id="174" name="Google Shape;174;p22"/>
           <p:cNvSpPr txBox="1"/>
           <p:nvPr>
             <p:ph type="title"/>
@@ -18605,8 +18832,8 @@
         </p:nvSpPr>
         <p:spPr>
           <a:xfrm>
-            <a:off x="369989" y="1412865"/>
-            <a:ext cx="5725857" cy="3737906"/>
+            <a:off x="369989" y="1412830"/>
+            <a:ext cx="5725866" cy="3737813"/>
           </a:xfrm>
           <a:prstGeom prst="rect">
             <a:avLst/>
@@ -18781,7 +19008,7 @@
       </p:sp>
       <p:pic>
         <p:nvPicPr>
-          <p:cNvPr descr="Logo-white.pngGoogle Shape;115;p9" id="186" name="Google Shape;186;p24"/>
+          <p:cNvPr descr="Logo-white.pngGoogle Shape;115;p9" id="175" name="Google Shape;175;p22"/>
           <p:cNvPicPr preferRelativeResize="0"/>
           <p:nvPr/>
         </p:nvPicPr>
@@ -18794,8 +19021,8 @@
         </p:blipFill>
         <p:spPr>
           <a:xfrm>
-            <a:off x="10665200" y="303528"/>
-            <a:ext cx="1156572" cy="277161"/>
+            <a:off x="10665217" y="303520"/>
+            <a:ext cx="1156574" cy="277154"/>
           </a:xfrm>
           <a:prstGeom prst="rect">
             <a:avLst/>
@@ -18808,7 +19035,7 @@
       </p:pic>
       <p:sp>
         <p:nvSpPr>
-          <p:cNvPr id="187" name="Google Shape;187;p24"/>
+          <p:cNvPr id="176" name="Google Shape;176;p22"/>
           <p:cNvSpPr txBox="1"/>
           <p:nvPr>
             <p:ph idx="12" type="sldNum"/>
@@ -18816,8 +19043,8 @@
         </p:nvSpPr>
         <p:spPr>
           <a:xfrm>
-            <a:off x="11652438" y="6343529"/>
-            <a:ext cx="169196" cy="163996"/>
+            <a:off x="11652456" y="6343371"/>
+            <a:ext cx="169196" cy="163992"/>
           </a:xfrm>
           <a:prstGeom prst="rect">
             <a:avLst/>
@@ -18832,7 +19059,7 @@
             <a:spAutoFit/>
           </a:bodyPr>
           <a:lstStyle>
-            <a:lvl1pPr indent="-50800" lvl="0" marL="50800" algn="r">
+            <a:lvl1pPr indent="-38100" lvl="0" marL="38100" marR="0" algn="r">
               <a:lnSpc>
                 <a:spcPct val="100000"/>
               </a:lnSpc>
@@ -18848,7 +19075,7 @@
               <a:buSzPts val="1067"/>
               <a:buFont typeface="Montserrat"/>
               <a:buNone/>
-              <a:defRPr b="1" sz="1067">
+              <a:defRPr b="1" i="0" sz="1067" u="none" cap="none" strike="noStrike">
                 <a:solidFill>
                   <a:srgbClr val="E0DAFF"/>
                 </a:solidFill>
@@ -18858,7 +19085,7 @@
                 <a:sym typeface="Montserrat"/>
               </a:defRPr>
             </a:lvl1pPr>
-            <a:lvl2pPr indent="-50800" lvl="1" marL="50800" algn="r">
+            <a:lvl2pPr indent="-38100" lvl="1" marL="38100" marR="0" algn="r">
               <a:lnSpc>
                 <a:spcPct val="100000"/>
               </a:lnSpc>
@@ -18874,7 +19101,7 @@
               <a:buSzPts val="1067"/>
               <a:buFont typeface="Montserrat"/>
               <a:buNone/>
-              <a:defRPr b="1" sz="1067">
+              <a:defRPr b="1" i="0" sz="1067" u="none" cap="none" strike="noStrike">
                 <a:solidFill>
                   <a:srgbClr val="E0DAFF"/>
                 </a:solidFill>
@@ -18884,7 +19111,7 @@
                 <a:sym typeface="Montserrat"/>
               </a:defRPr>
             </a:lvl2pPr>
-            <a:lvl3pPr indent="-50800" lvl="2" marL="50800" algn="r">
+            <a:lvl3pPr indent="-38100" lvl="2" marL="38100" marR="0" algn="r">
               <a:lnSpc>
                 <a:spcPct val="100000"/>
               </a:lnSpc>
@@ -18900,7 +19127,7 @@
               <a:buSzPts val="1067"/>
               <a:buFont typeface="Montserrat"/>
               <a:buNone/>
-              <a:defRPr b="1" sz="1067">
+              <a:defRPr b="1" i="0" sz="1067" u="none" cap="none" strike="noStrike">
                 <a:solidFill>
                   <a:srgbClr val="E0DAFF"/>
                 </a:solidFill>
@@ -18910,7 +19137,7 @@
                 <a:sym typeface="Montserrat"/>
               </a:defRPr>
             </a:lvl3pPr>
-            <a:lvl4pPr indent="-50800" lvl="3" marL="50800" algn="r">
+            <a:lvl4pPr indent="-38100" lvl="3" marL="38100" marR="0" algn="r">
               <a:lnSpc>
                 <a:spcPct val="100000"/>
               </a:lnSpc>
@@ -18926,7 +19153,7 @@
               <a:buSzPts val="1067"/>
               <a:buFont typeface="Montserrat"/>
               <a:buNone/>
-              <a:defRPr b="1" sz="1067">
+              <a:defRPr b="1" i="0" sz="1067" u="none" cap="none" strike="noStrike">
                 <a:solidFill>
                   <a:srgbClr val="E0DAFF"/>
                 </a:solidFill>
@@ -18936,7 +19163,7 @@
                 <a:sym typeface="Montserrat"/>
               </a:defRPr>
             </a:lvl4pPr>
-            <a:lvl5pPr indent="-50800" lvl="4" marL="50800" algn="r">
+            <a:lvl5pPr indent="-38100" lvl="4" marL="38100" marR="0" algn="r">
               <a:lnSpc>
                 <a:spcPct val="100000"/>
               </a:lnSpc>
@@ -18952,7 +19179,7 @@
               <a:buSzPts val="1067"/>
               <a:buFont typeface="Montserrat"/>
               <a:buNone/>
-              <a:defRPr b="1" sz="1067">
+              <a:defRPr b="1" i="0" sz="1067" u="none" cap="none" strike="noStrike">
                 <a:solidFill>
                   <a:srgbClr val="E0DAFF"/>
                 </a:solidFill>
@@ -18962,7 +19189,7 @@
                 <a:sym typeface="Montserrat"/>
               </a:defRPr>
             </a:lvl5pPr>
-            <a:lvl6pPr indent="-50800" lvl="5" marL="50800" algn="r">
+            <a:lvl6pPr indent="-38100" lvl="5" marL="38100" marR="0" algn="r">
               <a:lnSpc>
                 <a:spcPct val="100000"/>
               </a:lnSpc>
@@ -18978,7 +19205,7 @@
               <a:buSzPts val="1067"/>
               <a:buFont typeface="Montserrat"/>
               <a:buNone/>
-              <a:defRPr b="1" sz="1067">
+              <a:defRPr b="1" i="0" sz="1067" u="none" cap="none" strike="noStrike">
                 <a:solidFill>
                   <a:srgbClr val="E0DAFF"/>
                 </a:solidFill>
@@ -18988,7 +19215,7 @@
                 <a:sym typeface="Montserrat"/>
               </a:defRPr>
             </a:lvl6pPr>
-            <a:lvl7pPr indent="-50800" lvl="6" marL="50800" algn="r">
+            <a:lvl7pPr indent="-38100" lvl="6" marL="38100" marR="0" algn="r">
               <a:lnSpc>
                 <a:spcPct val="100000"/>
               </a:lnSpc>
@@ -19004,7 +19231,7 @@
               <a:buSzPts val="1067"/>
               <a:buFont typeface="Montserrat"/>
               <a:buNone/>
-              <a:defRPr b="1" sz="1067">
+              <a:defRPr b="1" i="0" sz="1067" u="none" cap="none" strike="noStrike">
                 <a:solidFill>
                   <a:srgbClr val="E0DAFF"/>
                 </a:solidFill>
@@ -19014,7 +19241,7 @@
                 <a:sym typeface="Montserrat"/>
               </a:defRPr>
             </a:lvl7pPr>
-            <a:lvl8pPr indent="-50800" lvl="7" marL="50800" algn="r">
+            <a:lvl8pPr indent="-38100" lvl="7" marL="38100" marR="0" algn="r">
               <a:lnSpc>
                 <a:spcPct val="100000"/>
               </a:lnSpc>
@@ -19030,7 +19257,7 @@
               <a:buSzPts val="1067"/>
               <a:buFont typeface="Montserrat"/>
               <a:buNone/>
-              <a:defRPr b="1" sz="1067">
+              <a:defRPr b="1" i="0" sz="1067" u="none" cap="none" strike="noStrike">
                 <a:solidFill>
                   <a:srgbClr val="E0DAFF"/>
                 </a:solidFill>
@@ -19040,7 +19267,7 @@
                 <a:sym typeface="Montserrat"/>
               </a:defRPr>
             </a:lvl8pPr>
-            <a:lvl9pPr indent="-50800" lvl="8" marL="50800" algn="r">
+            <a:lvl9pPr indent="-38100" lvl="8" marL="38100" marR="0" algn="r">
               <a:lnSpc>
                 <a:spcPct val="100000"/>
               </a:lnSpc>
@@ -19056,7 +19283,7 @@
               <a:buSzPts val="1067"/>
               <a:buFont typeface="Montserrat"/>
               <a:buNone/>
-              <a:defRPr b="1" sz="1067">
+              <a:defRPr b="1" i="0" sz="1067" u="none" cap="none" strike="noStrike">
                 <a:solidFill>
                   <a:srgbClr val="E0DAFF"/>
                 </a:solidFill>
@@ -19068,7 +19295,7 @@
             </a:lvl9pPr>
           </a:lstStyle>
           <a:p>
-            <a:pPr indent="-50800" lvl="0" marL="50800" rtl="0" algn="r">
+            <a:pPr indent="-38100" lvl="0" marL="38100" rtl="0" algn="r">
               <a:spcBef>
                 <a:spcPts val="0"/>
               </a:spcBef>
@@ -19081,7 +19308,7 @@
               <a:rPr lang="en"/>
               <a:t>‹#›</a:t>
             </a:fld>
-            <a:endParaRPr i="0" u="none" cap="none" strike="noStrike"/>
+            <a:endParaRPr/>
           </a:p>
         </p:txBody>
       </p:sp>
@@ -21068,7 +21295,7 @@
     </p:bg>
     <p:spTree>
       <p:nvGrpSpPr>
-        <p:cNvPr id="61" name="Shape 61"/>
+        <p:cNvPr id="50" name="Shape 50"/>
         <p:cNvGrpSpPr/>
         <p:nvPr/>
       </p:nvGrpSpPr>
@@ -21082,7 +21309,7 @@
       </p:grpSpPr>
       <p:sp>
         <p:nvSpPr>
-          <p:cNvPr id="62" name="Google Shape;62;p15"/>
+          <p:cNvPr id="51" name="Google Shape;51;p13"/>
           <p:cNvSpPr txBox="1"/>
           <p:nvPr>
             <p:ph type="title"/>
@@ -21090,8 +21317,8 @@
         </p:nvSpPr>
         <p:spPr>
           <a:xfrm>
-            <a:off x="726948" y="369989"/>
-            <a:ext cx="10737731" cy="795980"/>
+            <a:off x="726950" y="369980"/>
+            <a:ext cx="10737749" cy="795960"/>
           </a:xfrm>
           <a:prstGeom prst="rect">
             <a:avLst/>
@@ -21106,7 +21333,7 @@
             <a:normAutofit/>
           </a:bodyPr>
           <a:lstStyle>
-            <a:lvl1pPr lvl="0" marR="0" algn="ctr">
+            <a:lvl1pPr lvl="0" marR="0" rtl="0" algn="ctr">
               <a:lnSpc>
                 <a:spcPct val="90000"/>
               </a:lnSpc>
@@ -21132,7 +21359,7 @@
                 <a:sym typeface="Montserrat SemiBold"/>
               </a:defRPr>
             </a:lvl1pPr>
-            <a:lvl2pPr lvl="1" marR="0" algn="ctr">
+            <a:lvl2pPr lvl="1" marR="0" rtl="0" algn="ctr">
               <a:lnSpc>
                 <a:spcPct val="90000"/>
               </a:lnSpc>
@@ -21158,7 +21385,7 @@
                 <a:sym typeface="Montserrat SemiBold"/>
               </a:defRPr>
             </a:lvl2pPr>
-            <a:lvl3pPr lvl="2" marR="0" algn="ctr">
+            <a:lvl3pPr lvl="2" marR="0" rtl="0" algn="ctr">
               <a:lnSpc>
                 <a:spcPct val="90000"/>
               </a:lnSpc>
@@ -21184,7 +21411,7 @@
                 <a:sym typeface="Montserrat SemiBold"/>
               </a:defRPr>
             </a:lvl3pPr>
-            <a:lvl4pPr lvl="3" marR="0" algn="ctr">
+            <a:lvl4pPr lvl="3" marR="0" rtl="0" algn="ctr">
               <a:lnSpc>
                 <a:spcPct val="90000"/>
               </a:lnSpc>
@@ -21210,7 +21437,7 @@
                 <a:sym typeface="Montserrat SemiBold"/>
               </a:defRPr>
             </a:lvl4pPr>
-            <a:lvl5pPr lvl="4" marR="0" algn="ctr">
+            <a:lvl5pPr lvl="4" marR="0" rtl="0" algn="ctr">
               <a:lnSpc>
                 <a:spcPct val="90000"/>
               </a:lnSpc>
@@ -21236,7 +21463,7 @@
                 <a:sym typeface="Montserrat SemiBold"/>
               </a:defRPr>
             </a:lvl5pPr>
-            <a:lvl6pPr lvl="5" marR="0" algn="ctr">
+            <a:lvl6pPr lvl="5" marR="0" rtl="0" algn="ctr">
               <a:lnSpc>
                 <a:spcPct val="90000"/>
               </a:lnSpc>
@@ -21262,7 +21489,7 @@
                 <a:sym typeface="Montserrat SemiBold"/>
               </a:defRPr>
             </a:lvl6pPr>
-            <a:lvl7pPr lvl="6" marR="0" algn="ctr">
+            <a:lvl7pPr lvl="6" marR="0" rtl="0" algn="ctr">
               <a:lnSpc>
                 <a:spcPct val="90000"/>
               </a:lnSpc>
@@ -21288,7 +21515,7 @@
                 <a:sym typeface="Montserrat SemiBold"/>
               </a:defRPr>
             </a:lvl7pPr>
-            <a:lvl8pPr lvl="7" marR="0" algn="ctr">
+            <a:lvl8pPr lvl="7" marR="0" rtl="0" algn="ctr">
               <a:lnSpc>
                 <a:spcPct val="90000"/>
               </a:lnSpc>
@@ -21314,7 +21541,7 @@
                 <a:sym typeface="Montserrat SemiBold"/>
               </a:defRPr>
             </a:lvl8pPr>
-            <a:lvl9pPr lvl="8" marR="0" algn="ctr">
+            <a:lvl9pPr lvl="8" marR="0" rtl="0" algn="ctr">
               <a:lnSpc>
                 <a:spcPct val="90000"/>
               </a:lnSpc>
@@ -21346,7 +21573,7 @@
       </p:sp>
       <p:sp>
         <p:nvSpPr>
-          <p:cNvPr id="63" name="Google Shape;63;p15"/>
+          <p:cNvPr id="52" name="Google Shape;52;p13"/>
           <p:cNvSpPr txBox="1"/>
           <p:nvPr>
             <p:ph idx="1" type="body"/>
@@ -21354,8 +21581,8 @@
         </p:nvSpPr>
         <p:spPr>
           <a:xfrm>
-            <a:off x="609585" y="1600160"/>
-            <a:ext cx="10972526" cy="5257468"/>
+            <a:off x="609586" y="1600120"/>
+            <a:ext cx="10972544" cy="5257336"/>
           </a:xfrm>
           <a:prstGeom prst="rect">
             <a:avLst/>
@@ -21370,7 +21597,7 @@
             <a:noAutofit/>
           </a:bodyPr>
           <a:lstStyle>
-            <a:lvl1pPr indent="-298450" lvl="0" marL="457200" marR="0" algn="l">
+            <a:lvl1pPr indent="-298450" lvl="0" marL="457200" marR="0" rtl="0" algn="l">
               <a:lnSpc>
                 <a:spcPct val="100000"/>
               </a:lnSpc>
@@ -21396,7 +21623,7 @@
                 <a:sym typeface="Montserrat"/>
               </a:defRPr>
             </a:lvl1pPr>
-            <a:lvl2pPr indent="-298450" lvl="1" marL="914400" marR="0" algn="l">
+            <a:lvl2pPr indent="-298450" lvl="1" marL="914400" marR="0" rtl="0" algn="l">
               <a:lnSpc>
                 <a:spcPct val="100000"/>
               </a:lnSpc>
@@ -21422,7 +21649,7 @@
                 <a:sym typeface="Montserrat"/>
               </a:defRPr>
             </a:lvl2pPr>
-            <a:lvl3pPr indent="-298450" lvl="2" marL="1371600" marR="0" algn="l">
+            <a:lvl3pPr indent="-298450" lvl="2" marL="1371600" marR="0" rtl="0" algn="l">
               <a:lnSpc>
                 <a:spcPct val="100000"/>
               </a:lnSpc>
@@ -21448,7 +21675,7 @@
                 <a:sym typeface="Montserrat"/>
               </a:defRPr>
             </a:lvl3pPr>
-            <a:lvl4pPr indent="-298450" lvl="3" marL="1828800" marR="0" algn="l">
+            <a:lvl4pPr indent="-298450" lvl="3" marL="1828800" marR="0" rtl="0" algn="l">
               <a:lnSpc>
                 <a:spcPct val="100000"/>
               </a:lnSpc>
@@ -21474,7 +21701,7 @@
                 <a:sym typeface="Montserrat"/>
               </a:defRPr>
             </a:lvl4pPr>
-            <a:lvl5pPr indent="-298450" lvl="4" marL="2286000" marR="0" algn="l">
+            <a:lvl5pPr indent="-298450" lvl="4" marL="2286000" marR="0" rtl="0" algn="l">
               <a:lnSpc>
                 <a:spcPct val="100000"/>
               </a:lnSpc>
@@ -21500,7 +21727,7 @@
                 <a:sym typeface="Montserrat"/>
               </a:defRPr>
             </a:lvl5pPr>
-            <a:lvl6pPr indent="-298450" lvl="5" marL="2743200" marR="0" algn="l">
+            <a:lvl6pPr indent="-298450" lvl="5" marL="2743200" marR="0" rtl="0" algn="l">
               <a:lnSpc>
                 <a:spcPct val="100000"/>
               </a:lnSpc>
@@ -21526,7 +21753,7 @@
                 <a:sym typeface="Montserrat"/>
               </a:defRPr>
             </a:lvl6pPr>
-            <a:lvl7pPr indent="-298450" lvl="6" marL="3200400" marR="0" algn="l">
+            <a:lvl7pPr indent="-298450" lvl="6" marL="3200400" marR="0" rtl="0" algn="l">
               <a:lnSpc>
                 <a:spcPct val="100000"/>
               </a:lnSpc>
@@ -21552,7 +21779,7 @@
                 <a:sym typeface="Montserrat"/>
               </a:defRPr>
             </a:lvl7pPr>
-            <a:lvl8pPr indent="-298450" lvl="7" marL="3657600" marR="0" algn="l">
+            <a:lvl8pPr indent="-298450" lvl="7" marL="3657600" marR="0" rtl="0" algn="l">
               <a:lnSpc>
                 <a:spcPct val="100000"/>
               </a:lnSpc>
@@ -21578,7 +21805,7 @@
                 <a:sym typeface="Montserrat"/>
               </a:defRPr>
             </a:lvl8pPr>
-            <a:lvl9pPr indent="-298450" lvl="8" marL="4114800" marR="0" algn="l">
+            <a:lvl9pPr indent="-298450" lvl="8" marL="4114800" marR="0" rtl="0" algn="l">
               <a:lnSpc>
                 <a:spcPct val="100000"/>
               </a:lnSpc>
@@ -21610,7 +21837,7 @@
       </p:sp>
       <p:sp>
         <p:nvSpPr>
-          <p:cNvPr id="64" name="Google Shape;64;p15"/>
+          <p:cNvPr id="53" name="Google Shape;53;p13"/>
           <p:cNvSpPr txBox="1"/>
           <p:nvPr>
             <p:ph idx="12" type="sldNum"/>
@@ -21618,8 +21845,8 @@
         </p:nvSpPr>
         <p:spPr>
           <a:xfrm>
-            <a:off x="5892653" y="6169928"/>
-            <a:ext cx="2844729" cy="369191"/>
+            <a:off x="5892663" y="6169774"/>
+            <a:ext cx="2844734" cy="369181"/>
           </a:xfrm>
           <a:prstGeom prst="rect">
             <a:avLst/>
@@ -21634,7 +21861,7 @@
             <a:spAutoFit/>
           </a:bodyPr>
           <a:lstStyle>
-            <a:lvl1pPr indent="0" lvl="0" marL="0" marR="0" algn="r">
+            <a:lvl1pPr indent="0" lvl="0" marL="0" marR="0" rtl="0" algn="r">
               <a:lnSpc>
                 <a:spcPct val="100000"/>
               </a:lnSpc>
@@ -21660,7 +21887,7 @@
                 <a:sym typeface="Arial"/>
               </a:defRPr>
             </a:lvl1pPr>
-            <a:lvl2pPr indent="0" lvl="1" marL="0" marR="0" algn="r">
+            <a:lvl2pPr indent="0" lvl="1" marL="0" marR="0" rtl="0" algn="r">
               <a:lnSpc>
                 <a:spcPct val="100000"/>
               </a:lnSpc>
@@ -21686,7 +21913,7 @@
                 <a:sym typeface="Arial"/>
               </a:defRPr>
             </a:lvl2pPr>
-            <a:lvl3pPr indent="0" lvl="2" marL="0" marR="0" algn="r">
+            <a:lvl3pPr indent="0" lvl="2" marL="0" marR="0" rtl="0" algn="r">
               <a:lnSpc>
                 <a:spcPct val="100000"/>
               </a:lnSpc>
@@ -21712,7 +21939,7 @@
                 <a:sym typeface="Arial"/>
               </a:defRPr>
             </a:lvl3pPr>
-            <a:lvl4pPr indent="0" lvl="3" marL="0" marR="0" algn="r">
+            <a:lvl4pPr indent="0" lvl="3" marL="0" marR="0" rtl="0" algn="r">
               <a:lnSpc>
                 <a:spcPct val="100000"/>
               </a:lnSpc>
@@ -21738,7 +21965,7 @@
                 <a:sym typeface="Arial"/>
               </a:defRPr>
             </a:lvl4pPr>
-            <a:lvl5pPr indent="0" lvl="4" marL="0" marR="0" algn="r">
+            <a:lvl5pPr indent="0" lvl="4" marL="0" marR="0" rtl="0" algn="r">
               <a:lnSpc>
                 <a:spcPct val="100000"/>
               </a:lnSpc>
@@ -21764,7 +21991,7 @@
                 <a:sym typeface="Arial"/>
               </a:defRPr>
             </a:lvl5pPr>
-            <a:lvl6pPr indent="0" lvl="5" marL="0" marR="0" algn="r">
+            <a:lvl6pPr indent="0" lvl="5" marL="0" marR="0" rtl="0" algn="r">
               <a:lnSpc>
                 <a:spcPct val="100000"/>
               </a:lnSpc>
@@ -21790,7 +22017,7 @@
                 <a:sym typeface="Arial"/>
               </a:defRPr>
             </a:lvl6pPr>
-            <a:lvl7pPr indent="0" lvl="6" marL="0" marR="0" algn="r">
+            <a:lvl7pPr indent="0" lvl="6" marL="0" marR="0" rtl="0" algn="r">
               <a:lnSpc>
                 <a:spcPct val="100000"/>
               </a:lnSpc>
@@ -21816,7 +22043,7 @@
                 <a:sym typeface="Arial"/>
               </a:defRPr>
             </a:lvl7pPr>
-            <a:lvl8pPr indent="0" lvl="7" marL="0" marR="0" algn="r">
+            <a:lvl8pPr indent="0" lvl="7" marL="0" marR="0" rtl="0" algn="r">
               <a:lnSpc>
                 <a:spcPct val="100000"/>
               </a:lnSpc>
@@ -21842,7 +22069,7 @@
                 <a:sym typeface="Arial"/>
               </a:defRPr>
             </a:lvl8pPr>
-            <a:lvl9pPr indent="0" lvl="8" marL="0" marR="0" algn="r">
+            <a:lvl9pPr indent="0" lvl="8" marL="0" marR="0" rtl="0" algn="r">
               <a:lnSpc>
                 <a:spcPct val="100000"/>
               </a:lnSpc>
@@ -21891,25 +22118,25 @@
   </p:cSld>
   <p:clrMap accent1="accent1" accent2="accent2" accent3="accent3" accent4="accent4" accent5="accent5" accent6="accent6" bg1="lt1" bg2="dk2" tx1="dk1" tx2="lt2" folHlink="folHlink" hlink="hlink"/>
   <p:sldLayoutIdLst>
-    <p:sldLayoutId id="2147483661" r:id="rId1"/>
-    <p:sldLayoutId id="2147483662" r:id="rId2"/>
-    <p:sldLayoutId id="2147483663" r:id="rId3"/>
-    <p:sldLayoutId id="2147483664" r:id="rId4"/>
-    <p:sldLayoutId id="2147483665" r:id="rId5"/>
-    <p:sldLayoutId id="2147483666" r:id="rId6"/>
-    <p:sldLayoutId id="2147483667" r:id="rId7"/>
-    <p:sldLayoutId id="2147483668" r:id="rId8"/>
-    <p:sldLayoutId id="2147483669" r:id="rId9"/>
-    <p:sldLayoutId id="2147483670" r:id="rId10"/>
-    <p:sldLayoutId id="2147483671" r:id="rId11"/>
-    <p:sldLayoutId id="2147483672" r:id="rId12"/>
-    <p:sldLayoutId id="2147483673" r:id="rId13"/>
-    <p:sldLayoutId id="2147483674" r:id="rId14"/>
-    <p:sldLayoutId id="2147483675" r:id="rId15"/>
-    <p:sldLayoutId id="2147483676" r:id="rId16"/>
-    <p:sldLayoutId id="2147483677" r:id="rId17"/>
-    <p:sldLayoutId id="2147483678" r:id="rId18"/>
-    <p:sldLayoutId id="2147483679" r:id="rId19"/>
+    <p:sldLayoutId id="2147483659" r:id="rId1"/>
+    <p:sldLayoutId id="2147483660" r:id="rId2"/>
+    <p:sldLayoutId id="2147483661" r:id="rId3"/>
+    <p:sldLayoutId id="2147483662" r:id="rId4"/>
+    <p:sldLayoutId id="2147483663" r:id="rId5"/>
+    <p:sldLayoutId id="2147483664" r:id="rId6"/>
+    <p:sldLayoutId id="2147483665" r:id="rId7"/>
+    <p:sldLayoutId id="2147483666" r:id="rId8"/>
+    <p:sldLayoutId id="2147483667" r:id="rId9"/>
+    <p:sldLayoutId id="2147483668" r:id="rId10"/>
+    <p:sldLayoutId id="2147483669" r:id="rId11"/>
+    <p:sldLayoutId id="2147483670" r:id="rId12"/>
+    <p:sldLayoutId id="2147483671" r:id="rId13"/>
+    <p:sldLayoutId id="2147483672" r:id="rId14"/>
+    <p:sldLayoutId id="2147483673" r:id="rId15"/>
+    <p:sldLayoutId id="2147483674" r:id="rId16"/>
+    <p:sldLayoutId id="2147483675" r:id="rId17"/>
+    <p:sldLayoutId id="2147483676" r:id="rId18"/>
+    <p:sldLayoutId id="2147483677" r:id="rId19"/>
   </p:sldLayoutIdLst>
   <p:hf dt="0" ftr="0" hdr="0" sldNum="0"/>
   <p:txStyles>
@@ -21939,7 +22166,7 @@
           <a:srgbClr val="000000"/>
         </a:buClr>
         <a:buFont typeface="Arial"/>
-        <a:defRPr b="0" i="0" sz="1867" u="none" cap="none" strike="noStrike">
+        <a:defRPr b="0" i="0" spc="0" sz="1867" u="none" cap="none" strike="noStrike">
           <a:solidFill>
             <a:srgbClr val="000000"/>
           </a:solidFill>
@@ -21963,7 +22190,7 @@
           <a:srgbClr val="000000"/>
         </a:buClr>
         <a:buFont typeface="Arial"/>
-        <a:defRPr b="0" i="0" sz="1867" u="none" cap="none" strike="noStrike">
+        <a:defRPr b="0" i="0" spc="0" sz="1867" u="none" cap="none" strike="noStrike">
           <a:solidFill>
             <a:srgbClr val="000000"/>
           </a:solidFill>
@@ -21987,7 +22214,7 @@
           <a:srgbClr val="000000"/>
         </a:buClr>
         <a:buFont typeface="Arial"/>
-        <a:defRPr b="0" i="0" sz="1867" u="none" cap="none" strike="noStrike">
+        <a:defRPr b="0" i="0" spc="0" sz="1867" u="none" cap="none" strike="noStrike">
           <a:solidFill>
             <a:srgbClr val="000000"/>
           </a:solidFill>
@@ -22011,7 +22238,7 @@
           <a:srgbClr val="000000"/>
         </a:buClr>
         <a:buFont typeface="Arial"/>
-        <a:defRPr b="0" i="0" sz="1867" u="none" cap="none" strike="noStrike">
+        <a:defRPr b="0" i="0" spc="0" sz="1867" u="none" cap="none" strike="noStrike">
           <a:solidFill>
             <a:srgbClr val="000000"/>
           </a:solidFill>
@@ -22035,7 +22262,7 @@
           <a:srgbClr val="000000"/>
         </a:buClr>
         <a:buFont typeface="Arial"/>
-        <a:defRPr b="0" i="0" sz="1867" u="none" cap="none" strike="noStrike">
+        <a:defRPr b="0" i="0" spc="0" sz="1867" u="none" cap="none" strike="noStrike">
           <a:solidFill>
             <a:srgbClr val="000000"/>
           </a:solidFill>
@@ -22059,7 +22286,7 @@
           <a:srgbClr val="000000"/>
         </a:buClr>
         <a:buFont typeface="Arial"/>
-        <a:defRPr b="0" i="0" sz="1867" u="none" cap="none" strike="noStrike">
+        <a:defRPr b="0" i="0" spc="0" sz="1867" u="none" cap="none" strike="noStrike">
           <a:solidFill>
             <a:srgbClr val="000000"/>
           </a:solidFill>
@@ -22083,7 +22310,7 @@
           <a:srgbClr val="000000"/>
         </a:buClr>
         <a:buFont typeface="Arial"/>
-        <a:defRPr b="0" i="0" sz="1867" u="none" cap="none" strike="noStrike">
+        <a:defRPr b="0" i="0" spc="0" sz="1867" u="none" cap="none" strike="noStrike">
           <a:solidFill>
             <a:srgbClr val="000000"/>
           </a:solidFill>
@@ -22107,7 +22334,7 @@
           <a:srgbClr val="000000"/>
         </a:buClr>
         <a:buFont typeface="Arial"/>
-        <a:defRPr b="0" i="0" sz="1867" u="none" cap="none" strike="noStrike">
+        <a:defRPr b="0" i="0" spc="0" sz="1867" u="none" cap="none" strike="noStrike">
           <a:solidFill>
             <a:srgbClr val="000000"/>
           </a:solidFill>
@@ -22131,7 +22358,7 @@
           <a:srgbClr val="000000"/>
         </a:buClr>
         <a:buFont typeface="Arial"/>
-        <a:defRPr b="0" i="0" sz="1867" u="none" cap="none" strike="noStrike">
+        <a:defRPr b="0" i="0" spc="0" sz="1867" u="none" cap="none" strike="noStrike">
           <a:solidFill>
             <a:srgbClr val="000000"/>
           </a:solidFill>
@@ -22168,7 +22395,7 @@
           <a:srgbClr val="000000"/>
         </a:buClr>
         <a:buFont typeface="Arial"/>
-        <a:defRPr b="0" i="0" sz="1867" u="none" cap="none" strike="noStrike">
+        <a:defRPr b="0" i="0" spc="0" sz="1867" u="none" cap="none" strike="noStrike">
           <a:solidFill>
             <a:srgbClr val="000000"/>
           </a:solidFill>
@@ -22192,7 +22419,7 @@
           <a:srgbClr val="000000"/>
         </a:buClr>
         <a:buFont typeface="Arial"/>
-        <a:defRPr b="0" i="0" sz="1867" u="none" cap="none" strike="noStrike">
+        <a:defRPr b="0" i="0" spc="0" sz="1867" u="none" cap="none" strike="noStrike">
           <a:solidFill>
             <a:srgbClr val="000000"/>
           </a:solidFill>
@@ -22216,7 +22443,7 @@
           <a:srgbClr val="000000"/>
         </a:buClr>
         <a:buFont typeface="Arial"/>
-        <a:defRPr b="0" i="0" sz="1867" u="none" cap="none" strike="noStrike">
+        <a:defRPr b="0" i="0" spc="0" sz="1867" u="none" cap="none" strike="noStrike">
           <a:solidFill>
             <a:srgbClr val="000000"/>
           </a:solidFill>
@@ -22240,7 +22467,7 @@
           <a:srgbClr val="000000"/>
         </a:buClr>
         <a:buFont typeface="Arial"/>
-        <a:defRPr b="0" i="0" sz="1867" u="none" cap="none" strike="noStrike">
+        <a:defRPr b="0" i="0" spc="0" sz="1867" u="none" cap="none" strike="noStrike">
           <a:solidFill>
             <a:srgbClr val="000000"/>
           </a:solidFill>
@@ -22264,7 +22491,7 @@
           <a:srgbClr val="000000"/>
         </a:buClr>
         <a:buFont typeface="Arial"/>
-        <a:defRPr b="0" i="0" sz="1867" u="none" cap="none" strike="noStrike">
+        <a:defRPr b="0" i="0" spc="0" sz="1867" u="none" cap="none" strike="noStrike">
           <a:solidFill>
             <a:srgbClr val="000000"/>
           </a:solidFill>
@@ -22288,7 +22515,7 @@
           <a:srgbClr val="000000"/>
         </a:buClr>
         <a:buFont typeface="Arial"/>
-        <a:defRPr b="0" i="0" sz="1867" u="none" cap="none" strike="noStrike">
+        <a:defRPr b="0" i="0" spc="0" sz="1867" u="none" cap="none" strike="noStrike">
           <a:solidFill>
             <a:srgbClr val="000000"/>
           </a:solidFill>
@@ -22312,7 +22539,7 @@
           <a:srgbClr val="000000"/>
         </a:buClr>
         <a:buFont typeface="Arial"/>
-        <a:defRPr b="0" i="0" sz="1867" u="none" cap="none" strike="noStrike">
+        <a:defRPr b="0" i="0" spc="0" sz="1867" u="none" cap="none" strike="noStrike">
           <a:solidFill>
             <a:srgbClr val="000000"/>
           </a:solidFill>
@@ -22336,7 +22563,7 @@
           <a:srgbClr val="000000"/>
         </a:buClr>
         <a:buFont typeface="Arial"/>
-        <a:defRPr b="0" i="0" sz="1867" u="none" cap="none" strike="noStrike">
+        <a:defRPr b="0" i="0" spc="0" sz="1867" u="none" cap="none" strike="noStrike">
           <a:solidFill>
             <a:srgbClr val="000000"/>
           </a:solidFill>
@@ -22360,7 +22587,7 @@
           <a:srgbClr val="000000"/>
         </a:buClr>
         <a:buFont typeface="Arial"/>
-        <a:defRPr b="0" i="0" sz="1867" u="none" cap="none" strike="noStrike">
+        <a:defRPr b="0" i="0" spc="0" sz="1867" u="none" cap="none" strike="noStrike">
           <a:solidFill>
             <a:srgbClr val="000000"/>
           </a:solidFill>
@@ -22397,7 +22624,7 @@
           <a:srgbClr val="000000"/>
         </a:buClr>
         <a:buFont typeface="Arial"/>
-        <a:defRPr b="0" i="0" sz="1867" u="none" cap="none" strike="noStrike">
+        <a:defRPr b="0" i="0" spc="0" sz="1867" u="none" cap="none" strike="noStrike">
           <a:solidFill>
             <a:srgbClr val="000000"/>
           </a:solidFill>
@@ -22421,7 +22648,7 @@
           <a:srgbClr val="000000"/>
         </a:buClr>
         <a:buFont typeface="Arial"/>
-        <a:defRPr b="0" i="0" sz="1867" u="none" cap="none" strike="noStrike">
+        <a:defRPr b="0" i="0" spc="0" sz="1867" u="none" cap="none" strike="noStrike">
           <a:solidFill>
             <a:srgbClr val="000000"/>
           </a:solidFill>
@@ -22445,7 +22672,7 @@
           <a:srgbClr val="000000"/>
         </a:buClr>
         <a:buFont typeface="Arial"/>
-        <a:defRPr b="0" i="0" sz="1867" u="none" cap="none" strike="noStrike">
+        <a:defRPr b="0" i="0" spc="0" sz="1867" u="none" cap="none" strike="noStrike">
           <a:solidFill>
             <a:srgbClr val="000000"/>
           </a:solidFill>
@@ -22469,7 +22696,7 @@
           <a:srgbClr val="000000"/>
         </a:buClr>
         <a:buFont typeface="Arial"/>
-        <a:defRPr b="0" i="0" sz="1867" u="none" cap="none" strike="noStrike">
+        <a:defRPr b="0" i="0" spc="0" sz="1867" u="none" cap="none" strike="noStrike">
           <a:solidFill>
             <a:srgbClr val="000000"/>
           </a:solidFill>
@@ -22493,7 +22720,7 @@
           <a:srgbClr val="000000"/>
         </a:buClr>
         <a:buFont typeface="Arial"/>
-        <a:defRPr b="0" i="0" sz="1867" u="none" cap="none" strike="noStrike">
+        <a:defRPr b="0" i="0" spc="0" sz="1867" u="none" cap="none" strike="noStrike">
           <a:solidFill>
             <a:srgbClr val="000000"/>
           </a:solidFill>
@@ -22517,7 +22744,7 @@
           <a:srgbClr val="000000"/>
         </a:buClr>
         <a:buFont typeface="Arial"/>
-        <a:defRPr b="0" i="0" sz="1867" u="none" cap="none" strike="noStrike">
+        <a:defRPr b="0" i="0" spc="0" sz="1867" u="none" cap="none" strike="noStrike">
           <a:solidFill>
             <a:srgbClr val="000000"/>
           </a:solidFill>
@@ -22541,7 +22768,7 @@
           <a:srgbClr val="000000"/>
         </a:buClr>
         <a:buFont typeface="Arial"/>
-        <a:defRPr b="0" i="0" sz="1867" u="none" cap="none" strike="noStrike">
+        <a:defRPr b="0" i="0" spc="0" sz="1867" u="none" cap="none" strike="noStrike">
           <a:solidFill>
             <a:srgbClr val="000000"/>
           </a:solidFill>
@@ -22565,7 +22792,7 @@
           <a:srgbClr val="000000"/>
         </a:buClr>
         <a:buFont typeface="Arial"/>
-        <a:defRPr b="0" i="0" sz="1867" u="none" cap="none" strike="noStrike">
+        <a:defRPr b="0" i="0" spc="0" sz="1867" u="none" cap="none" strike="noStrike">
           <a:solidFill>
             <a:srgbClr val="000000"/>
           </a:solidFill>
@@ -22589,7 +22816,7 @@
           <a:srgbClr val="000000"/>
         </a:buClr>
         <a:buFont typeface="Arial"/>
-        <a:defRPr b="0" i="0" sz="1867" u="none" cap="none" strike="noStrike">
+        <a:defRPr b="0" i="0" spc="0" sz="1867" u="none" cap="none" strike="noStrike">
           <a:solidFill>
             <a:srgbClr val="000000"/>
           </a:solidFill>
@@ -22609,7 +22836,7 @@
   <p:cSld>
     <p:spTree>
       <p:nvGrpSpPr>
-        <p:cNvPr id="269" name="Shape 269"/>
+        <p:cNvPr id="258" name="Shape 258"/>
         <p:cNvGrpSpPr/>
         <p:nvPr/>
       </p:nvGrpSpPr>
@@ -22621,74 +22848,14 @@
           <a:chExt cx="0" cy="0"/>
         </a:xfrm>
       </p:grpSpPr>
-      <p:sp>
-        <p:nvSpPr>
-          <p:cNvPr id="270" name="Google Shape;270;p35"/>
-          <p:cNvSpPr txBox="1"/>
-          <p:nvPr>
-            <p:ph type="title"/>
-          </p:nvPr>
-        </p:nvSpPr>
-        <p:spPr>
-          <a:xfrm>
-            <a:off x="379790" y="1039539"/>
-            <a:ext cx="5225469" cy="923977"/>
-          </a:xfrm>
-          <a:prstGeom prst="rect">
-            <a:avLst/>
-          </a:prstGeom>
-          <a:noFill/>
-          <a:ln>
-            <a:noFill/>
-          </a:ln>
-        </p:spPr>
-        <p:txBody>
-          <a:bodyPr anchorCtr="0" anchor="ctr" bIns="0" lIns="0" spcFirstLastPara="1" rIns="0" wrap="square" tIns="0">
-            <a:normAutofit/>
-          </a:bodyPr>
-          <a:lstStyle/>
-          <a:p>
-            <a:pPr indent="0" lvl="0" marL="0" rtl="0" algn="l">
-              <a:lnSpc>
-                <a:spcPct val="90000"/>
-              </a:lnSpc>
-              <a:spcBef>
-                <a:spcPts val="0"/>
-              </a:spcBef>
-              <a:spcAft>
-                <a:spcPts val="0"/>
-              </a:spcAft>
-              <a:buClr>
-                <a:srgbClr val="FAF9FE"/>
-              </a:buClr>
-              <a:buSzPts val="5333"/>
-              <a:buFont typeface="Montserrat SemiBold"/>
-              <a:buNone/>
-            </a:pPr>
-            <a:r>
-              <a:rPr b="1" i="0" lang="en" sz="5333" u="none" cap="none" strike="noStrike">
-                <a:solidFill>
-                  <a:srgbClr val="FAF9FE"/>
-                </a:solidFill>
-                <a:latin typeface="Montserrat SemiBold"/>
-                <a:ea typeface="Montserrat SemiBold"/>
-                <a:cs typeface="Montserrat SemiBold"/>
-                <a:sym typeface="Montserrat SemiBold"/>
-              </a:rPr>
-              <a:t>OV20i</a:t>
-            </a:r>
-            <a:endParaRPr/>
-          </a:p>
-        </p:txBody>
-      </p:sp>
       <p:pic>
         <p:nvPicPr>
-          <p:cNvPr descr="Logo-white.pngGoogle Shape;16;p2" id="271" name="Google Shape;271;p35"/>
+          <p:cNvPr descr="Logo-white.pngGoogle Shape;16;p2" id="259" name="Google Shape;259;p33"/>
           <p:cNvPicPr preferRelativeResize="0"/>
           <p:nvPr/>
         </p:nvPicPr>
         <p:blipFill rotWithShape="1">
-          <a:blip r:embed="rId5">
+          <a:blip r:embed="rId3">
             <a:alphaModFix/>
           </a:blip>
           <a:srcRect b="0" l="0" r="0" t="0"/>
@@ -22696,8 +22863,8 @@
         </p:blipFill>
         <p:spPr>
           <a:xfrm>
-            <a:off x="379790" y="622178"/>
-            <a:ext cx="1482764" cy="277161"/>
+            <a:off x="379790" y="622163"/>
+            <a:ext cx="1482727" cy="277154"/>
           </a:xfrm>
           <a:prstGeom prst="rect">
             <a:avLst/>
@@ -22710,7 +22877,7 @@
       </p:pic>
       <p:pic>
         <p:nvPicPr>
-          <p:cNvPr id="272" name="Google Shape;272;p35"/>
+          <p:cNvPr id="260" name="Google Shape;260;p33"/>
           <p:cNvPicPr preferRelativeResize="0"/>
           <p:nvPr/>
         </p:nvPicPr>
@@ -22723,8 +22890,8 @@
         </p:blipFill>
         <p:spPr>
           <a:xfrm>
-            <a:off x="6738707" y="899339"/>
-            <a:ext cx="4848703" cy="4848703"/>
+            <a:off x="6738718" y="899316"/>
+            <a:ext cx="4848581" cy="4848581"/>
           </a:xfrm>
           <a:prstGeom prst="rect">
             <a:avLst/>
@@ -22737,13 +22904,65 @@
       </p:pic>
       <p:sp>
         <p:nvSpPr>
-          <p:cNvPr id="273" name="Google Shape;273;p35"/>
+          <p:cNvPr id="261" name="Google Shape;261;p33"/>
+          <p:cNvSpPr txBox="1"/>
+          <p:nvPr>
+            <p:ph type="title"/>
+          </p:nvPr>
+        </p:nvSpPr>
+        <p:spPr>
+          <a:xfrm>
+            <a:off x="379790" y="1039501"/>
+            <a:ext cx="5225469" cy="2035549"/>
+          </a:xfrm>
+          <a:prstGeom prst="rect">
+            <a:avLst/>
+          </a:prstGeom>
+          <a:noFill/>
+          <a:ln>
+            <a:noFill/>
+          </a:ln>
+        </p:spPr>
+        <p:txBody>
+          <a:bodyPr anchorCtr="0" anchor="ctr" bIns="0" lIns="0" spcFirstLastPara="1" rIns="0" wrap="square" tIns="0">
+            <a:normAutofit fontScale="90000"/>
+          </a:bodyPr>
+          <a:lstStyle/>
+          <a:p>
+            <a:pPr indent="0" lvl="0" marL="0" rtl="0" algn="l">
+              <a:spcBef>
+                <a:spcPts val="0"/>
+              </a:spcBef>
+              <a:spcAft>
+                <a:spcPts val="0"/>
+              </a:spcAft>
+              <a:buNone/>
+            </a:pPr>
+            <a:r>
+              <a:rPr b="1" lang="en" sz="5333">
+                <a:solidFill>
+                  <a:srgbClr val="FAF9FE"/>
+                </a:solidFill>
+              </a:rPr>
+              <a:t>AI Vision Feasibility Tests</a:t>
+            </a:r>
+            <a:endParaRPr b="1" sz="5333">
+              <a:solidFill>
+                <a:srgbClr val="FAF9FE"/>
+              </a:solidFill>
+            </a:endParaRPr>
+          </a:p>
+        </p:txBody>
+      </p:sp>
+      <p:sp>
+        <p:nvSpPr>
+          <p:cNvPr id="262" name="Google Shape;262;p33"/>
           <p:cNvSpPr txBox="1"/>
           <p:nvPr/>
         </p:nvSpPr>
         <p:spPr>
           <a:xfrm>
-            <a:off x="150196" y="4567686"/>
+            <a:off x="150196" y="4567571"/>
             <a:ext cx="5734257" cy="1624359"/>
           </a:xfrm>
           <a:prstGeom prst="rect">
@@ -22756,11 +22975,11 @@
         </p:spPr>
         <p:txBody>
           <a:bodyPr anchorCtr="0" anchor="t" bIns="0" lIns="0" spcFirstLastPara="1" rIns="0" wrap="square" tIns="0">
-            <a:normAutofit/>
+            <a:normAutofit fontScale="70000" lnSpcReduction="10000"/>
           </a:bodyPr>
           <a:lstStyle/>
           <a:p>
-            <a:pPr indent="0" lvl="0" marL="0" rtl="0" algn="l">
+            <a:pPr indent="0" lvl="0" marL="0" marR="0" rtl="0" algn="l">
               <a:lnSpc>
                 <a:spcPct val="121818"/>
               </a:lnSpc>
@@ -22773,12 +22992,12 @@
               <a:buClr>
                 <a:srgbClr val="000000"/>
               </a:buClr>
-              <a:buSzPts val="4800"/>
+              <a:buSzPct val="138462"/>
               <a:buFont typeface="Arial"/>
               <a:buNone/>
             </a:pPr>
             <a:r>
-              <a:rPr b="1" lang="en" sz="4800">
+              <a:rPr b="1" lang="en" sz="3467">
                 <a:solidFill>
                   <a:srgbClr val="FFFFFF"/>
                 </a:solidFill>
@@ -22787,9 +23006,78 @@
                 <a:cs typeface="Proxima Nova"/>
                 <a:sym typeface="Proxima Nova"/>
               </a:rPr>
-              <a:t>{{ recipe_title }}</a:t>
+              <a:t>Site: {{ site }}</a:t>
             </a:r>
-            <a:endParaRPr sz="3840">
+            <a:br>
+              <a:rPr b="1" lang="en" sz="3467">
+                <a:solidFill>
+                  <a:srgbClr val="FFFFFF"/>
+                </a:solidFill>
+                <a:latin typeface="Proxima Nova"/>
+                <a:ea typeface="Proxima Nova"/>
+                <a:cs typeface="Proxima Nova"/>
+                <a:sym typeface="Proxima Nova"/>
+              </a:rPr>
+            </a:br>
+            <a:r>
+              <a:rPr b="1" lang="en" sz="3467">
+                <a:solidFill>
+                  <a:srgbClr val="FFFFFF"/>
+                </a:solidFill>
+                <a:latin typeface="Proxima Nova"/>
+                <a:ea typeface="Proxima Nova"/>
+                <a:cs typeface="Proxima Nova"/>
+                <a:sym typeface="Proxima Nova"/>
+              </a:rPr>
+              <a:t>Project: {{ project_name }}</a:t>
+            </a:r>
+            <a:br>
+              <a:rPr b="1" i="0" lang="en" sz="3467" u="none" cap="none" strike="noStrike">
+                <a:solidFill>
+                  <a:srgbClr val="FFFFFF"/>
+                </a:solidFill>
+                <a:latin typeface="Proxima Nova"/>
+                <a:ea typeface="Proxima Nova"/>
+                <a:cs typeface="Proxima Nova"/>
+                <a:sym typeface="Proxima Nova"/>
+              </a:rPr>
+            </a:br>
+            <a:r>
+              <a:rPr b="1" i="0" lang="en" sz="3467" u="none" cap="none" strike="noStrike">
+                <a:solidFill>
+                  <a:srgbClr val="FFFFFF"/>
+                </a:solidFill>
+                <a:latin typeface="Proxima Nova"/>
+                <a:ea typeface="Proxima Nova"/>
+                <a:cs typeface="Proxima Nova"/>
+                <a:sym typeface="Proxima Nova"/>
+              </a:rPr>
+              <a:t>Date: {{ date }}</a:t>
+            </a:r>
+            <a:br>
+              <a:rPr b="1" i="0" lang="en" sz="3467" u="none" cap="none" strike="noStrike">
+                <a:solidFill>
+                  <a:srgbClr val="FFFFFF"/>
+                </a:solidFill>
+                <a:latin typeface="Proxima Nova"/>
+                <a:ea typeface="Proxima Nova"/>
+                <a:cs typeface="Proxima Nova"/>
+                <a:sym typeface="Proxima Nova"/>
+              </a:rPr>
+            </a:br>
+            <a:r>
+              <a:rPr b="1" lang="en" sz="3467" u="none" cap="none" strike="noStrike">
+                <a:solidFill>
+                  <a:srgbClr val="FFFFFF"/>
+                </a:solidFill>
+                <a:latin typeface="Proxima Nova"/>
+                <a:ea typeface="Proxima Nova"/>
+                <a:cs typeface="Proxima Nova"/>
+                <a:sym typeface="Proxima Nova"/>
+              </a:rPr>
+              <a:t>Sales engineer name: {{ se_name }}</a:t>
+            </a:r>
+            <a:endParaRPr b="0" sz="2533" u="none" cap="none" strike="noStrike">
               <a:solidFill>
                 <a:srgbClr val="FFFFFF"/>
               </a:solidFill>
